--- a/docs/ForteAI_Cash_Control.pptx
+++ b/docs/ForteAI_Cash_Control.pptx
@@ -2,24 +2,24 @@
 <file path=ppt/presentation.xml><?xml version="1.0" encoding="utf-8"?>
 <p:presentation xmlns:p="http://schemas.openxmlformats.org/presentationml/2006/main">
   <p:sldMasterIdLst>
-    <p:sldMasterId xmlns:r="http://schemas.openxmlformats.org/officeDocument/2006/relationships" id="2147483648" r:id="R495b1a01b7bd46e1"/>
+    <p:sldMasterId xmlns:r="http://schemas.openxmlformats.org/officeDocument/2006/relationships" id="2147483648" r:id="Reee5cd4dc2b8428a"/>
   </p:sldMasterIdLst>
   <p:notesMasterIdLst>
-    <p:notesMasterId xmlns:r="http://schemas.openxmlformats.org/officeDocument/2006/relationships" r:id="R48cd607de3b74e8d"/>
+    <p:notesMasterId xmlns:r="http://schemas.openxmlformats.org/officeDocument/2006/relationships" r:id="R0d513ecd860b4203"/>
   </p:notesMasterIdLst>
   <p:sldIdLst>
-    <p:sldId xmlns:r="http://schemas.openxmlformats.org/officeDocument/2006/relationships" id="256" r:id="R36b6804fc0864ccf"/>
-    <p:sldId xmlns:r="http://schemas.openxmlformats.org/officeDocument/2006/relationships" id="257" r:id="R84e9f143ece94c4d"/>
-    <p:sldId xmlns:r="http://schemas.openxmlformats.org/officeDocument/2006/relationships" id="258" r:id="R2352987bfba140b3"/>
-    <p:sldId xmlns:r="http://schemas.openxmlformats.org/officeDocument/2006/relationships" id="259" r:id="R108facddd3cb464d"/>
-    <p:sldId xmlns:r="http://schemas.openxmlformats.org/officeDocument/2006/relationships" id="260" r:id="R5ea54dcf039940fb"/>
-    <p:sldId xmlns:r="http://schemas.openxmlformats.org/officeDocument/2006/relationships" id="261" r:id="R8f6214644ab54c2e"/>
-    <p:sldId xmlns:r="http://schemas.openxmlformats.org/officeDocument/2006/relationships" id="262" r:id="R4c663741673a4643"/>
-    <p:sldId xmlns:r="http://schemas.openxmlformats.org/officeDocument/2006/relationships" id="263" r:id="Rfda93c67a8194ede"/>
-    <p:sldId xmlns:r="http://schemas.openxmlformats.org/officeDocument/2006/relationships" id="264" r:id="R6e1315cd55014ca1"/>
-    <p:sldId xmlns:r="http://schemas.openxmlformats.org/officeDocument/2006/relationships" id="265" r:id="R86364739acfc4bad"/>
-    <p:sldId xmlns:r="http://schemas.openxmlformats.org/officeDocument/2006/relationships" id="266" r:id="Rdc83fbc158534e4d"/>
-    <p:sldId xmlns:r="http://schemas.openxmlformats.org/officeDocument/2006/relationships" id="267" r:id="R180dd389f8da4f30"/>
+    <p:sldId xmlns:r="http://schemas.openxmlformats.org/officeDocument/2006/relationships" id="256" r:id="Rc9b7769cfc614431"/>
+    <p:sldId xmlns:r="http://schemas.openxmlformats.org/officeDocument/2006/relationships" id="257" r:id="Rabf1c59053394f9a"/>
+    <p:sldId xmlns:r="http://schemas.openxmlformats.org/officeDocument/2006/relationships" id="258" r:id="Rab3e8b95174a4690"/>
+    <p:sldId xmlns:r="http://schemas.openxmlformats.org/officeDocument/2006/relationships" id="259" r:id="R27b584e72d254ee2"/>
+    <p:sldId xmlns:r="http://schemas.openxmlformats.org/officeDocument/2006/relationships" id="260" r:id="Rb9fd950ed83c4c0e"/>
+    <p:sldId xmlns:r="http://schemas.openxmlformats.org/officeDocument/2006/relationships" id="261" r:id="Rda3d47633b124366"/>
+    <p:sldId xmlns:r="http://schemas.openxmlformats.org/officeDocument/2006/relationships" id="262" r:id="R229a0fe1349f481e"/>
+    <p:sldId xmlns:r="http://schemas.openxmlformats.org/officeDocument/2006/relationships" id="263" r:id="R04a1b72ff70a426b"/>
+    <p:sldId xmlns:r="http://schemas.openxmlformats.org/officeDocument/2006/relationships" id="264" r:id="Rc235cb140a3249f3"/>
+    <p:sldId xmlns:r="http://schemas.openxmlformats.org/officeDocument/2006/relationships" id="265" r:id="Ra301c6915dc04d19"/>
+    <p:sldId xmlns:r="http://schemas.openxmlformats.org/officeDocument/2006/relationships" id="266" r:id="Re922c8150afe48ca"/>
+    <p:sldId xmlns:r="http://schemas.openxmlformats.org/officeDocument/2006/relationships" id="267" r:id="Refaee25ade83460b"/>
   </p:sldIdLst>
   <p:sldSz cx="12192000" cy="6858000"/>
   <p:notesSz cx="6858000" cy="9144000"/>
@@ -638,7 +638,7 @@
           <a:lstStyle xmlns:a="http://schemas.openxmlformats.org/drawingml/2006/main"/>
           <a:p xmlns:a="http://schemas.openxmlformats.org/drawingml/2006/main">
             <a:r>
-              <a:t>Текущая версия предоставляет полный пользовательский сценарий: загрузка MOV, локальный анализ и просмотр результата. Интерфейс адаптирован к телефону, планшету и компьютеру. Версия демонстрационная. Подтверждённой оценки качества на новых независимых записях нет, поэтому промышленное использование требует пилота, согласования критериев качества, правил и инфраструктуры. На момент подготовки локальное приложение и защищённый локальный шлюз доступны. Публичную временную ссылку не включаем: её DNS-проверка сейчас не прошла.</a:t>
+              <a:t>Текущая версия предоставляет полный пользовательский сценарий: загрузка MOV, локальный анализ и просмотр результата. Интерфейс адаптирован к телефону, планшету и компьютеру. Версия демонстрационная. Подтверждённой оценки качества на новых независимых записях нет, поэтому промышленное использование требует пилота, согласования критериев качества, правил и инфраструктуры. Актуальный адрес временного демо указан в разделе README для жюри. Доступ зависит от включённого компьютера команды и действующего туннеля.</a:t>
             </a:r>
           </a:p>
           <a:p xmlns:a="http://schemas.openxmlformats.org/drawingml/2006/main">
@@ -733,22 +733,7 @@
           <a:lstStyle xmlns:a="http://schemas.openxmlformats.org/drawingml/2006/main"/>
           <a:p xmlns:a="http://schemas.openxmlformats.org/drawingml/2006/main">
             <a:r>
-              <a:t>Предлагаем показать действующий сервис на выбранной заказчиком записи в формате MOV. На демонстрации можно пройти загрузку, посмотреть формат результата и обсудить удобство проверки. Следующий шаг к внедрению — ограниченный пилот с оператором и заранее согласованными критериями. Он нужен для подтверждения качества на новых камерах и записях. Ссылка открывает локальный интерфейс только на компьютере с запущенным сервисом. Постоянное размещение согласуется отдельно.</a:t>
-            </a:r>
-          </a:p>
-          <a:p xmlns:a="http://schemas.openxmlformats.org/drawingml/2006/main">
-            <a:r>
-              <a:t/>
-            </a:r>
-          </a:p>
-          <a:p xmlns:a="http://schemas.openxmlformats.org/drawingml/2006/main">
-            <a:r>
-              <a:t>Источники: cash_ml/app.py</a:t>
-            </a:r>
-          </a:p>
-          <a:p xmlns:a="http://schemas.openxmlformats.org/drawingml/2006/main">
-            <a:r>
-              <a:t>outputs/design_forte/verification.json</a:t>
+              <a:t>Предлагаем показать текущий сервис на выбранной заказчиком записи в формате MOV. Кнопка открывает раздел README с актуальным адресом демонстрации. Интерфейс и API требуют отдельных учётных данных, переданных жюри в форме заявки. Демо работает через временный туннель с компьютера команды. Для постоянного доступа требуется выделенный сервер. Версия приложения 1.0.1, активная модель typed_v2. Источник: https://github.com/aib2l2/forte-cash-control#demo</a:t>
             </a:r>
           </a:p>
         </p:txBody>
@@ -3911,12 +3896,12 @@
   </p:cSld>
   <p:clrMap bg1="lt1" tx1="dk1" bg2="lt2" tx2="dk2" accent1="accent1" accent2="accent2" accent3="accent3" accent4="accent4" accent5="accent5" accent6="accent6" hlink="hlink" folHlink="folHlink"/>
   <p:sldLayoutIdLst>
-    <p:sldLayoutId xmlns:r="http://schemas.openxmlformats.org/officeDocument/2006/relationships" id="2147483649" r:id="Rccc6008821f64afc"/>
-    <p:sldLayoutId xmlns:r="http://schemas.openxmlformats.org/officeDocument/2006/relationships" id="2147483650" r:id="R41d1970768ba4990"/>
-    <p:sldLayoutId xmlns:r="http://schemas.openxmlformats.org/officeDocument/2006/relationships" id="2147483651" r:id="R4fed1718fc6d4f5c"/>
-    <p:sldLayoutId xmlns:r="http://schemas.openxmlformats.org/officeDocument/2006/relationships" id="2147483652" r:id="R470b7e15c74f4838"/>
-    <p:sldLayoutId xmlns:r="http://schemas.openxmlformats.org/officeDocument/2006/relationships" id="2147483653" r:id="Rf72a7ed088074ec8"/>
-    <p:sldLayoutId xmlns:r="http://schemas.openxmlformats.org/officeDocument/2006/relationships" id="2147483654" r:id="R7b43661ac3804b64"/>
+    <p:sldLayoutId xmlns:r="http://schemas.openxmlformats.org/officeDocument/2006/relationships" id="2147483649" r:id="R06ec1752fef64bad"/>
+    <p:sldLayoutId xmlns:r="http://schemas.openxmlformats.org/officeDocument/2006/relationships" id="2147483650" r:id="R52746c661a3c4d09"/>
+    <p:sldLayoutId xmlns:r="http://schemas.openxmlformats.org/officeDocument/2006/relationships" id="2147483651" r:id="R6161b74abfe24a7c"/>
+    <p:sldLayoutId xmlns:r="http://schemas.openxmlformats.org/officeDocument/2006/relationships" id="2147483652" r:id="Re185069ec8c04e1c"/>
+    <p:sldLayoutId xmlns:r="http://schemas.openxmlformats.org/officeDocument/2006/relationships" id="2147483653" r:id="R3cef2c7e163448e6"/>
+    <p:sldLayoutId xmlns:r="http://schemas.openxmlformats.org/officeDocument/2006/relationships" id="2147483654" r:id="R025111c357944fbe"/>
   </p:sldLayoutIdLst>
   <p:txStyles>
     <p:titleStyle>
@@ -4505,6 +4490,7 @@
               </a:defRPr>
             </a:defPPr>
             <a:lvl1pPr algn="r">
+              <a:buNone/>
               <a:defRPr sz="1200" b="0">
                 <a:solidFill>
                   <a:srgbClr val="756873"/>
@@ -4515,6 +4501,7 @@
               </a:defRPr>
             </a:lvl1pPr>
             <a:lvl2pPr algn="r">
+              <a:buNone/>
               <a:defRPr sz="1200" b="0">
                 <a:solidFill>
                   <a:srgbClr val="756873"/>
@@ -4525,6 +4512,7 @@
               </a:defRPr>
             </a:lvl2pPr>
             <a:lvl3pPr algn="r">
+              <a:buNone/>
               <a:defRPr sz="1200" b="0">
                 <a:solidFill>
                   <a:srgbClr val="756873"/>
@@ -4535,6 +4523,7 @@
               </a:defRPr>
             </a:lvl3pPr>
             <a:lvl4pPr algn="r">
+              <a:buNone/>
               <a:defRPr sz="1200" b="0">
                 <a:solidFill>
                   <a:srgbClr val="756873"/>
@@ -4545,6 +4534,7 @@
               </a:defRPr>
             </a:lvl4pPr>
             <a:lvl5pPr algn="r">
+              <a:buNone/>
               <a:defRPr sz="1200" b="0">
                 <a:solidFill>
                   <a:srgbClr val="756873"/>
@@ -4555,6 +4545,7 @@
               </a:defRPr>
             </a:lvl5pPr>
             <a:lvl6pPr algn="r">
+              <a:buNone/>
               <a:defRPr sz="1200" b="0">
                 <a:solidFill>
                   <a:srgbClr val="756873"/>
@@ -4565,6 +4556,7 @@
               </a:defRPr>
             </a:lvl6pPr>
             <a:lvl7pPr algn="r">
+              <a:buNone/>
               <a:defRPr sz="1200" b="0">
                 <a:solidFill>
                   <a:srgbClr val="756873"/>
@@ -4575,6 +4567,7 @@
               </a:defRPr>
             </a:lvl7pPr>
             <a:lvl8pPr algn="r">
+              <a:buNone/>
               <a:defRPr sz="1200" b="0">
                 <a:solidFill>
                   <a:srgbClr val="756873"/>
@@ -4585,6 +4578,7 @@
               </a:defRPr>
             </a:lvl8pPr>
             <a:lvl9pPr algn="r">
+              <a:buNone/>
               <a:defRPr sz="1200" b="0">
                 <a:solidFill>
                   <a:srgbClr val="756873"/>
@@ -4597,6 +4591,7 @@
           </a:lstStyle>
           <a:p xmlns:a="http://schemas.openxmlformats.org/drawingml/2006/main">
             <a:pPr algn="r">
+              <a:buNone/>
               <a:defRPr sz="1200" b="0">
                 <a:solidFill>
                   <a:srgbClr val="756873"/>
@@ -4625,7 +4620,7 @@
           <p:cNvPr id="2" name="">
             <a:extLst xmlns:a="http://schemas.openxmlformats.org/drawingml/2006/main">
               <a:ext uri="{FF2B5EF4-FFF2-40B4-BE49-F238E27FC236}">
-                <a16:creationId xmlns:a16="http://schemas.microsoft.com/office/drawing/2014/main" id="{CC0F9CBB-FC8E-448D-B9EB-D64F8683D789}"/>
+                <a16:creationId xmlns:a16="http://schemas.microsoft.com/office/drawing/2014/main" id="{6CA1003B-1B75-4097-8DBE-ABA0F0B8DF6F}"/>
               </a:ext>
             </a:extLst>
           </p:cNvPr>
@@ -4635,10 +4630,10 @@
           <p:nvPr/>
         </p:nvPicPr>
         <p:blipFill>
-          <a:blip xmlns:r="http://schemas.openxmlformats.org/officeDocument/2006/relationships" xmlns:a="http://schemas.openxmlformats.org/drawingml/2006/main" r:embed="Rf20076d9e21b4cc0">
+          <a:blip xmlns:r="http://schemas.openxmlformats.org/officeDocument/2006/relationships" xmlns:a="http://schemas.openxmlformats.org/drawingml/2006/main" r:embed="R678129823f1e40ed">
             <a:extLst>
               <a:ext uri="{96DAC541-7B7A-43D3-8B79-37D633B846F1}">
-                <asvg:svgBlip xmlns:asvg="http://schemas.microsoft.com/office/drawing/2016/SVG/main" r:embed="R6f97db9e6e224f46"/>
+                <asvg:svgBlip xmlns:asvg="http://schemas.microsoft.com/office/drawing/2016/SVG/main" r:embed="Rd66709ba52aa4e62"/>
               </a:ext>
             </a:extLst>
           </a:blip>
@@ -4697,6 +4692,7 @@
               </a:defRPr>
             </a:defPPr>
             <a:lvl1pPr algn="l">
+              <a:buNone/>
               <a:defRPr sz="7650" b="1">
                 <a:solidFill>
                   <a:srgbClr val="4A0221"/>
@@ -4707,6 +4703,7 @@
               </a:defRPr>
             </a:lvl1pPr>
             <a:lvl2pPr algn="l">
+              <a:buNone/>
               <a:defRPr sz="7650" b="1">
                 <a:solidFill>
                   <a:srgbClr val="4A0221"/>
@@ -4717,6 +4714,7 @@
               </a:defRPr>
             </a:lvl2pPr>
             <a:lvl3pPr algn="l">
+              <a:buNone/>
               <a:defRPr sz="7650" b="1">
                 <a:solidFill>
                   <a:srgbClr val="4A0221"/>
@@ -4727,6 +4725,7 @@
               </a:defRPr>
             </a:lvl3pPr>
             <a:lvl4pPr algn="l">
+              <a:buNone/>
               <a:defRPr sz="7650" b="1">
                 <a:solidFill>
                   <a:srgbClr val="4A0221"/>
@@ -4737,6 +4736,7 @@
               </a:defRPr>
             </a:lvl4pPr>
             <a:lvl5pPr algn="l">
+              <a:buNone/>
               <a:defRPr sz="7650" b="1">
                 <a:solidFill>
                   <a:srgbClr val="4A0221"/>
@@ -4747,6 +4747,7 @@
               </a:defRPr>
             </a:lvl5pPr>
             <a:lvl6pPr algn="l">
+              <a:buNone/>
               <a:defRPr sz="7650" b="1">
                 <a:solidFill>
                   <a:srgbClr val="4A0221"/>
@@ -4757,6 +4758,7 @@
               </a:defRPr>
             </a:lvl6pPr>
             <a:lvl7pPr algn="l">
+              <a:buNone/>
               <a:defRPr sz="7650" b="1">
                 <a:solidFill>
                   <a:srgbClr val="4A0221"/>
@@ -4767,6 +4769,7 @@
               </a:defRPr>
             </a:lvl7pPr>
             <a:lvl8pPr algn="l">
+              <a:buNone/>
               <a:defRPr sz="7650" b="1">
                 <a:solidFill>
                   <a:srgbClr val="4A0221"/>
@@ -4777,6 +4780,7 @@
               </a:defRPr>
             </a:lvl8pPr>
             <a:lvl9pPr algn="l">
+              <a:buNone/>
               <a:defRPr sz="7650" b="1">
                 <a:solidFill>
                   <a:srgbClr val="4A0221"/>
@@ -4789,6 +4793,7 @@
           </a:lstStyle>
           <a:p xmlns:a="http://schemas.openxmlformats.org/drawingml/2006/main">
             <a:pPr algn="l">
+              <a:buNone/>
               <a:defRPr sz="7650" b="1">
                 <a:solidFill>
                   <a:srgbClr val="4A0221"/>
@@ -4855,6 +4860,7 @@
               </a:defRPr>
             </a:defPPr>
             <a:lvl1pPr algn="l">
+              <a:buNone/>
               <a:defRPr sz="4575" b="0">
                 <a:solidFill>
                   <a:srgbClr val="A31551"/>
@@ -4865,6 +4871,7 @@
               </a:defRPr>
             </a:lvl1pPr>
             <a:lvl2pPr algn="l">
+              <a:buNone/>
               <a:defRPr sz="4575" b="0">
                 <a:solidFill>
                   <a:srgbClr val="A31551"/>
@@ -4875,6 +4882,7 @@
               </a:defRPr>
             </a:lvl2pPr>
             <a:lvl3pPr algn="l">
+              <a:buNone/>
               <a:defRPr sz="4575" b="0">
                 <a:solidFill>
                   <a:srgbClr val="A31551"/>
@@ -4885,6 +4893,7 @@
               </a:defRPr>
             </a:lvl3pPr>
             <a:lvl4pPr algn="l">
+              <a:buNone/>
               <a:defRPr sz="4575" b="0">
                 <a:solidFill>
                   <a:srgbClr val="A31551"/>
@@ -4895,6 +4904,7 @@
               </a:defRPr>
             </a:lvl4pPr>
             <a:lvl5pPr algn="l">
+              <a:buNone/>
               <a:defRPr sz="4575" b="0">
                 <a:solidFill>
                   <a:srgbClr val="A31551"/>
@@ -4905,6 +4915,7 @@
               </a:defRPr>
             </a:lvl5pPr>
             <a:lvl6pPr algn="l">
+              <a:buNone/>
               <a:defRPr sz="4575" b="0">
                 <a:solidFill>
                   <a:srgbClr val="A31551"/>
@@ -4915,6 +4926,7 @@
               </a:defRPr>
             </a:lvl6pPr>
             <a:lvl7pPr algn="l">
+              <a:buNone/>
               <a:defRPr sz="4575" b="0">
                 <a:solidFill>
                   <a:srgbClr val="A31551"/>
@@ -4925,6 +4937,7 @@
               </a:defRPr>
             </a:lvl7pPr>
             <a:lvl8pPr algn="l">
+              <a:buNone/>
               <a:defRPr sz="4575" b="0">
                 <a:solidFill>
                   <a:srgbClr val="A31551"/>
@@ -4935,6 +4948,7 @@
               </a:defRPr>
             </a:lvl8pPr>
             <a:lvl9pPr algn="l">
+              <a:buNone/>
               <a:defRPr sz="4575" b="0">
                 <a:solidFill>
                   <a:srgbClr val="A31551"/>
@@ -4947,6 +4961,7 @@
           </a:lstStyle>
           <a:p xmlns:a="http://schemas.openxmlformats.org/drawingml/2006/main">
             <a:pPr algn="l">
+              <a:buNone/>
               <a:defRPr sz="4575" b="0">
                 <a:solidFill>
                   <a:srgbClr val="A31551"/>
@@ -5013,6 +5028,7 @@
               </a:defRPr>
             </a:defPPr>
             <a:lvl1pPr algn="l">
+              <a:buNone/>
               <a:defRPr sz="3000" b="0">
                 <a:solidFill>
                   <a:srgbClr val="2D2630"/>
@@ -5023,6 +5039,7 @@
               </a:defRPr>
             </a:lvl1pPr>
             <a:lvl2pPr algn="l">
+              <a:buNone/>
               <a:defRPr sz="3000" b="0">
                 <a:solidFill>
                   <a:srgbClr val="2D2630"/>
@@ -5033,6 +5050,7 @@
               </a:defRPr>
             </a:lvl2pPr>
             <a:lvl3pPr algn="l">
+              <a:buNone/>
               <a:defRPr sz="3000" b="0">
                 <a:solidFill>
                   <a:srgbClr val="2D2630"/>
@@ -5043,6 +5061,7 @@
               </a:defRPr>
             </a:lvl3pPr>
             <a:lvl4pPr algn="l">
+              <a:buNone/>
               <a:defRPr sz="3000" b="0">
                 <a:solidFill>
                   <a:srgbClr val="2D2630"/>
@@ -5053,6 +5072,7 @@
               </a:defRPr>
             </a:lvl4pPr>
             <a:lvl5pPr algn="l">
+              <a:buNone/>
               <a:defRPr sz="3000" b="0">
                 <a:solidFill>
                   <a:srgbClr val="2D2630"/>
@@ -5063,6 +5083,7 @@
               </a:defRPr>
             </a:lvl5pPr>
             <a:lvl6pPr algn="l">
+              <a:buNone/>
               <a:defRPr sz="3000" b="0">
                 <a:solidFill>
                   <a:srgbClr val="2D2630"/>
@@ -5073,6 +5094,7 @@
               </a:defRPr>
             </a:lvl6pPr>
             <a:lvl7pPr algn="l">
+              <a:buNone/>
               <a:defRPr sz="3000" b="0">
                 <a:solidFill>
                   <a:srgbClr val="2D2630"/>
@@ -5083,6 +5105,7 @@
               </a:defRPr>
             </a:lvl7pPr>
             <a:lvl8pPr algn="l">
+              <a:buNone/>
               <a:defRPr sz="3000" b="0">
                 <a:solidFill>
                   <a:srgbClr val="2D2630"/>
@@ -5093,6 +5116,7 @@
               </a:defRPr>
             </a:lvl8pPr>
             <a:lvl9pPr algn="l">
+              <a:buNone/>
               <a:defRPr sz="3000" b="0">
                 <a:solidFill>
                   <a:srgbClr val="2D2630"/>
@@ -5105,6 +5129,7 @@
           </a:lstStyle>
           <a:p xmlns:a="http://schemas.openxmlformats.org/drawingml/2006/main">
             <a:pPr algn="l">
+              <a:buNone/>
               <a:defRPr sz="3000" b="0">
                 <a:solidFill>
                   <a:srgbClr val="2D2630"/>
@@ -5128,6 +5153,7 @@
           </a:p>
           <a:p xmlns:a="http://schemas.openxmlformats.org/drawingml/2006/main">
             <a:pPr algn="l">
+              <a:buNone/>
               <a:defRPr sz="3000" b="0">
                 <a:solidFill>
                   <a:srgbClr val="2D2630"/>
@@ -5194,6 +5220,7 @@
               </a:defRPr>
             </a:defPPr>
             <a:lvl1pPr algn="l">
+              <a:buNone/>
               <a:defRPr sz="1875" b="0">
                 <a:solidFill>
                   <a:srgbClr val="756873"/>
@@ -5204,6 +5231,7 @@
               </a:defRPr>
             </a:lvl1pPr>
             <a:lvl2pPr algn="l">
+              <a:buNone/>
               <a:defRPr sz="1875" b="0">
                 <a:solidFill>
                   <a:srgbClr val="756873"/>
@@ -5214,6 +5242,7 @@
               </a:defRPr>
             </a:lvl2pPr>
             <a:lvl3pPr algn="l">
+              <a:buNone/>
               <a:defRPr sz="1875" b="0">
                 <a:solidFill>
                   <a:srgbClr val="756873"/>
@@ -5224,6 +5253,7 @@
               </a:defRPr>
             </a:lvl3pPr>
             <a:lvl4pPr algn="l">
+              <a:buNone/>
               <a:defRPr sz="1875" b="0">
                 <a:solidFill>
                   <a:srgbClr val="756873"/>
@@ -5234,6 +5264,7 @@
               </a:defRPr>
             </a:lvl4pPr>
             <a:lvl5pPr algn="l">
+              <a:buNone/>
               <a:defRPr sz="1875" b="0">
                 <a:solidFill>
                   <a:srgbClr val="756873"/>
@@ -5244,6 +5275,7 @@
               </a:defRPr>
             </a:lvl5pPr>
             <a:lvl6pPr algn="l">
+              <a:buNone/>
               <a:defRPr sz="1875" b="0">
                 <a:solidFill>
                   <a:srgbClr val="756873"/>
@@ -5254,6 +5286,7 @@
               </a:defRPr>
             </a:lvl6pPr>
             <a:lvl7pPr algn="l">
+              <a:buNone/>
               <a:defRPr sz="1875" b="0">
                 <a:solidFill>
                   <a:srgbClr val="756873"/>
@@ -5264,6 +5297,7 @@
               </a:defRPr>
             </a:lvl7pPr>
             <a:lvl8pPr algn="l">
+              <a:buNone/>
               <a:defRPr sz="1875" b="0">
                 <a:solidFill>
                   <a:srgbClr val="756873"/>
@@ -5274,6 +5308,7 @@
               </a:defRPr>
             </a:lvl8pPr>
             <a:lvl9pPr algn="l">
+              <a:buNone/>
               <a:defRPr sz="1875" b="0">
                 <a:solidFill>
                   <a:srgbClr val="756873"/>
@@ -5286,6 +5321,7 @@
           </a:lstStyle>
           <a:p xmlns:a="http://schemas.openxmlformats.org/drawingml/2006/main">
             <a:pPr algn="l">
+              <a:buNone/>
               <a:defRPr sz="1875" b="0">
                 <a:solidFill>
                   <a:srgbClr val="756873"/>
@@ -5381,6 +5417,7 @@
               </a:defRPr>
             </a:defPPr>
             <a:lvl1pPr algn="l">
+              <a:buNone/>
               <a:defRPr sz="3300" b="1">
                 <a:solidFill>
                   <a:srgbClr val="FFFFFF"/>
@@ -5391,6 +5428,7 @@
               </a:defRPr>
             </a:lvl1pPr>
             <a:lvl2pPr algn="l">
+              <a:buNone/>
               <a:defRPr sz="3300" b="1">
                 <a:solidFill>
                   <a:srgbClr val="FFFFFF"/>
@@ -5401,6 +5439,7 @@
               </a:defRPr>
             </a:lvl2pPr>
             <a:lvl3pPr algn="l">
+              <a:buNone/>
               <a:defRPr sz="3300" b="1">
                 <a:solidFill>
                   <a:srgbClr val="FFFFFF"/>
@@ -5411,6 +5450,7 @@
               </a:defRPr>
             </a:lvl3pPr>
             <a:lvl4pPr algn="l">
+              <a:buNone/>
               <a:defRPr sz="3300" b="1">
                 <a:solidFill>
                   <a:srgbClr val="FFFFFF"/>
@@ -5421,6 +5461,7 @@
               </a:defRPr>
             </a:lvl4pPr>
             <a:lvl5pPr algn="l">
+              <a:buNone/>
               <a:defRPr sz="3300" b="1">
                 <a:solidFill>
                   <a:srgbClr val="FFFFFF"/>
@@ -5431,6 +5472,7 @@
               </a:defRPr>
             </a:lvl5pPr>
             <a:lvl6pPr algn="l">
+              <a:buNone/>
               <a:defRPr sz="3300" b="1">
                 <a:solidFill>
                   <a:srgbClr val="FFFFFF"/>
@@ -5441,6 +5483,7 @@
               </a:defRPr>
             </a:lvl6pPr>
             <a:lvl7pPr algn="l">
+              <a:buNone/>
               <a:defRPr sz="3300" b="1">
                 <a:solidFill>
                   <a:srgbClr val="FFFFFF"/>
@@ -5451,6 +5494,7 @@
               </a:defRPr>
             </a:lvl7pPr>
             <a:lvl8pPr algn="l">
+              <a:buNone/>
               <a:defRPr sz="3300" b="1">
                 <a:solidFill>
                   <a:srgbClr val="FFFFFF"/>
@@ -5461,6 +5505,7 @@
               </a:defRPr>
             </a:lvl8pPr>
             <a:lvl9pPr algn="l">
+              <a:buNone/>
               <a:defRPr sz="3300" b="1">
                 <a:solidFill>
                   <a:srgbClr val="FFFFFF"/>
@@ -5473,6 +5518,7 @@
           </a:lstStyle>
           <a:p xmlns:a="http://schemas.openxmlformats.org/drawingml/2006/main">
             <a:pPr algn="l">
+              <a:buNone/>
               <a:defRPr sz="3300" b="1">
                 <a:solidFill>
                   <a:srgbClr val="FFFFFF"/>
@@ -5539,6 +5585,7 @@
               </a:defRPr>
             </a:defPPr>
             <a:lvl1pPr algn="r">
+              <a:buNone/>
               <a:defRPr sz="1200" b="0">
                 <a:solidFill>
                   <a:srgbClr val="C9A8B7"/>
@@ -5549,6 +5596,7 @@
               </a:defRPr>
             </a:lvl1pPr>
             <a:lvl2pPr algn="r">
+              <a:buNone/>
               <a:defRPr sz="1200" b="0">
                 <a:solidFill>
                   <a:srgbClr val="C9A8B7"/>
@@ -5559,6 +5607,7 @@
               </a:defRPr>
             </a:lvl2pPr>
             <a:lvl3pPr algn="r">
+              <a:buNone/>
               <a:defRPr sz="1200" b="0">
                 <a:solidFill>
                   <a:srgbClr val="C9A8B7"/>
@@ -5569,6 +5618,7 @@
               </a:defRPr>
             </a:lvl3pPr>
             <a:lvl4pPr algn="r">
+              <a:buNone/>
               <a:defRPr sz="1200" b="0">
                 <a:solidFill>
                   <a:srgbClr val="C9A8B7"/>
@@ -5579,6 +5629,7 @@
               </a:defRPr>
             </a:lvl4pPr>
             <a:lvl5pPr algn="r">
+              <a:buNone/>
               <a:defRPr sz="1200" b="0">
                 <a:solidFill>
                   <a:srgbClr val="C9A8B7"/>
@@ -5589,6 +5640,7 @@
               </a:defRPr>
             </a:lvl5pPr>
             <a:lvl6pPr algn="r">
+              <a:buNone/>
               <a:defRPr sz="1200" b="0">
                 <a:solidFill>
                   <a:srgbClr val="C9A8B7"/>
@@ -5599,6 +5651,7 @@
               </a:defRPr>
             </a:lvl6pPr>
             <a:lvl7pPr algn="r">
+              <a:buNone/>
               <a:defRPr sz="1200" b="0">
                 <a:solidFill>
                   <a:srgbClr val="C9A8B7"/>
@@ -5609,6 +5662,7 @@
               </a:defRPr>
             </a:lvl7pPr>
             <a:lvl8pPr algn="r">
+              <a:buNone/>
               <a:defRPr sz="1200" b="0">
                 <a:solidFill>
                   <a:srgbClr val="C9A8B7"/>
@@ -5619,6 +5673,7 @@
               </a:defRPr>
             </a:lvl8pPr>
             <a:lvl9pPr algn="r">
+              <a:buNone/>
               <a:defRPr sz="1200" b="0">
                 <a:solidFill>
                   <a:srgbClr val="C9A8B7"/>
@@ -5631,6 +5686,7 @@
           </a:lstStyle>
           <a:p xmlns:a="http://schemas.openxmlformats.org/drawingml/2006/main">
             <a:pPr algn="r">
+              <a:buNone/>
               <a:defRPr sz="1200" b="0">
                 <a:solidFill>
                   <a:srgbClr val="C9A8B7"/>
@@ -5697,6 +5753,7 @@
               </a:defRPr>
             </a:defPPr>
             <a:lvl1pPr algn="l">
+              <a:buNone/>
               <a:defRPr sz="4725" b="1">
                 <a:solidFill>
                   <a:srgbClr val="FFFFFF"/>
@@ -5707,6 +5764,7 @@
               </a:defRPr>
             </a:lvl1pPr>
             <a:lvl2pPr algn="l">
+              <a:buNone/>
               <a:defRPr sz="4725" b="1">
                 <a:solidFill>
                   <a:srgbClr val="FFFFFF"/>
@@ -5717,6 +5775,7 @@
               </a:defRPr>
             </a:lvl2pPr>
             <a:lvl3pPr algn="l">
+              <a:buNone/>
               <a:defRPr sz="4725" b="1">
                 <a:solidFill>
                   <a:srgbClr val="FFFFFF"/>
@@ -5727,6 +5786,7 @@
               </a:defRPr>
             </a:lvl3pPr>
             <a:lvl4pPr algn="l">
+              <a:buNone/>
               <a:defRPr sz="4725" b="1">
                 <a:solidFill>
                   <a:srgbClr val="FFFFFF"/>
@@ -5737,6 +5797,7 @@
               </a:defRPr>
             </a:lvl4pPr>
             <a:lvl5pPr algn="l">
+              <a:buNone/>
               <a:defRPr sz="4725" b="1">
                 <a:solidFill>
                   <a:srgbClr val="FFFFFF"/>
@@ -5747,6 +5808,7 @@
               </a:defRPr>
             </a:lvl5pPr>
             <a:lvl6pPr algn="l">
+              <a:buNone/>
               <a:defRPr sz="4725" b="1">
                 <a:solidFill>
                   <a:srgbClr val="FFFFFF"/>
@@ -5757,6 +5819,7 @@
               </a:defRPr>
             </a:lvl6pPr>
             <a:lvl7pPr algn="l">
+              <a:buNone/>
               <a:defRPr sz="4725" b="1">
                 <a:solidFill>
                   <a:srgbClr val="FFFFFF"/>
@@ -5767,6 +5830,7 @@
               </a:defRPr>
             </a:lvl7pPr>
             <a:lvl8pPr algn="l">
+              <a:buNone/>
               <a:defRPr sz="4725" b="1">
                 <a:solidFill>
                   <a:srgbClr val="FFFFFF"/>
@@ -5777,6 +5841,7 @@
               </a:defRPr>
             </a:lvl8pPr>
             <a:lvl9pPr algn="l">
+              <a:buNone/>
               <a:defRPr sz="4725" b="1">
                 <a:solidFill>
                   <a:srgbClr val="FFFFFF"/>
@@ -5789,6 +5854,7 @@
           </a:lstStyle>
           <a:p xmlns:a="http://schemas.openxmlformats.org/drawingml/2006/main">
             <a:pPr algn="l">
+              <a:buNone/>
               <a:defRPr sz="4725" b="1">
                 <a:solidFill>
                   <a:srgbClr val="FFFFFF"/>
@@ -5812,6 +5878,7 @@
           </a:p>
           <a:p xmlns:a="http://schemas.openxmlformats.org/drawingml/2006/main">
             <a:pPr algn="l">
+              <a:buNone/>
               <a:defRPr sz="4725" b="1">
                 <a:solidFill>
                   <a:srgbClr val="FFFFFF"/>
@@ -5878,6 +5945,7 @@
               </a:defRPr>
             </a:defPPr>
             <a:lvl1pPr algn="l">
+              <a:buNone/>
               <a:defRPr sz="2325" b="1">
                 <a:solidFill>
                   <a:srgbClr val="83DCEC"/>
@@ -5888,6 +5956,7 @@
               </a:defRPr>
             </a:lvl1pPr>
             <a:lvl2pPr algn="l">
+              <a:buNone/>
               <a:defRPr sz="2325" b="1">
                 <a:solidFill>
                   <a:srgbClr val="83DCEC"/>
@@ -5898,6 +5967,7 @@
               </a:defRPr>
             </a:lvl2pPr>
             <a:lvl3pPr algn="l">
+              <a:buNone/>
               <a:defRPr sz="2325" b="1">
                 <a:solidFill>
                   <a:srgbClr val="83DCEC"/>
@@ -5908,6 +5978,7 @@
               </a:defRPr>
             </a:lvl3pPr>
             <a:lvl4pPr algn="l">
+              <a:buNone/>
               <a:defRPr sz="2325" b="1">
                 <a:solidFill>
                   <a:srgbClr val="83DCEC"/>
@@ -5918,6 +5989,7 @@
               </a:defRPr>
             </a:lvl4pPr>
             <a:lvl5pPr algn="l">
+              <a:buNone/>
               <a:defRPr sz="2325" b="1">
                 <a:solidFill>
                   <a:srgbClr val="83DCEC"/>
@@ -5928,6 +6000,7 @@
               </a:defRPr>
             </a:lvl5pPr>
             <a:lvl6pPr algn="l">
+              <a:buNone/>
               <a:defRPr sz="2325" b="1">
                 <a:solidFill>
                   <a:srgbClr val="83DCEC"/>
@@ -5938,6 +6011,7 @@
               </a:defRPr>
             </a:lvl6pPr>
             <a:lvl7pPr algn="l">
+              <a:buNone/>
               <a:defRPr sz="2325" b="1">
                 <a:solidFill>
                   <a:srgbClr val="83DCEC"/>
@@ -5948,6 +6022,7 @@
               </a:defRPr>
             </a:lvl7pPr>
             <a:lvl8pPr algn="l">
+              <a:buNone/>
               <a:defRPr sz="2325" b="1">
                 <a:solidFill>
                   <a:srgbClr val="83DCEC"/>
@@ -5958,6 +6033,7 @@
               </a:defRPr>
             </a:lvl8pPr>
             <a:lvl9pPr algn="l">
+              <a:buNone/>
               <a:defRPr sz="2325" b="1">
                 <a:solidFill>
                   <a:srgbClr val="83DCEC"/>
@@ -5970,6 +6046,7 @@
           </a:lstStyle>
           <a:p xmlns:a="http://schemas.openxmlformats.org/drawingml/2006/main">
             <a:pPr algn="l">
+              <a:buNone/>
               <a:defRPr sz="2325" b="1">
                 <a:solidFill>
                   <a:srgbClr val="83DCEC"/>
@@ -6036,6 +6113,7 @@
               </a:defRPr>
             </a:defPPr>
             <a:lvl1pPr algn="l">
+              <a:buNone/>
               <a:defRPr sz="2250" b="0">
                 <a:solidFill>
                   <a:srgbClr val="F0E2E9"/>
@@ -6046,6 +6124,7 @@
               </a:defRPr>
             </a:lvl1pPr>
             <a:lvl2pPr algn="l">
+              <a:buNone/>
               <a:defRPr sz="2250" b="0">
                 <a:solidFill>
                   <a:srgbClr val="F0E2E9"/>
@@ -6056,6 +6135,7 @@
               </a:defRPr>
             </a:lvl2pPr>
             <a:lvl3pPr algn="l">
+              <a:buNone/>
               <a:defRPr sz="2250" b="0">
                 <a:solidFill>
                   <a:srgbClr val="F0E2E9"/>
@@ -6066,6 +6146,7 @@
               </a:defRPr>
             </a:lvl3pPr>
             <a:lvl4pPr algn="l">
+              <a:buNone/>
               <a:defRPr sz="2250" b="0">
                 <a:solidFill>
                   <a:srgbClr val="F0E2E9"/>
@@ -6076,6 +6157,7 @@
               </a:defRPr>
             </a:lvl4pPr>
             <a:lvl5pPr algn="l">
+              <a:buNone/>
               <a:defRPr sz="2250" b="0">
                 <a:solidFill>
                   <a:srgbClr val="F0E2E9"/>
@@ -6086,6 +6168,7 @@
               </a:defRPr>
             </a:lvl5pPr>
             <a:lvl6pPr algn="l">
+              <a:buNone/>
               <a:defRPr sz="2250" b="0">
                 <a:solidFill>
                   <a:srgbClr val="F0E2E9"/>
@@ -6096,6 +6179,7 @@
               </a:defRPr>
             </a:lvl6pPr>
             <a:lvl7pPr algn="l">
+              <a:buNone/>
               <a:defRPr sz="2250" b="0">
                 <a:solidFill>
                   <a:srgbClr val="F0E2E9"/>
@@ -6106,6 +6190,7 @@
               </a:defRPr>
             </a:lvl7pPr>
             <a:lvl8pPr algn="l">
+              <a:buNone/>
               <a:defRPr sz="2250" b="0">
                 <a:solidFill>
                   <a:srgbClr val="F0E2E9"/>
@@ -6116,6 +6201,7 @@
               </a:defRPr>
             </a:lvl8pPr>
             <a:lvl9pPr algn="l">
+              <a:buNone/>
               <a:defRPr sz="2250" b="0">
                 <a:solidFill>
                   <a:srgbClr val="F0E2E9"/>
@@ -6128,6 +6214,7 @@
           </a:lstStyle>
           <a:p xmlns:a="http://schemas.openxmlformats.org/drawingml/2006/main">
             <a:pPr algn="l">
+              <a:buNone/>
               <a:defRPr sz="2250" b="0">
                 <a:solidFill>
                   <a:srgbClr val="F0E2E9"/>
@@ -6194,6 +6281,7 @@
               </a:defRPr>
             </a:defPPr>
             <a:lvl1pPr algn="l">
+              <a:buNone/>
               <a:defRPr sz="2325" b="1">
                 <a:solidFill>
                   <a:srgbClr val="83DCEC"/>
@@ -6204,6 +6292,7 @@
               </a:defRPr>
             </a:lvl1pPr>
             <a:lvl2pPr algn="l">
+              <a:buNone/>
               <a:defRPr sz="2325" b="1">
                 <a:solidFill>
                   <a:srgbClr val="83DCEC"/>
@@ -6214,6 +6303,7 @@
               </a:defRPr>
             </a:lvl2pPr>
             <a:lvl3pPr algn="l">
+              <a:buNone/>
               <a:defRPr sz="2325" b="1">
                 <a:solidFill>
                   <a:srgbClr val="83DCEC"/>
@@ -6224,6 +6314,7 @@
               </a:defRPr>
             </a:lvl3pPr>
             <a:lvl4pPr algn="l">
+              <a:buNone/>
               <a:defRPr sz="2325" b="1">
                 <a:solidFill>
                   <a:srgbClr val="83DCEC"/>
@@ -6234,6 +6325,7 @@
               </a:defRPr>
             </a:lvl4pPr>
             <a:lvl5pPr algn="l">
+              <a:buNone/>
               <a:defRPr sz="2325" b="1">
                 <a:solidFill>
                   <a:srgbClr val="83DCEC"/>
@@ -6244,6 +6336,7 @@
               </a:defRPr>
             </a:lvl5pPr>
             <a:lvl6pPr algn="l">
+              <a:buNone/>
               <a:defRPr sz="2325" b="1">
                 <a:solidFill>
                   <a:srgbClr val="83DCEC"/>
@@ -6254,6 +6347,7 @@
               </a:defRPr>
             </a:lvl6pPr>
             <a:lvl7pPr algn="l">
+              <a:buNone/>
               <a:defRPr sz="2325" b="1">
                 <a:solidFill>
                   <a:srgbClr val="83DCEC"/>
@@ -6264,6 +6358,7 @@
               </a:defRPr>
             </a:lvl7pPr>
             <a:lvl8pPr algn="l">
+              <a:buNone/>
               <a:defRPr sz="2325" b="1">
                 <a:solidFill>
                   <a:srgbClr val="83DCEC"/>
@@ -6274,6 +6369,7 @@
               </a:defRPr>
             </a:lvl8pPr>
             <a:lvl9pPr algn="l">
+              <a:buNone/>
               <a:defRPr sz="2325" b="1">
                 <a:solidFill>
                   <a:srgbClr val="83DCEC"/>
@@ -6286,6 +6382,7 @@
           </a:lstStyle>
           <a:p xmlns:a="http://schemas.openxmlformats.org/drawingml/2006/main">
             <a:pPr algn="l">
+              <a:buNone/>
               <a:defRPr sz="2325" b="1">
                 <a:solidFill>
                   <a:srgbClr val="83DCEC"/>
@@ -6352,6 +6449,7 @@
               </a:defRPr>
             </a:defPPr>
             <a:lvl1pPr algn="l">
+              <a:buNone/>
               <a:defRPr sz="2250" b="0">
                 <a:solidFill>
                   <a:srgbClr val="F0E2E9"/>
@@ -6362,6 +6460,7 @@
               </a:defRPr>
             </a:lvl1pPr>
             <a:lvl2pPr algn="l">
+              <a:buNone/>
               <a:defRPr sz="2250" b="0">
                 <a:solidFill>
                   <a:srgbClr val="F0E2E9"/>
@@ -6372,6 +6471,7 @@
               </a:defRPr>
             </a:lvl2pPr>
             <a:lvl3pPr algn="l">
+              <a:buNone/>
               <a:defRPr sz="2250" b="0">
                 <a:solidFill>
                   <a:srgbClr val="F0E2E9"/>
@@ -6382,6 +6482,7 @@
               </a:defRPr>
             </a:lvl3pPr>
             <a:lvl4pPr algn="l">
+              <a:buNone/>
               <a:defRPr sz="2250" b="0">
                 <a:solidFill>
                   <a:srgbClr val="F0E2E9"/>
@@ -6392,6 +6493,7 @@
               </a:defRPr>
             </a:lvl4pPr>
             <a:lvl5pPr algn="l">
+              <a:buNone/>
               <a:defRPr sz="2250" b="0">
                 <a:solidFill>
                   <a:srgbClr val="F0E2E9"/>
@@ -6402,6 +6504,7 @@
               </a:defRPr>
             </a:lvl5pPr>
             <a:lvl6pPr algn="l">
+              <a:buNone/>
               <a:defRPr sz="2250" b="0">
                 <a:solidFill>
                   <a:srgbClr val="F0E2E9"/>
@@ -6412,6 +6515,7 @@
               </a:defRPr>
             </a:lvl6pPr>
             <a:lvl7pPr algn="l">
+              <a:buNone/>
               <a:defRPr sz="2250" b="0">
                 <a:solidFill>
                   <a:srgbClr val="F0E2E9"/>
@@ -6422,6 +6526,7 @@
               </a:defRPr>
             </a:lvl7pPr>
             <a:lvl8pPr algn="l">
+              <a:buNone/>
               <a:defRPr sz="2250" b="0">
                 <a:solidFill>
                   <a:srgbClr val="F0E2E9"/>
@@ -6432,6 +6537,7 @@
               </a:defRPr>
             </a:lvl8pPr>
             <a:lvl9pPr algn="l">
+              <a:buNone/>
               <a:defRPr sz="2250" b="0">
                 <a:solidFill>
                   <a:srgbClr val="F0E2E9"/>
@@ -6444,6 +6550,7 @@
           </a:lstStyle>
           <a:p xmlns:a="http://schemas.openxmlformats.org/drawingml/2006/main">
             <a:pPr algn="l">
+              <a:buNone/>
               <a:defRPr sz="2250" b="0">
                 <a:solidFill>
                   <a:srgbClr val="F0E2E9"/>
@@ -6539,6 +6646,7 @@
               </a:defRPr>
             </a:defPPr>
             <a:lvl1pPr algn="l">
+              <a:buNone/>
               <a:defRPr sz="3300" b="1">
                 <a:solidFill>
                   <a:srgbClr val="4A0221"/>
@@ -6549,6 +6657,7 @@
               </a:defRPr>
             </a:lvl1pPr>
             <a:lvl2pPr algn="l">
+              <a:buNone/>
               <a:defRPr sz="3300" b="1">
                 <a:solidFill>
                   <a:srgbClr val="4A0221"/>
@@ -6559,6 +6668,7 @@
               </a:defRPr>
             </a:lvl2pPr>
             <a:lvl3pPr algn="l">
+              <a:buNone/>
               <a:defRPr sz="3300" b="1">
                 <a:solidFill>
                   <a:srgbClr val="4A0221"/>
@@ -6569,6 +6679,7 @@
               </a:defRPr>
             </a:lvl3pPr>
             <a:lvl4pPr algn="l">
+              <a:buNone/>
               <a:defRPr sz="3300" b="1">
                 <a:solidFill>
                   <a:srgbClr val="4A0221"/>
@@ -6579,6 +6690,7 @@
               </a:defRPr>
             </a:lvl4pPr>
             <a:lvl5pPr algn="l">
+              <a:buNone/>
               <a:defRPr sz="3300" b="1">
                 <a:solidFill>
                   <a:srgbClr val="4A0221"/>
@@ -6589,6 +6701,7 @@
               </a:defRPr>
             </a:lvl5pPr>
             <a:lvl6pPr algn="l">
+              <a:buNone/>
               <a:defRPr sz="3300" b="1">
                 <a:solidFill>
                   <a:srgbClr val="4A0221"/>
@@ -6599,6 +6712,7 @@
               </a:defRPr>
             </a:lvl6pPr>
             <a:lvl7pPr algn="l">
+              <a:buNone/>
               <a:defRPr sz="3300" b="1">
                 <a:solidFill>
                   <a:srgbClr val="4A0221"/>
@@ -6609,6 +6723,7 @@
               </a:defRPr>
             </a:lvl7pPr>
             <a:lvl8pPr algn="l">
+              <a:buNone/>
               <a:defRPr sz="3300" b="1">
                 <a:solidFill>
                   <a:srgbClr val="4A0221"/>
@@ -6619,6 +6734,7 @@
               </a:defRPr>
             </a:lvl8pPr>
             <a:lvl9pPr algn="l">
+              <a:buNone/>
               <a:defRPr sz="3300" b="1">
                 <a:solidFill>
                   <a:srgbClr val="4A0221"/>
@@ -6631,6 +6747,7 @@
           </a:lstStyle>
           <a:p xmlns:a="http://schemas.openxmlformats.org/drawingml/2006/main">
             <a:pPr algn="l">
+              <a:buNone/>
               <a:defRPr sz="3300" b="1">
                 <a:solidFill>
                   <a:srgbClr val="4A0221"/>
@@ -6697,6 +6814,7 @@
               </a:defRPr>
             </a:defPPr>
             <a:lvl1pPr algn="r">
+              <a:buNone/>
               <a:defRPr sz="1200" b="0">
                 <a:solidFill>
                   <a:srgbClr val="756873"/>
@@ -6707,6 +6825,7 @@
               </a:defRPr>
             </a:lvl1pPr>
             <a:lvl2pPr algn="r">
+              <a:buNone/>
               <a:defRPr sz="1200" b="0">
                 <a:solidFill>
                   <a:srgbClr val="756873"/>
@@ -6717,6 +6836,7 @@
               </a:defRPr>
             </a:lvl2pPr>
             <a:lvl3pPr algn="r">
+              <a:buNone/>
               <a:defRPr sz="1200" b="0">
                 <a:solidFill>
                   <a:srgbClr val="756873"/>
@@ -6727,6 +6847,7 @@
               </a:defRPr>
             </a:lvl3pPr>
             <a:lvl4pPr algn="r">
+              <a:buNone/>
               <a:defRPr sz="1200" b="0">
                 <a:solidFill>
                   <a:srgbClr val="756873"/>
@@ -6737,6 +6858,7 @@
               </a:defRPr>
             </a:lvl4pPr>
             <a:lvl5pPr algn="r">
+              <a:buNone/>
               <a:defRPr sz="1200" b="0">
                 <a:solidFill>
                   <a:srgbClr val="756873"/>
@@ -6747,6 +6869,7 @@
               </a:defRPr>
             </a:lvl5pPr>
             <a:lvl6pPr algn="r">
+              <a:buNone/>
               <a:defRPr sz="1200" b="0">
                 <a:solidFill>
                   <a:srgbClr val="756873"/>
@@ -6757,6 +6880,7 @@
               </a:defRPr>
             </a:lvl6pPr>
             <a:lvl7pPr algn="r">
+              <a:buNone/>
               <a:defRPr sz="1200" b="0">
                 <a:solidFill>
                   <a:srgbClr val="756873"/>
@@ -6767,6 +6891,7 @@
               </a:defRPr>
             </a:lvl7pPr>
             <a:lvl8pPr algn="r">
+              <a:buNone/>
               <a:defRPr sz="1200" b="0">
                 <a:solidFill>
                   <a:srgbClr val="756873"/>
@@ -6777,6 +6902,7 @@
               </a:defRPr>
             </a:lvl8pPr>
             <a:lvl9pPr algn="r">
+              <a:buNone/>
               <a:defRPr sz="1200" b="0">
                 <a:solidFill>
                   <a:srgbClr val="756873"/>
@@ -6789,6 +6915,7 @@
           </a:lstStyle>
           <a:p xmlns:a="http://schemas.openxmlformats.org/drawingml/2006/main">
             <a:pPr algn="r">
+              <a:buNone/>
               <a:defRPr sz="1200" b="0">
                 <a:solidFill>
                   <a:srgbClr val="756873"/>
@@ -6855,6 +6982,7 @@
               </a:defRPr>
             </a:defPPr>
             <a:lvl1pPr algn="l">
+              <a:buNone/>
               <a:defRPr sz="4125" b="1">
                 <a:solidFill>
                   <a:srgbClr val="4A0221"/>
@@ -6865,6 +6993,7 @@
               </a:defRPr>
             </a:lvl1pPr>
             <a:lvl2pPr algn="l">
+              <a:buNone/>
               <a:defRPr sz="4125" b="1">
                 <a:solidFill>
                   <a:srgbClr val="4A0221"/>
@@ -6875,6 +7004,7 @@
               </a:defRPr>
             </a:lvl2pPr>
             <a:lvl3pPr algn="l">
+              <a:buNone/>
               <a:defRPr sz="4125" b="1">
                 <a:solidFill>
                   <a:srgbClr val="4A0221"/>
@@ -6885,6 +7015,7 @@
               </a:defRPr>
             </a:lvl3pPr>
             <a:lvl4pPr algn="l">
+              <a:buNone/>
               <a:defRPr sz="4125" b="1">
                 <a:solidFill>
                   <a:srgbClr val="4A0221"/>
@@ -6895,6 +7026,7 @@
               </a:defRPr>
             </a:lvl4pPr>
             <a:lvl5pPr algn="l">
+              <a:buNone/>
               <a:defRPr sz="4125" b="1">
                 <a:solidFill>
                   <a:srgbClr val="4A0221"/>
@@ -6905,6 +7037,7 @@
               </a:defRPr>
             </a:lvl5pPr>
             <a:lvl6pPr algn="l">
+              <a:buNone/>
               <a:defRPr sz="4125" b="1">
                 <a:solidFill>
                   <a:srgbClr val="4A0221"/>
@@ -6915,6 +7048,7 @@
               </a:defRPr>
             </a:lvl6pPr>
             <a:lvl7pPr algn="l">
+              <a:buNone/>
               <a:defRPr sz="4125" b="1">
                 <a:solidFill>
                   <a:srgbClr val="4A0221"/>
@@ -6925,6 +7059,7 @@
               </a:defRPr>
             </a:lvl7pPr>
             <a:lvl8pPr algn="l">
+              <a:buNone/>
               <a:defRPr sz="4125" b="1">
                 <a:solidFill>
                   <a:srgbClr val="4A0221"/>
@@ -6935,6 +7070,7 @@
               </a:defRPr>
             </a:lvl8pPr>
             <a:lvl9pPr algn="l">
+              <a:buNone/>
               <a:defRPr sz="4125" b="1">
                 <a:solidFill>
                   <a:srgbClr val="4A0221"/>
@@ -6947,6 +7083,7 @@
           </a:lstStyle>
           <a:p xmlns:a="http://schemas.openxmlformats.org/drawingml/2006/main">
             <a:pPr algn="l">
+              <a:buNone/>
               <a:defRPr sz="4125" b="1">
                 <a:solidFill>
                   <a:srgbClr val="4A0221"/>
@@ -6970,6 +7107,7 @@
           </a:p>
           <a:p xmlns:a="http://schemas.openxmlformats.org/drawingml/2006/main">
             <a:pPr algn="l">
+              <a:buNone/>
               <a:defRPr sz="4125" b="1">
                 <a:solidFill>
                   <a:srgbClr val="4A0221"/>
@@ -7036,6 +7174,7 @@
               </a:defRPr>
             </a:defPPr>
             <a:lvl1pPr algn="l">
+              <a:buNone/>
               <a:defRPr sz="2325" b="0">
                 <a:solidFill>
                   <a:srgbClr val="2D2630"/>
@@ -7046,6 +7185,7 @@
               </a:defRPr>
             </a:lvl1pPr>
             <a:lvl2pPr algn="l">
+              <a:buNone/>
               <a:defRPr sz="2325" b="0">
                 <a:solidFill>
                   <a:srgbClr val="2D2630"/>
@@ -7056,6 +7196,7 @@
               </a:defRPr>
             </a:lvl2pPr>
             <a:lvl3pPr algn="l">
+              <a:buNone/>
               <a:defRPr sz="2325" b="0">
                 <a:solidFill>
                   <a:srgbClr val="2D2630"/>
@@ -7066,6 +7207,7 @@
               </a:defRPr>
             </a:lvl3pPr>
             <a:lvl4pPr algn="l">
+              <a:buNone/>
               <a:defRPr sz="2325" b="0">
                 <a:solidFill>
                   <a:srgbClr val="2D2630"/>
@@ -7076,6 +7218,7 @@
               </a:defRPr>
             </a:lvl4pPr>
             <a:lvl5pPr algn="l">
+              <a:buNone/>
               <a:defRPr sz="2325" b="0">
                 <a:solidFill>
                   <a:srgbClr val="2D2630"/>
@@ -7086,6 +7229,7 @@
               </a:defRPr>
             </a:lvl5pPr>
             <a:lvl6pPr algn="l">
+              <a:buNone/>
               <a:defRPr sz="2325" b="0">
                 <a:solidFill>
                   <a:srgbClr val="2D2630"/>
@@ -7096,6 +7240,7 @@
               </a:defRPr>
             </a:lvl6pPr>
             <a:lvl7pPr algn="l">
+              <a:buNone/>
               <a:defRPr sz="2325" b="0">
                 <a:solidFill>
                   <a:srgbClr val="2D2630"/>
@@ -7106,6 +7251,7 @@
               </a:defRPr>
             </a:lvl7pPr>
             <a:lvl8pPr algn="l">
+              <a:buNone/>
               <a:defRPr sz="2325" b="0">
                 <a:solidFill>
                   <a:srgbClr val="2D2630"/>
@@ -7116,6 +7262,7 @@
               </a:defRPr>
             </a:lvl8pPr>
             <a:lvl9pPr algn="l">
+              <a:buNone/>
               <a:defRPr sz="2325" b="0">
                 <a:solidFill>
                   <a:srgbClr val="2D2630"/>
@@ -7128,6 +7275,7 @@
           </a:lstStyle>
           <a:p xmlns:a="http://schemas.openxmlformats.org/drawingml/2006/main">
             <a:pPr algn="l">
+              <a:buNone/>
               <a:defRPr sz="2325" b="0">
                 <a:solidFill>
                   <a:srgbClr val="2D2630"/>
@@ -7151,6 +7299,7 @@
           </a:p>
           <a:p xmlns:a="http://schemas.openxmlformats.org/drawingml/2006/main">
             <a:pPr algn="l">
+              <a:buNone/>
               <a:defRPr sz="2325" b="0">
                 <a:solidFill>
                   <a:srgbClr val="2D2630"/>
@@ -7174,6 +7323,7 @@
           </a:p>
           <a:p xmlns:a="http://schemas.openxmlformats.org/drawingml/2006/main">
             <a:pPr algn="l">
+              <a:buNone/>
               <a:defRPr sz="2325" b="0">
                 <a:solidFill>
                   <a:srgbClr val="2D2630"/>
@@ -7240,6 +7390,7 @@
               </a:defRPr>
             </a:defPPr>
             <a:lvl1pPr algn="l">
+              <a:buNone/>
               <a:defRPr sz="1725" b="0">
                 <a:solidFill>
                   <a:srgbClr val="756873"/>
@@ -7250,6 +7401,7 @@
               </a:defRPr>
             </a:lvl1pPr>
             <a:lvl2pPr algn="l">
+              <a:buNone/>
               <a:defRPr sz="1725" b="0">
                 <a:solidFill>
                   <a:srgbClr val="756873"/>
@@ -7260,6 +7412,7 @@
               </a:defRPr>
             </a:lvl2pPr>
             <a:lvl3pPr algn="l">
+              <a:buNone/>
               <a:defRPr sz="1725" b="0">
                 <a:solidFill>
                   <a:srgbClr val="756873"/>
@@ -7270,6 +7423,7 @@
               </a:defRPr>
             </a:lvl3pPr>
             <a:lvl4pPr algn="l">
+              <a:buNone/>
               <a:defRPr sz="1725" b="0">
                 <a:solidFill>
                   <a:srgbClr val="756873"/>
@@ -7280,6 +7434,7 @@
               </a:defRPr>
             </a:lvl4pPr>
             <a:lvl5pPr algn="l">
+              <a:buNone/>
               <a:defRPr sz="1725" b="0">
                 <a:solidFill>
                   <a:srgbClr val="756873"/>
@@ -7290,6 +7445,7 @@
               </a:defRPr>
             </a:lvl5pPr>
             <a:lvl6pPr algn="l">
+              <a:buNone/>
               <a:defRPr sz="1725" b="0">
                 <a:solidFill>
                   <a:srgbClr val="756873"/>
@@ -7300,6 +7456,7 @@
               </a:defRPr>
             </a:lvl6pPr>
             <a:lvl7pPr algn="l">
+              <a:buNone/>
               <a:defRPr sz="1725" b="0">
                 <a:solidFill>
                   <a:srgbClr val="756873"/>
@@ -7310,6 +7467,7 @@
               </a:defRPr>
             </a:lvl7pPr>
             <a:lvl8pPr algn="l">
+              <a:buNone/>
               <a:defRPr sz="1725" b="0">
                 <a:solidFill>
                   <a:srgbClr val="756873"/>
@@ -7320,6 +7478,7 @@
               </a:defRPr>
             </a:lvl8pPr>
             <a:lvl9pPr algn="l">
+              <a:buNone/>
               <a:defRPr sz="1725" b="0">
                 <a:solidFill>
                   <a:srgbClr val="756873"/>
@@ -7332,6 +7491,7 @@
           </a:lstStyle>
           <a:p xmlns:a="http://schemas.openxmlformats.org/drawingml/2006/main">
             <a:pPr algn="l">
+              <a:buNone/>
               <a:defRPr sz="1725" b="0">
                 <a:solidFill>
                   <a:srgbClr val="756873"/>
@@ -7355,6 +7515,7 @@
           </a:p>
           <a:p xmlns:a="http://schemas.openxmlformats.org/drawingml/2006/main">
             <a:pPr algn="l">
+              <a:buNone/>
               <a:defRPr sz="1725" b="0">
                 <a:solidFill>
                   <a:srgbClr val="756873"/>
@@ -7378,6 +7539,7 @@
           </a:p>
           <a:p xmlns:a="http://schemas.openxmlformats.org/drawingml/2006/main">
             <a:pPr algn="l">
+              <a:buNone/>
               <a:defRPr sz="1725" b="0">
                 <a:solidFill>
                   <a:srgbClr val="756873"/>
@@ -7406,7 +7568,7 @@
           <p:cNvPr id="6" name="">
             <a:extLst xmlns:a="http://schemas.openxmlformats.org/drawingml/2006/main">
               <a:ext uri="{FF2B5EF4-FFF2-40B4-BE49-F238E27FC236}">
-                <a16:creationId xmlns:a16="http://schemas.microsoft.com/office/drawing/2014/main" id="{A1C8D35B-7E6D-4D3B-845C-0D0A98A750B3}"/>
+                <a16:creationId xmlns:a16="http://schemas.microsoft.com/office/drawing/2014/main" id="{6A54F561-DD42-45DF-AF13-808A9819E44C}"/>
               </a:ext>
             </a:extLst>
           </p:cNvPr>
@@ -7416,7 +7578,7 @@
           <p:nvPr/>
         </p:nvPicPr>
         <p:blipFill>
-          <a:blip xmlns:r="http://schemas.openxmlformats.org/officeDocument/2006/relationships" xmlns:a="http://schemas.openxmlformats.org/drawingml/2006/main" r:embed="R5106fcd66f274624"/>
+          <a:blip xmlns:r="http://schemas.openxmlformats.org/officeDocument/2006/relationships" xmlns:a="http://schemas.openxmlformats.org/drawingml/2006/main" r:embed="R1b300582bc6a4552"/>
           <a:stretch xmlns:a="http://schemas.openxmlformats.org/drawingml/2006/main"/>
         </p:blipFill>
         <p:spPr>
@@ -7501,6 +7663,7 @@
               </a:defRPr>
             </a:defPPr>
             <a:lvl1pPr algn="l">
+              <a:buNone/>
               <a:defRPr sz="3300" b="1">
                 <a:solidFill>
                   <a:srgbClr val="FFFFFF"/>
@@ -7511,6 +7674,7 @@
               </a:defRPr>
             </a:lvl1pPr>
             <a:lvl2pPr algn="l">
+              <a:buNone/>
               <a:defRPr sz="3300" b="1">
                 <a:solidFill>
                   <a:srgbClr val="FFFFFF"/>
@@ -7521,6 +7685,7 @@
               </a:defRPr>
             </a:lvl2pPr>
             <a:lvl3pPr algn="l">
+              <a:buNone/>
               <a:defRPr sz="3300" b="1">
                 <a:solidFill>
                   <a:srgbClr val="FFFFFF"/>
@@ -7531,6 +7696,7 @@
               </a:defRPr>
             </a:lvl3pPr>
             <a:lvl4pPr algn="l">
+              <a:buNone/>
               <a:defRPr sz="3300" b="1">
                 <a:solidFill>
                   <a:srgbClr val="FFFFFF"/>
@@ -7541,6 +7707,7 @@
               </a:defRPr>
             </a:lvl4pPr>
             <a:lvl5pPr algn="l">
+              <a:buNone/>
               <a:defRPr sz="3300" b="1">
                 <a:solidFill>
                   <a:srgbClr val="FFFFFF"/>
@@ -7551,6 +7718,7 @@
               </a:defRPr>
             </a:lvl5pPr>
             <a:lvl6pPr algn="l">
+              <a:buNone/>
               <a:defRPr sz="3300" b="1">
                 <a:solidFill>
                   <a:srgbClr val="FFFFFF"/>
@@ -7561,6 +7729,7 @@
               </a:defRPr>
             </a:lvl6pPr>
             <a:lvl7pPr algn="l">
+              <a:buNone/>
               <a:defRPr sz="3300" b="1">
                 <a:solidFill>
                   <a:srgbClr val="FFFFFF"/>
@@ -7571,6 +7740,7 @@
               </a:defRPr>
             </a:lvl7pPr>
             <a:lvl8pPr algn="l">
+              <a:buNone/>
               <a:defRPr sz="3300" b="1">
                 <a:solidFill>
                   <a:srgbClr val="FFFFFF"/>
@@ -7581,6 +7751,7 @@
               </a:defRPr>
             </a:lvl8pPr>
             <a:lvl9pPr algn="l">
+              <a:buNone/>
               <a:defRPr sz="3300" b="1">
                 <a:solidFill>
                   <a:srgbClr val="FFFFFF"/>
@@ -7593,6 +7764,7 @@
           </a:lstStyle>
           <a:p xmlns:a="http://schemas.openxmlformats.org/drawingml/2006/main">
             <a:pPr algn="l">
+              <a:buNone/>
               <a:defRPr sz="3300" b="1">
                 <a:solidFill>
                   <a:srgbClr val="FFFFFF"/>
@@ -7659,6 +7831,7 @@
               </a:defRPr>
             </a:defPPr>
             <a:lvl1pPr algn="r">
+              <a:buNone/>
               <a:defRPr sz="1200" b="0">
                 <a:solidFill>
                   <a:srgbClr val="C9A8B7"/>
@@ -7669,6 +7842,7 @@
               </a:defRPr>
             </a:lvl1pPr>
             <a:lvl2pPr algn="r">
+              <a:buNone/>
               <a:defRPr sz="1200" b="0">
                 <a:solidFill>
                   <a:srgbClr val="C9A8B7"/>
@@ -7679,6 +7853,7 @@
               </a:defRPr>
             </a:lvl2pPr>
             <a:lvl3pPr algn="r">
+              <a:buNone/>
               <a:defRPr sz="1200" b="0">
                 <a:solidFill>
                   <a:srgbClr val="C9A8B7"/>
@@ -7689,6 +7864,7 @@
               </a:defRPr>
             </a:lvl3pPr>
             <a:lvl4pPr algn="r">
+              <a:buNone/>
               <a:defRPr sz="1200" b="0">
                 <a:solidFill>
                   <a:srgbClr val="C9A8B7"/>
@@ -7699,6 +7875,7 @@
               </a:defRPr>
             </a:lvl4pPr>
             <a:lvl5pPr algn="r">
+              <a:buNone/>
               <a:defRPr sz="1200" b="0">
                 <a:solidFill>
                   <a:srgbClr val="C9A8B7"/>
@@ -7709,6 +7886,7 @@
               </a:defRPr>
             </a:lvl5pPr>
             <a:lvl6pPr algn="r">
+              <a:buNone/>
               <a:defRPr sz="1200" b="0">
                 <a:solidFill>
                   <a:srgbClr val="C9A8B7"/>
@@ -7719,6 +7897,7 @@
               </a:defRPr>
             </a:lvl6pPr>
             <a:lvl7pPr algn="r">
+              <a:buNone/>
               <a:defRPr sz="1200" b="0">
                 <a:solidFill>
                   <a:srgbClr val="C9A8B7"/>
@@ -7729,6 +7908,7 @@
               </a:defRPr>
             </a:lvl7pPr>
             <a:lvl8pPr algn="r">
+              <a:buNone/>
               <a:defRPr sz="1200" b="0">
                 <a:solidFill>
                   <a:srgbClr val="C9A8B7"/>
@@ -7739,6 +7919,7 @@
               </a:defRPr>
             </a:lvl8pPr>
             <a:lvl9pPr algn="r">
+              <a:buNone/>
               <a:defRPr sz="1200" b="0">
                 <a:solidFill>
                   <a:srgbClr val="C9A8B7"/>
@@ -7751,6 +7932,7 @@
           </a:lstStyle>
           <a:p xmlns:a="http://schemas.openxmlformats.org/drawingml/2006/main">
             <a:pPr algn="r">
+              <a:buNone/>
               <a:defRPr sz="1200" b="0">
                 <a:solidFill>
                   <a:srgbClr val="C9A8B7"/>
@@ -7817,6 +7999,7 @@
               </a:defRPr>
             </a:defPPr>
             <a:lvl1pPr algn="l">
+              <a:buNone/>
               <a:defRPr sz="6450" b="1">
                 <a:solidFill>
                   <a:srgbClr val="FFFFFF"/>
@@ -7827,6 +8010,7 @@
               </a:defRPr>
             </a:lvl1pPr>
             <a:lvl2pPr algn="l">
+              <a:buNone/>
               <a:defRPr sz="6450" b="1">
                 <a:solidFill>
                   <a:srgbClr val="FFFFFF"/>
@@ -7837,6 +8021,7 @@
               </a:defRPr>
             </a:lvl2pPr>
             <a:lvl3pPr algn="l">
+              <a:buNone/>
               <a:defRPr sz="6450" b="1">
                 <a:solidFill>
                   <a:srgbClr val="FFFFFF"/>
@@ -7847,6 +8032,7 @@
               </a:defRPr>
             </a:lvl3pPr>
             <a:lvl4pPr algn="l">
+              <a:buNone/>
               <a:defRPr sz="6450" b="1">
                 <a:solidFill>
                   <a:srgbClr val="FFFFFF"/>
@@ -7857,6 +8043,7 @@
               </a:defRPr>
             </a:lvl4pPr>
             <a:lvl5pPr algn="l">
+              <a:buNone/>
               <a:defRPr sz="6450" b="1">
                 <a:solidFill>
                   <a:srgbClr val="FFFFFF"/>
@@ -7867,6 +8054,7 @@
               </a:defRPr>
             </a:lvl5pPr>
             <a:lvl6pPr algn="l">
+              <a:buNone/>
               <a:defRPr sz="6450" b="1">
                 <a:solidFill>
                   <a:srgbClr val="FFFFFF"/>
@@ -7877,6 +8065,7 @@
               </a:defRPr>
             </a:lvl6pPr>
             <a:lvl7pPr algn="l">
+              <a:buNone/>
               <a:defRPr sz="6450" b="1">
                 <a:solidFill>
                   <a:srgbClr val="FFFFFF"/>
@@ -7887,6 +8076,7 @@
               </a:defRPr>
             </a:lvl7pPr>
             <a:lvl8pPr algn="l">
+              <a:buNone/>
               <a:defRPr sz="6450" b="1">
                 <a:solidFill>
                   <a:srgbClr val="FFFFFF"/>
@@ -7897,6 +8087,7 @@
               </a:defRPr>
             </a:lvl8pPr>
             <a:lvl9pPr algn="l">
+              <a:buNone/>
               <a:defRPr sz="6450" b="1">
                 <a:solidFill>
                   <a:srgbClr val="FFFFFF"/>
@@ -7909,6 +8100,7 @@
           </a:lstStyle>
           <a:p xmlns:a="http://schemas.openxmlformats.org/drawingml/2006/main">
             <a:pPr algn="l">
+              <a:buNone/>
               <a:defRPr sz="6450" b="1">
                 <a:solidFill>
                   <a:srgbClr val="FFFFFF"/>
@@ -7932,6 +8124,7 @@
           </a:p>
           <a:p xmlns:a="http://schemas.openxmlformats.org/drawingml/2006/main">
             <a:pPr algn="l">
+              <a:buNone/>
               <a:defRPr sz="6450" b="1">
                 <a:solidFill>
                   <a:srgbClr val="FFFFFF"/>
@@ -7998,6 +8191,7 @@
               </a:defRPr>
             </a:defPPr>
             <a:lvl1pPr algn="l">
+              <a:buNone/>
               <a:defRPr sz="2550" b="0">
                 <a:solidFill>
                   <a:srgbClr val="F0E2E9"/>
@@ -8008,6 +8202,7 @@
               </a:defRPr>
             </a:lvl1pPr>
             <a:lvl2pPr algn="l">
+              <a:buNone/>
               <a:defRPr sz="2550" b="0">
                 <a:solidFill>
                   <a:srgbClr val="F0E2E9"/>
@@ -8018,6 +8213,7 @@
               </a:defRPr>
             </a:lvl2pPr>
             <a:lvl3pPr algn="l">
+              <a:buNone/>
               <a:defRPr sz="2550" b="0">
                 <a:solidFill>
                   <a:srgbClr val="F0E2E9"/>
@@ -8028,6 +8224,7 @@
               </a:defRPr>
             </a:lvl3pPr>
             <a:lvl4pPr algn="l">
+              <a:buNone/>
               <a:defRPr sz="2550" b="0">
                 <a:solidFill>
                   <a:srgbClr val="F0E2E9"/>
@@ -8038,6 +8235,7 @@
               </a:defRPr>
             </a:lvl4pPr>
             <a:lvl5pPr algn="l">
+              <a:buNone/>
               <a:defRPr sz="2550" b="0">
                 <a:solidFill>
                   <a:srgbClr val="F0E2E9"/>
@@ -8048,6 +8246,7 @@
               </a:defRPr>
             </a:lvl5pPr>
             <a:lvl6pPr algn="l">
+              <a:buNone/>
               <a:defRPr sz="2550" b="0">
                 <a:solidFill>
                   <a:srgbClr val="F0E2E9"/>
@@ -8058,6 +8257,7 @@
               </a:defRPr>
             </a:lvl6pPr>
             <a:lvl7pPr algn="l">
+              <a:buNone/>
               <a:defRPr sz="2550" b="0">
                 <a:solidFill>
                   <a:srgbClr val="F0E2E9"/>
@@ -8068,6 +8268,7 @@
               </a:defRPr>
             </a:lvl7pPr>
             <a:lvl8pPr algn="l">
+              <a:buNone/>
               <a:defRPr sz="2550" b="0">
                 <a:solidFill>
                   <a:srgbClr val="F0E2E9"/>
@@ -8078,6 +8279,7 @@
               </a:defRPr>
             </a:lvl8pPr>
             <a:lvl9pPr algn="l">
+              <a:buNone/>
               <a:defRPr sz="2550" b="0">
                 <a:solidFill>
                   <a:srgbClr val="F0E2E9"/>
@@ -8090,6 +8292,7 @@
           </a:lstStyle>
           <a:p xmlns:a="http://schemas.openxmlformats.org/drawingml/2006/main">
             <a:pPr algn="l">
+              <a:buNone/>
               <a:defRPr sz="2550" b="0">
                 <a:solidFill>
                   <a:srgbClr val="F0E2E9"/>
@@ -8113,6 +8316,7 @@
           </a:p>
           <a:p xmlns:a="http://schemas.openxmlformats.org/drawingml/2006/main">
             <a:pPr algn="l">
+              <a:buNone/>
               <a:defRPr sz="2550" b="0">
                 <a:solidFill>
                   <a:srgbClr val="F0E2E9"/>
@@ -8179,6 +8383,7 @@
               </a:defRPr>
             </a:defPPr>
             <a:lvl1pPr algn="l">
+              <a:buNone/>
               <a:defRPr sz="2325" b="1">
                 <a:solidFill>
                   <a:srgbClr val="83DCEC"/>
@@ -8189,6 +8394,7 @@
               </a:defRPr>
             </a:lvl1pPr>
             <a:lvl2pPr algn="l">
+              <a:buNone/>
               <a:defRPr sz="2325" b="1">
                 <a:solidFill>
                   <a:srgbClr val="83DCEC"/>
@@ -8199,6 +8405,7 @@
               </a:defRPr>
             </a:lvl2pPr>
             <a:lvl3pPr algn="l">
+              <a:buNone/>
               <a:defRPr sz="2325" b="1">
                 <a:solidFill>
                   <a:srgbClr val="83DCEC"/>
@@ -8209,6 +8416,7 @@
               </a:defRPr>
             </a:lvl3pPr>
             <a:lvl4pPr algn="l">
+              <a:buNone/>
               <a:defRPr sz="2325" b="1">
                 <a:solidFill>
                   <a:srgbClr val="83DCEC"/>
@@ -8219,6 +8427,7 @@
               </a:defRPr>
             </a:lvl4pPr>
             <a:lvl5pPr algn="l">
+              <a:buNone/>
               <a:defRPr sz="2325" b="1">
                 <a:solidFill>
                   <a:srgbClr val="83DCEC"/>
@@ -8229,6 +8438,7 @@
               </a:defRPr>
             </a:lvl5pPr>
             <a:lvl6pPr algn="l">
+              <a:buNone/>
               <a:defRPr sz="2325" b="1">
                 <a:solidFill>
                   <a:srgbClr val="83DCEC"/>
@@ -8239,6 +8449,7 @@
               </a:defRPr>
             </a:lvl6pPr>
             <a:lvl7pPr algn="l">
+              <a:buNone/>
               <a:defRPr sz="2325" b="1">
                 <a:solidFill>
                   <a:srgbClr val="83DCEC"/>
@@ -8249,6 +8460,7 @@
               </a:defRPr>
             </a:lvl7pPr>
             <a:lvl8pPr algn="l">
+              <a:buNone/>
               <a:defRPr sz="2325" b="1">
                 <a:solidFill>
                   <a:srgbClr val="83DCEC"/>
@@ -8259,6 +8471,7 @@
               </a:defRPr>
             </a:lvl8pPr>
             <a:lvl9pPr algn="l">
+              <a:buNone/>
               <a:defRPr sz="2325" b="1">
                 <a:solidFill>
                   <a:srgbClr val="83DCEC"/>
@@ -8271,6 +8484,7 @@
           </a:lstStyle>
           <a:p xmlns:a="http://schemas.openxmlformats.org/drawingml/2006/main">
             <a:pPr algn="l">
+              <a:buNone/>
               <a:defRPr sz="2325" b="1">
                 <a:solidFill>
                   <a:srgbClr val="83DCEC"/>
@@ -8288,9 +8502,9 @@
                 <a:latin typeface="Arial"/>
                 <a:ea typeface="Arial"/>
                 <a:cs typeface="Arial"/>
-                <a:hlinkClick xmlns:r="http://schemas.openxmlformats.org/officeDocument/2006/relationships" r:id="R0ffdba1e7ae64be1"/>
+                <a:hlinkClick xmlns:r="http://schemas.openxmlformats.org/officeDocument/2006/relationships" r:id="Rd65a6361ec374104"/>
               </a:rPr>
-              <a:t>Открыть приложение</a:t>
+              <a:t>Демо и инструкции</a:t>
             </a:r>
           </a:p>
         </p:txBody>
@@ -8338,6 +8552,7 @@
               </a:defRPr>
             </a:defPPr>
             <a:lvl1pPr algn="l">
+              <a:buNone/>
               <a:defRPr sz="1425" b="0">
                 <a:solidFill>
                   <a:srgbClr val="DDBFCD"/>
@@ -8348,6 +8563,7 @@
               </a:defRPr>
             </a:lvl1pPr>
             <a:lvl2pPr algn="l">
+              <a:buNone/>
               <a:defRPr sz="1425" b="0">
                 <a:solidFill>
                   <a:srgbClr val="DDBFCD"/>
@@ -8358,6 +8574,7 @@
               </a:defRPr>
             </a:lvl2pPr>
             <a:lvl3pPr algn="l">
+              <a:buNone/>
               <a:defRPr sz="1425" b="0">
                 <a:solidFill>
                   <a:srgbClr val="DDBFCD"/>
@@ -8368,6 +8585,7 @@
               </a:defRPr>
             </a:lvl3pPr>
             <a:lvl4pPr algn="l">
+              <a:buNone/>
               <a:defRPr sz="1425" b="0">
                 <a:solidFill>
                   <a:srgbClr val="DDBFCD"/>
@@ -8378,6 +8596,7 @@
               </a:defRPr>
             </a:lvl4pPr>
             <a:lvl5pPr algn="l">
+              <a:buNone/>
               <a:defRPr sz="1425" b="0">
                 <a:solidFill>
                   <a:srgbClr val="DDBFCD"/>
@@ -8388,6 +8607,7 @@
               </a:defRPr>
             </a:lvl5pPr>
             <a:lvl6pPr algn="l">
+              <a:buNone/>
               <a:defRPr sz="1425" b="0">
                 <a:solidFill>
                   <a:srgbClr val="DDBFCD"/>
@@ -8398,6 +8618,7 @@
               </a:defRPr>
             </a:lvl6pPr>
             <a:lvl7pPr algn="l">
+              <a:buNone/>
               <a:defRPr sz="1425" b="0">
                 <a:solidFill>
                   <a:srgbClr val="DDBFCD"/>
@@ -8408,6 +8629,7 @@
               </a:defRPr>
             </a:lvl7pPr>
             <a:lvl8pPr algn="l">
+              <a:buNone/>
               <a:defRPr sz="1425" b="0">
                 <a:solidFill>
                   <a:srgbClr val="DDBFCD"/>
@@ -8418,6 +8640,7 @@
               </a:defRPr>
             </a:lvl8pPr>
             <a:lvl9pPr algn="l">
+              <a:buNone/>
               <a:defRPr sz="1425" b="0">
                 <a:solidFill>
                   <a:srgbClr val="DDBFCD"/>
@@ -8430,6 +8653,7 @@
           </a:lstStyle>
           <a:p xmlns:a="http://schemas.openxmlformats.org/drawingml/2006/main">
             <a:pPr algn="l">
+              <a:buNone/>
               <a:defRPr sz="1425" b="0">
                 <a:solidFill>
                   <a:srgbClr val="DDBFCD"/>
@@ -8448,7 +8672,7 @@
                 <a:ea typeface="Arial"/>
                 <a:cs typeface="Arial"/>
               </a:rPr>
-              <a:t>На компьютере с работающим сервисом</a:t>
+              <a:t>Актуальная ссылка на демо и порядок доступа в GitHub</a:t>
             </a:r>
           </a:p>
         </p:txBody>
@@ -8525,6 +8749,7 @@
               </a:defRPr>
             </a:defPPr>
             <a:lvl1pPr algn="l">
+              <a:buNone/>
               <a:defRPr sz="3300" b="1">
                 <a:solidFill>
                   <a:srgbClr val="4A0221"/>
@@ -8535,6 +8760,7 @@
               </a:defRPr>
             </a:lvl1pPr>
             <a:lvl2pPr algn="l">
+              <a:buNone/>
               <a:defRPr sz="3300" b="1">
                 <a:solidFill>
                   <a:srgbClr val="4A0221"/>
@@ -8545,6 +8771,7 @@
               </a:defRPr>
             </a:lvl2pPr>
             <a:lvl3pPr algn="l">
+              <a:buNone/>
               <a:defRPr sz="3300" b="1">
                 <a:solidFill>
                   <a:srgbClr val="4A0221"/>
@@ -8555,6 +8782,7 @@
               </a:defRPr>
             </a:lvl3pPr>
             <a:lvl4pPr algn="l">
+              <a:buNone/>
               <a:defRPr sz="3300" b="1">
                 <a:solidFill>
                   <a:srgbClr val="4A0221"/>
@@ -8565,6 +8793,7 @@
               </a:defRPr>
             </a:lvl4pPr>
             <a:lvl5pPr algn="l">
+              <a:buNone/>
               <a:defRPr sz="3300" b="1">
                 <a:solidFill>
                   <a:srgbClr val="4A0221"/>
@@ -8575,6 +8804,7 @@
               </a:defRPr>
             </a:lvl5pPr>
             <a:lvl6pPr algn="l">
+              <a:buNone/>
               <a:defRPr sz="3300" b="1">
                 <a:solidFill>
                   <a:srgbClr val="4A0221"/>
@@ -8585,6 +8815,7 @@
               </a:defRPr>
             </a:lvl6pPr>
             <a:lvl7pPr algn="l">
+              <a:buNone/>
               <a:defRPr sz="3300" b="1">
                 <a:solidFill>
                   <a:srgbClr val="4A0221"/>
@@ -8595,6 +8826,7 @@
               </a:defRPr>
             </a:lvl7pPr>
             <a:lvl8pPr algn="l">
+              <a:buNone/>
               <a:defRPr sz="3300" b="1">
                 <a:solidFill>
                   <a:srgbClr val="4A0221"/>
@@ -8605,6 +8837,7 @@
               </a:defRPr>
             </a:lvl8pPr>
             <a:lvl9pPr algn="l">
+              <a:buNone/>
               <a:defRPr sz="3300" b="1">
                 <a:solidFill>
                   <a:srgbClr val="4A0221"/>
@@ -8617,6 +8850,7 @@
           </a:lstStyle>
           <a:p xmlns:a="http://schemas.openxmlformats.org/drawingml/2006/main">
             <a:pPr algn="l">
+              <a:buNone/>
               <a:defRPr sz="3300" b="1">
                 <a:solidFill>
                   <a:srgbClr val="4A0221"/>
@@ -8683,6 +8917,7 @@
               </a:defRPr>
             </a:defPPr>
             <a:lvl1pPr algn="r">
+              <a:buNone/>
               <a:defRPr sz="1200" b="0">
                 <a:solidFill>
                   <a:srgbClr val="756873"/>
@@ -8693,6 +8928,7 @@
               </a:defRPr>
             </a:lvl1pPr>
             <a:lvl2pPr algn="r">
+              <a:buNone/>
               <a:defRPr sz="1200" b="0">
                 <a:solidFill>
                   <a:srgbClr val="756873"/>
@@ -8703,6 +8939,7 @@
               </a:defRPr>
             </a:lvl2pPr>
             <a:lvl3pPr algn="r">
+              <a:buNone/>
               <a:defRPr sz="1200" b="0">
                 <a:solidFill>
                   <a:srgbClr val="756873"/>
@@ -8713,6 +8950,7 @@
               </a:defRPr>
             </a:lvl3pPr>
             <a:lvl4pPr algn="r">
+              <a:buNone/>
               <a:defRPr sz="1200" b="0">
                 <a:solidFill>
                   <a:srgbClr val="756873"/>
@@ -8723,6 +8961,7 @@
               </a:defRPr>
             </a:lvl4pPr>
             <a:lvl5pPr algn="r">
+              <a:buNone/>
               <a:defRPr sz="1200" b="0">
                 <a:solidFill>
                   <a:srgbClr val="756873"/>
@@ -8733,6 +8972,7 @@
               </a:defRPr>
             </a:lvl5pPr>
             <a:lvl6pPr algn="r">
+              <a:buNone/>
               <a:defRPr sz="1200" b="0">
                 <a:solidFill>
                   <a:srgbClr val="756873"/>
@@ -8743,6 +8983,7 @@
               </a:defRPr>
             </a:lvl6pPr>
             <a:lvl7pPr algn="r">
+              <a:buNone/>
               <a:defRPr sz="1200" b="0">
                 <a:solidFill>
                   <a:srgbClr val="756873"/>
@@ -8753,6 +8994,7 @@
               </a:defRPr>
             </a:lvl7pPr>
             <a:lvl8pPr algn="r">
+              <a:buNone/>
               <a:defRPr sz="1200" b="0">
                 <a:solidFill>
                   <a:srgbClr val="756873"/>
@@ -8763,6 +9005,7 @@
               </a:defRPr>
             </a:lvl8pPr>
             <a:lvl9pPr algn="r">
+              <a:buNone/>
               <a:defRPr sz="1200" b="0">
                 <a:solidFill>
                   <a:srgbClr val="756873"/>
@@ -8775,6 +9018,7 @@
           </a:lstStyle>
           <a:p xmlns:a="http://schemas.openxmlformats.org/drawingml/2006/main">
             <a:pPr algn="r">
+              <a:buNone/>
               <a:defRPr sz="1200" b="0">
                 <a:solidFill>
                   <a:srgbClr val="756873"/>
@@ -8841,6 +9085,7 @@
               </a:defRPr>
             </a:defPPr>
             <a:lvl1pPr algn="l">
+              <a:buNone/>
               <a:defRPr sz="4650" b="1">
                 <a:solidFill>
                   <a:srgbClr val="4A0221"/>
@@ -8851,6 +9096,7 @@
               </a:defRPr>
             </a:lvl1pPr>
             <a:lvl2pPr algn="l">
+              <a:buNone/>
               <a:defRPr sz="4650" b="1">
                 <a:solidFill>
                   <a:srgbClr val="4A0221"/>
@@ -8861,6 +9107,7 @@
               </a:defRPr>
             </a:lvl2pPr>
             <a:lvl3pPr algn="l">
+              <a:buNone/>
               <a:defRPr sz="4650" b="1">
                 <a:solidFill>
                   <a:srgbClr val="4A0221"/>
@@ -8871,6 +9118,7 @@
               </a:defRPr>
             </a:lvl3pPr>
             <a:lvl4pPr algn="l">
+              <a:buNone/>
               <a:defRPr sz="4650" b="1">
                 <a:solidFill>
                   <a:srgbClr val="4A0221"/>
@@ -8881,6 +9129,7 @@
               </a:defRPr>
             </a:lvl4pPr>
             <a:lvl5pPr algn="l">
+              <a:buNone/>
               <a:defRPr sz="4650" b="1">
                 <a:solidFill>
                   <a:srgbClr val="4A0221"/>
@@ -8891,6 +9140,7 @@
               </a:defRPr>
             </a:lvl5pPr>
             <a:lvl6pPr algn="l">
+              <a:buNone/>
               <a:defRPr sz="4650" b="1">
                 <a:solidFill>
                   <a:srgbClr val="4A0221"/>
@@ -8901,6 +9151,7 @@
               </a:defRPr>
             </a:lvl6pPr>
             <a:lvl7pPr algn="l">
+              <a:buNone/>
               <a:defRPr sz="4650" b="1">
                 <a:solidFill>
                   <a:srgbClr val="4A0221"/>
@@ -8911,6 +9162,7 @@
               </a:defRPr>
             </a:lvl7pPr>
             <a:lvl8pPr algn="l">
+              <a:buNone/>
               <a:defRPr sz="4650" b="1">
                 <a:solidFill>
                   <a:srgbClr val="4A0221"/>
@@ -8921,6 +9173,7 @@
               </a:defRPr>
             </a:lvl8pPr>
             <a:lvl9pPr algn="l">
+              <a:buNone/>
               <a:defRPr sz="4650" b="1">
                 <a:solidFill>
                   <a:srgbClr val="4A0221"/>
@@ -8933,6 +9186,7 @@
           </a:lstStyle>
           <a:p xmlns:a="http://schemas.openxmlformats.org/drawingml/2006/main">
             <a:pPr algn="l">
+              <a:buNone/>
               <a:defRPr sz="4650" b="1">
                 <a:solidFill>
                   <a:srgbClr val="4A0221"/>
@@ -8956,6 +9210,7 @@
           </a:p>
           <a:p xmlns:a="http://schemas.openxmlformats.org/drawingml/2006/main">
             <a:pPr algn="l">
+              <a:buNone/>
               <a:defRPr sz="4650" b="1">
                 <a:solidFill>
                   <a:srgbClr val="4A0221"/>
@@ -9022,6 +9277,7 @@
               </a:defRPr>
             </a:defPPr>
             <a:lvl1pPr algn="l">
+              <a:buNone/>
               <a:defRPr sz="2325" b="1">
                 <a:solidFill>
                   <a:srgbClr val="A31551"/>
@@ -9032,6 +9288,7 @@
               </a:defRPr>
             </a:lvl1pPr>
             <a:lvl2pPr algn="l">
+              <a:buNone/>
               <a:defRPr sz="2325" b="1">
                 <a:solidFill>
                   <a:srgbClr val="A31551"/>
@@ -9042,6 +9299,7 @@
               </a:defRPr>
             </a:lvl2pPr>
             <a:lvl3pPr algn="l">
+              <a:buNone/>
               <a:defRPr sz="2325" b="1">
                 <a:solidFill>
                   <a:srgbClr val="A31551"/>
@@ -9052,6 +9310,7 @@
               </a:defRPr>
             </a:lvl3pPr>
             <a:lvl4pPr algn="l">
+              <a:buNone/>
               <a:defRPr sz="2325" b="1">
                 <a:solidFill>
                   <a:srgbClr val="A31551"/>
@@ -9062,6 +9321,7 @@
               </a:defRPr>
             </a:lvl4pPr>
             <a:lvl5pPr algn="l">
+              <a:buNone/>
               <a:defRPr sz="2325" b="1">
                 <a:solidFill>
                   <a:srgbClr val="A31551"/>
@@ -9072,6 +9332,7 @@
               </a:defRPr>
             </a:lvl5pPr>
             <a:lvl6pPr algn="l">
+              <a:buNone/>
               <a:defRPr sz="2325" b="1">
                 <a:solidFill>
                   <a:srgbClr val="A31551"/>
@@ -9082,6 +9343,7 @@
               </a:defRPr>
             </a:lvl6pPr>
             <a:lvl7pPr algn="l">
+              <a:buNone/>
               <a:defRPr sz="2325" b="1">
                 <a:solidFill>
                   <a:srgbClr val="A31551"/>
@@ -9092,6 +9354,7 @@
               </a:defRPr>
             </a:lvl7pPr>
             <a:lvl8pPr algn="l">
+              <a:buNone/>
               <a:defRPr sz="2325" b="1">
                 <a:solidFill>
                   <a:srgbClr val="A31551"/>
@@ -9102,6 +9365,7 @@
               </a:defRPr>
             </a:lvl8pPr>
             <a:lvl9pPr algn="l">
+              <a:buNone/>
               <a:defRPr sz="2325" b="1">
                 <a:solidFill>
                   <a:srgbClr val="A31551"/>
@@ -9114,6 +9378,7 @@
           </a:lstStyle>
           <a:p xmlns:a="http://schemas.openxmlformats.org/drawingml/2006/main">
             <a:pPr algn="l">
+              <a:buNone/>
               <a:defRPr sz="2325" b="1">
                 <a:solidFill>
                   <a:srgbClr val="A31551"/>
@@ -9180,6 +9445,7 @@
               </a:defRPr>
             </a:defPPr>
             <a:lvl1pPr algn="l">
+              <a:buNone/>
               <a:defRPr sz="2175" b="0">
                 <a:solidFill>
                   <a:srgbClr val="2D2630"/>
@@ -9190,6 +9456,7 @@
               </a:defRPr>
             </a:lvl1pPr>
             <a:lvl2pPr algn="l">
+              <a:buNone/>
               <a:defRPr sz="2175" b="0">
                 <a:solidFill>
                   <a:srgbClr val="2D2630"/>
@@ -9200,6 +9467,7 @@
               </a:defRPr>
             </a:lvl2pPr>
             <a:lvl3pPr algn="l">
+              <a:buNone/>
               <a:defRPr sz="2175" b="0">
                 <a:solidFill>
                   <a:srgbClr val="2D2630"/>
@@ -9210,6 +9478,7 @@
               </a:defRPr>
             </a:lvl3pPr>
             <a:lvl4pPr algn="l">
+              <a:buNone/>
               <a:defRPr sz="2175" b="0">
                 <a:solidFill>
                   <a:srgbClr val="2D2630"/>
@@ -9220,6 +9489,7 @@
               </a:defRPr>
             </a:lvl4pPr>
             <a:lvl5pPr algn="l">
+              <a:buNone/>
               <a:defRPr sz="2175" b="0">
                 <a:solidFill>
                   <a:srgbClr val="2D2630"/>
@@ -9230,6 +9500,7 @@
               </a:defRPr>
             </a:lvl5pPr>
             <a:lvl6pPr algn="l">
+              <a:buNone/>
               <a:defRPr sz="2175" b="0">
                 <a:solidFill>
                   <a:srgbClr val="2D2630"/>
@@ -9240,6 +9511,7 @@
               </a:defRPr>
             </a:lvl6pPr>
             <a:lvl7pPr algn="l">
+              <a:buNone/>
               <a:defRPr sz="2175" b="0">
                 <a:solidFill>
                   <a:srgbClr val="2D2630"/>
@@ -9250,6 +9522,7 @@
               </a:defRPr>
             </a:lvl7pPr>
             <a:lvl8pPr algn="l">
+              <a:buNone/>
               <a:defRPr sz="2175" b="0">
                 <a:solidFill>
                   <a:srgbClr val="2D2630"/>
@@ -9260,6 +9533,7 @@
               </a:defRPr>
             </a:lvl8pPr>
             <a:lvl9pPr algn="l">
+              <a:buNone/>
               <a:defRPr sz="2175" b="0">
                 <a:solidFill>
                   <a:srgbClr val="2D2630"/>
@@ -9272,6 +9546,7 @@
           </a:lstStyle>
           <a:p xmlns:a="http://schemas.openxmlformats.org/drawingml/2006/main">
             <a:pPr algn="l">
+              <a:buNone/>
               <a:defRPr sz="2175" b="0">
                 <a:solidFill>
                   <a:srgbClr val="2D2630"/>
@@ -9338,6 +9613,7 @@
               </a:defRPr>
             </a:defPPr>
             <a:lvl1pPr algn="l">
+              <a:buNone/>
               <a:defRPr sz="2325" b="1">
                 <a:solidFill>
                   <a:srgbClr val="A31551"/>
@@ -9348,6 +9624,7 @@
               </a:defRPr>
             </a:lvl1pPr>
             <a:lvl2pPr algn="l">
+              <a:buNone/>
               <a:defRPr sz="2325" b="1">
                 <a:solidFill>
                   <a:srgbClr val="A31551"/>
@@ -9358,6 +9635,7 @@
               </a:defRPr>
             </a:lvl2pPr>
             <a:lvl3pPr algn="l">
+              <a:buNone/>
               <a:defRPr sz="2325" b="1">
                 <a:solidFill>
                   <a:srgbClr val="A31551"/>
@@ -9368,6 +9646,7 @@
               </a:defRPr>
             </a:lvl3pPr>
             <a:lvl4pPr algn="l">
+              <a:buNone/>
               <a:defRPr sz="2325" b="1">
                 <a:solidFill>
                   <a:srgbClr val="A31551"/>
@@ -9378,6 +9657,7 @@
               </a:defRPr>
             </a:lvl4pPr>
             <a:lvl5pPr algn="l">
+              <a:buNone/>
               <a:defRPr sz="2325" b="1">
                 <a:solidFill>
                   <a:srgbClr val="A31551"/>
@@ -9388,6 +9668,7 @@
               </a:defRPr>
             </a:lvl5pPr>
             <a:lvl6pPr algn="l">
+              <a:buNone/>
               <a:defRPr sz="2325" b="1">
                 <a:solidFill>
                   <a:srgbClr val="A31551"/>
@@ -9398,6 +9679,7 @@
               </a:defRPr>
             </a:lvl6pPr>
             <a:lvl7pPr algn="l">
+              <a:buNone/>
               <a:defRPr sz="2325" b="1">
                 <a:solidFill>
                   <a:srgbClr val="A31551"/>
@@ -9408,6 +9690,7 @@
               </a:defRPr>
             </a:lvl7pPr>
             <a:lvl8pPr algn="l">
+              <a:buNone/>
               <a:defRPr sz="2325" b="1">
                 <a:solidFill>
                   <a:srgbClr val="A31551"/>
@@ -9418,6 +9701,7 @@
               </a:defRPr>
             </a:lvl8pPr>
             <a:lvl9pPr algn="l">
+              <a:buNone/>
               <a:defRPr sz="2325" b="1">
                 <a:solidFill>
                   <a:srgbClr val="A31551"/>
@@ -9430,6 +9714,7 @@
           </a:lstStyle>
           <a:p xmlns:a="http://schemas.openxmlformats.org/drawingml/2006/main">
             <a:pPr algn="l">
+              <a:buNone/>
               <a:defRPr sz="2325" b="1">
                 <a:solidFill>
                   <a:srgbClr val="A31551"/>
@@ -9496,6 +9781,7 @@
               </a:defRPr>
             </a:defPPr>
             <a:lvl1pPr algn="l">
+              <a:buNone/>
               <a:defRPr sz="2175" b="0">
                 <a:solidFill>
                   <a:srgbClr val="2D2630"/>
@@ -9506,6 +9792,7 @@
               </a:defRPr>
             </a:lvl1pPr>
             <a:lvl2pPr algn="l">
+              <a:buNone/>
               <a:defRPr sz="2175" b="0">
                 <a:solidFill>
                   <a:srgbClr val="2D2630"/>
@@ -9516,6 +9803,7 @@
               </a:defRPr>
             </a:lvl2pPr>
             <a:lvl3pPr algn="l">
+              <a:buNone/>
               <a:defRPr sz="2175" b="0">
                 <a:solidFill>
                   <a:srgbClr val="2D2630"/>
@@ -9526,6 +9814,7 @@
               </a:defRPr>
             </a:lvl3pPr>
             <a:lvl4pPr algn="l">
+              <a:buNone/>
               <a:defRPr sz="2175" b="0">
                 <a:solidFill>
                   <a:srgbClr val="2D2630"/>
@@ -9536,6 +9825,7 @@
               </a:defRPr>
             </a:lvl4pPr>
             <a:lvl5pPr algn="l">
+              <a:buNone/>
               <a:defRPr sz="2175" b="0">
                 <a:solidFill>
                   <a:srgbClr val="2D2630"/>
@@ -9546,6 +9836,7 @@
               </a:defRPr>
             </a:lvl5pPr>
             <a:lvl6pPr algn="l">
+              <a:buNone/>
               <a:defRPr sz="2175" b="0">
                 <a:solidFill>
                   <a:srgbClr val="2D2630"/>
@@ -9556,6 +9847,7 @@
               </a:defRPr>
             </a:lvl6pPr>
             <a:lvl7pPr algn="l">
+              <a:buNone/>
               <a:defRPr sz="2175" b="0">
                 <a:solidFill>
                   <a:srgbClr val="2D2630"/>
@@ -9566,6 +9858,7 @@
               </a:defRPr>
             </a:lvl7pPr>
             <a:lvl8pPr algn="l">
+              <a:buNone/>
               <a:defRPr sz="2175" b="0">
                 <a:solidFill>
                   <a:srgbClr val="2D2630"/>
@@ -9576,6 +9869,7 @@
               </a:defRPr>
             </a:lvl8pPr>
             <a:lvl9pPr algn="l">
+              <a:buNone/>
               <a:defRPr sz="2175" b="0">
                 <a:solidFill>
                   <a:srgbClr val="2D2630"/>
@@ -9588,6 +9882,7 @@
           </a:lstStyle>
           <a:p xmlns:a="http://schemas.openxmlformats.org/drawingml/2006/main">
             <a:pPr algn="l">
+              <a:buNone/>
               <a:defRPr sz="2175" b="0">
                 <a:solidFill>
                   <a:srgbClr val="2D2630"/>
@@ -9683,6 +9978,7 @@
               </a:defRPr>
             </a:defPPr>
             <a:lvl1pPr algn="l">
+              <a:buNone/>
               <a:defRPr sz="3300" b="1">
                 <a:solidFill>
                   <a:srgbClr val="4A0221"/>
@@ -9693,6 +9989,7 @@
               </a:defRPr>
             </a:lvl1pPr>
             <a:lvl2pPr algn="l">
+              <a:buNone/>
               <a:defRPr sz="3300" b="1">
                 <a:solidFill>
                   <a:srgbClr val="4A0221"/>
@@ -9703,6 +10000,7 @@
               </a:defRPr>
             </a:lvl2pPr>
             <a:lvl3pPr algn="l">
+              <a:buNone/>
               <a:defRPr sz="3300" b="1">
                 <a:solidFill>
                   <a:srgbClr val="4A0221"/>
@@ -9713,6 +10011,7 @@
               </a:defRPr>
             </a:lvl3pPr>
             <a:lvl4pPr algn="l">
+              <a:buNone/>
               <a:defRPr sz="3300" b="1">
                 <a:solidFill>
                   <a:srgbClr val="4A0221"/>
@@ -9723,6 +10022,7 @@
               </a:defRPr>
             </a:lvl4pPr>
             <a:lvl5pPr algn="l">
+              <a:buNone/>
               <a:defRPr sz="3300" b="1">
                 <a:solidFill>
                   <a:srgbClr val="4A0221"/>
@@ -9733,6 +10033,7 @@
               </a:defRPr>
             </a:lvl5pPr>
             <a:lvl6pPr algn="l">
+              <a:buNone/>
               <a:defRPr sz="3300" b="1">
                 <a:solidFill>
                   <a:srgbClr val="4A0221"/>
@@ -9743,6 +10044,7 @@
               </a:defRPr>
             </a:lvl6pPr>
             <a:lvl7pPr algn="l">
+              <a:buNone/>
               <a:defRPr sz="3300" b="1">
                 <a:solidFill>
                   <a:srgbClr val="4A0221"/>
@@ -9753,6 +10055,7 @@
               </a:defRPr>
             </a:lvl7pPr>
             <a:lvl8pPr algn="l">
+              <a:buNone/>
               <a:defRPr sz="3300" b="1">
                 <a:solidFill>
                   <a:srgbClr val="4A0221"/>
@@ -9763,6 +10066,7 @@
               </a:defRPr>
             </a:lvl8pPr>
             <a:lvl9pPr algn="l">
+              <a:buNone/>
               <a:defRPr sz="3300" b="1">
                 <a:solidFill>
                   <a:srgbClr val="4A0221"/>
@@ -9775,6 +10079,7 @@
           </a:lstStyle>
           <a:p xmlns:a="http://schemas.openxmlformats.org/drawingml/2006/main">
             <a:pPr algn="l">
+              <a:buNone/>
               <a:defRPr sz="3300" b="1">
                 <a:solidFill>
                   <a:srgbClr val="4A0221"/>
@@ -9841,6 +10146,7 @@
               </a:defRPr>
             </a:defPPr>
             <a:lvl1pPr algn="r">
+              <a:buNone/>
               <a:defRPr sz="1200" b="0">
                 <a:solidFill>
                   <a:srgbClr val="756873"/>
@@ -9851,6 +10157,7 @@
               </a:defRPr>
             </a:lvl1pPr>
             <a:lvl2pPr algn="r">
+              <a:buNone/>
               <a:defRPr sz="1200" b="0">
                 <a:solidFill>
                   <a:srgbClr val="756873"/>
@@ -9861,6 +10168,7 @@
               </a:defRPr>
             </a:lvl2pPr>
             <a:lvl3pPr algn="r">
+              <a:buNone/>
               <a:defRPr sz="1200" b="0">
                 <a:solidFill>
                   <a:srgbClr val="756873"/>
@@ -9871,6 +10179,7 @@
               </a:defRPr>
             </a:lvl3pPr>
             <a:lvl4pPr algn="r">
+              <a:buNone/>
               <a:defRPr sz="1200" b="0">
                 <a:solidFill>
                   <a:srgbClr val="756873"/>
@@ -9881,6 +10190,7 @@
               </a:defRPr>
             </a:lvl4pPr>
             <a:lvl5pPr algn="r">
+              <a:buNone/>
               <a:defRPr sz="1200" b="0">
                 <a:solidFill>
                   <a:srgbClr val="756873"/>
@@ -9891,6 +10201,7 @@
               </a:defRPr>
             </a:lvl5pPr>
             <a:lvl6pPr algn="r">
+              <a:buNone/>
               <a:defRPr sz="1200" b="0">
                 <a:solidFill>
                   <a:srgbClr val="756873"/>
@@ -9901,6 +10212,7 @@
               </a:defRPr>
             </a:lvl6pPr>
             <a:lvl7pPr algn="r">
+              <a:buNone/>
               <a:defRPr sz="1200" b="0">
                 <a:solidFill>
                   <a:srgbClr val="756873"/>
@@ -9911,6 +10223,7 @@
               </a:defRPr>
             </a:lvl7pPr>
             <a:lvl8pPr algn="r">
+              <a:buNone/>
               <a:defRPr sz="1200" b="0">
                 <a:solidFill>
                   <a:srgbClr val="756873"/>
@@ -9921,6 +10234,7 @@
               </a:defRPr>
             </a:lvl8pPr>
             <a:lvl9pPr algn="r">
+              <a:buNone/>
               <a:defRPr sz="1200" b="0">
                 <a:solidFill>
                   <a:srgbClr val="756873"/>
@@ -9933,6 +10247,7 @@
           </a:lstStyle>
           <a:p xmlns:a="http://schemas.openxmlformats.org/drawingml/2006/main">
             <a:pPr algn="r">
+              <a:buNone/>
               <a:defRPr sz="1200" b="0">
                 <a:solidFill>
                   <a:srgbClr val="756873"/>
@@ -9999,6 +10314,7 @@
               </a:defRPr>
             </a:defPPr>
             <a:lvl1pPr algn="l">
+              <a:buNone/>
               <a:defRPr sz="6225" b="1">
                 <a:solidFill>
                   <a:srgbClr val="A31551"/>
@@ -10009,6 +10325,7 @@
               </a:defRPr>
             </a:lvl1pPr>
             <a:lvl2pPr algn="l">
+              <a:buNone/>
               <a:defRPr sz="6225" b="1">
                 <a:solidFill>
                   <a:srgbClr val="A31551"/>
@@ -10019,6 +10336,7 @@
               </a:defRPr>
             </a:lvl2pPr>
             <a:lvl3pPr algn="l">
+              <a:buNone/>
               <a:defRPr sz="6225" b="1">
                 <a:solidFill>
                   <a:srgbClr val="A31551"/>
@@ -10029,6 +10347,7 @@
               </a:defRPr>
             </a:lvl3pPr>
             <a:lvl4pPr algn="l">
+              <a:buNone/>
               <a:defRPr sz="6225" b="1">
                 <a:solidFill>
                   <a:srgbClr val="A31551"/>
@@ -10039,6 +10358,7 @@
               </a:defRPr>
             </a:lvl4pPr>
             <a:lvl5pPr algn="l">
+              <a:buNone/>
               <a:defRPr sz="6225" b="1">
                 <a:solidFill>
                   <a:srgbClr val="A31551"/>
@@ -10049,6 +10369,7 @@
               </a:defRPr>
             </a:lvl5pPr>
             <a:lvl6pPr algn="l">
+              <a:buNone/>
               <a:defRPr sz="6225" b="1">
                 <a:solidFill>
                   <a:srgbClr val="A31551"/>
@@ -10059,6 +10380,7 @@
               </a:defRPr>
             </a:lvl6pPr>
             <a:lvl7pPr algn="l">
+              <a:buNone/>
               <a:defRPr sz="6225" b="1">
                 <a:solidFill>
                   <a:srgbClr val="A31551"/>
@@ -10069,6 +10391,7 @@
               </a:defRPr>
             </a:lvl7pPr>
             <a:lvl8pPr algn="l">
+              <a:buNone/>
               <a:defRPr sz="6225" b="1">
                 <a:solidFill>
                   <a:srgbClr val="A31551"/>
@@ -10079,6 +10402,7 @@
               </a:defRPr>
             </a:lvl8pPr>
             <a:lvl9pPr algn="l">
+              <a:buNone/>
               <a:defRPr sz="6225" b="1">
                 <a:solidFill>
                   <a:srgbClr val="A31551"/>
@@ -10091,6 +10415,7 @@
           </a:lstStyle>
           <a:p xmlns:a="http://schemas.openxmlformats.org/drawingml/2006/main">
             <a:pPr algn="l">
+              <a:buNone/>
               <a:defRPr sz="6225" b="1">
                 <a:solidFill>
                   <a:srgbClr val="A31551"/>
@@ -10157,6 +10482,7 @@
               </a:defRPr>
             </a:defPPr>
             <a:lvl1pPr algn="l">
+              <a:buNone/>
               <a:defRPr sz="2625" b="1">
                 <a:solidFill>
                   <a:srgbClr val="4A0221"/>
@@ -10167,6 +10493,7 @@
               </a:defRPr>
             </a:lvl1pPr>
             <a:lvl2pPr algn="l">
+              <a:buNone/>
               <a:defRPr sz="2625" b="1">
                 <a:solidFill>
                   <a:srgbClr val="4A0221"/>
@@ -10177,6 +10504,7 @@
               </a:defRPr>
             </a:lvl2pPr>
             <a:lvl3pPr algn="l">
+              <a:buNone/>
               <a:defRPr sz="2625" b="1">
                 <a:solidFill>
                   <a:srgbClr val="4A0221"/>
@@ -10187,6 +10515,7 @@
               </a:defRPr>
             </a:lvl3pPr>
             <a:lvl4pPr algn="l">
+              <a:buNone/>
               <a:defRPr sz="2625" b="1">
                 <a:solidFill>
                   <a:srgbClr val="4A0221"/>
@@ -10197,6 +10526,7 @@
               </a:defRPr>
             </a:lvl4pPr>
             <a:lvl5pPr algn="l">
+              <a:buNone/>
               <a:defRPr sz="2625" b="1">
                 <a:solidFill>
                   <a:srgbClr val="4A0221"/>
@@ -10207,6 +10537,7 @@
               </a:defRPr>
             </a:lvl5pPr>
             <a:lvl6pPr algn="l">
+              <a:buNone/>
               <a:defRPr sz="2625" b="1">
                 <a:solidFill>
                   <a:srgbClr val="4A0221"/>
@@ -10217,6 +10548,7 @@
               </a:defRPr>
             </a:lvl6pPr>
             <a:lvl7pPr algn="l">
+              <a:buNone/>
               <a:defRPr sz="2625" b="1">
                 <a:solidFill>
                   <a:srgbClr val="4A0221"/>
@@ -10227,6 +10559,7 @@
               </a:defRPr>
             </a:lvl7pPr>
             <a:lvl8pPr algn="l">
+              <a:buNone/>
               <a:defRPr sz="2625" b="1">
                 <a:solidFill>
                   <a:srgbClr val="4A0221"/>
@@ -10237,6 +10570,7 @@
               </a:defRPr>
             </a:lvl8pPr>
             <a:lvl9pPr algn="l">
+              <a:buNone/>
               <a:defRPr sz="2625" b="1">
                 <a:solidFill>
                   <a:srgbClr val="4A0221"/>
@@ -10249,6 +10583,7 @@
           </a:lstStyle>
           <a:p xmlns:a="http://schemas.openxmlformats.org/drawingml/2006/main">
             <a:pPr algn="l">
+              <a:buNone/>
               <a:defRPr sz="2625" b="1">
                 <a:solidFill>
                   <a:srgbClr val="4A0221"/>
@@ -10272,6 +10607,7 @@
           </a:p>
           <a:p xmlns:a="http://schemas.openxmlformats.org/drawingml/2006/main">
             <a:pPr algn="l">
+              <a:buNone/>
               <a:defRPr sz="2625" b="1">
                 <a:solidFill>
                   <a:srgbClr val="4A0221"/>
@@ -10338,6 +10674,7 @@
               </a:defRPr>
             </a:defPPr>
             <a:lvl1pPr algn="l">
+              <a:buNone/>
               <a:defRPr sz="2175" b="0">
                 <a:solidFill>
                   <a:srgbClr val="2D2630"/>
@@ -10348,6 +10685,7 @@
               </a:defRPr>
             </a:lvl1pPr>
             <a:lvl2pPr algn="l">
+              <a:buNone/>
               <a:defRPr sz="2175" b="0">
                 <a:solidFill>
                   <a:srgbClr val="2D2630"/>
@@ -10358,6 +10696,7 @@
               </a:defRPr>
             </a:lvl2pPr>
             <a:lvl3pPr algn="l">
+              <a:buNone/>
               <a:defRPr sz="2175" b="0">
                 <a:solidFill>
                   <a:srgbClr val="2D2630"/>
@@ -10368,6 +10707,7 @@
               </a:defRPr>
             </a:lvl3pPr>
             <a:lvl4pPr algn="l">
+              <a:buNone/>
               <a:defRPr sz="2175" b="0">
                 <a:solidFill>
                   <a:srgbClr val="2D2630"/>
@@ -10378,6 +10718,7 @@
               </a:defRPr>
             </a:lvl4pPr>
             <a:lvl5pPr algn="l">
+              <a:buNone/>
               <a:defRPr sz="2175" b="0">
                 <a:solidFill>
                   <a:srgbClr val="2D2630"/>
@@ -10388,6 +10729,7 @@
               </a:defRPr>
             </a:lvl5pPr>
             <a:lvl6pPr algn="l">
+              <a:buNone/>
               <a:defRPr sz="2175" b="0">
                 <a:solidFill>
                   <a:srgbClr val="2D2630"/>
@@ -10398,6 +10740,7 @@
               </a:defRPr>
             </a:lvl6pPr>
             <a:lvl7pPr algn="l">
+              <a:buNone/>
               <a:defRPr sz="2175" b="0">
                 <a:solidFill>
                   <a:srgbClr val="2D2630"/>
@@ -10408,6 +10751,7 @@
               </a:defRPr>
             </a:lvl7pPr>
             <a:lvl8pPr algn="l">
+              <a:buNone/>
               <a:defRPr sz="2175" b="0">
                 <a:solidFill>
                   <a:srgbClr val="2D2630"/>
@@ -10418,6 +10762,7 @@
               </a:defRPr>
             </a:lvl8pPr>
             <a:lvl9pPr algn="l">
+              <a:buNone/>
               <a:defRPr sz="2175" b="0">
                 <a:solidFill>
                   <a:srgbClr val="2D2630"/>
@@ -10430,6 +10775,7 @@
           </a:lstStyle>
           <a:p xmlns:a="http://schemas.openxmlformats.org/drawingml/2006/main">
             <a:pPr algn="l">
+              <a:buNone/>
               <a:defRPr sz="2175" b="0">
                 <a:solidFill>
                   <a:srgbClr val="2D2630"/>
@@ -10453,6 +10799,7 @@
           </a:p>
           <a:p xmlns:a="http://schemas.openxmlformats.org/drawingml/2006/main">
             <a:pPr algn="l">
+              <a:buNone/>
               <a:defRPr sz="2175" b="0">
                 <a:solidFill>
                   <a:srgbClr val="2D2630"/>
@@ -10476,6 +10823,7 @@
           </a:p>
           <a:p xmlns:a="http://schemas.openxmlformats.org/drawingml/2006/main">
             <a:pPr algn="l">
+              <a:buNone/>
               <a:defRPr sz="2175" b="0">
                 <a:solidFill>
                   <a:srgbClr val="2D2630"/>
@@ -10504,7 +10852,7 @@
           <p:cNvPr id="6" name="">
             <a:extLst xmlns:a="http://schemas.openxmlformats.org/drawingml/2006/main">
               <a:ext uri="{FF2B5EF4-FFF2-40B4-BE49-F238E27FC236}">
-                <a16:creationId xmlns:a16="http://schemas.microsoft.com/office/drawing/2014/main" id="{780DFAB1-0E0E-41D0-8F9C-F4708E5F1691}"/>
+                <a16:creationId xmlns:a16="http://schemas.microsoft.com/office/drawing/2014/main" id="{8A4CFD44-9F12-4B1B-BE26-4291FE40822D}"/>
               </a:ext>
             </a:extLst>
           </p:cNvPr>
@@ -10514,7 +10862,7 @@
           <p:nvPr/>
         </p:nvPicPr>
         <p:blipFill>
-          <a:blip xmlns:r="http://schemas.openxmlformats.org/officeDocument/2006/relationships" xmlns:a="http://schemas.openxmlformats.org/drawingml/2006/main" r:embed="R518b33f7052a4623"/>
+          <a:blip xmlns:r="http://schemas.openxmlformats.org/officeDocument/2006/relationships" xmlns:a="http://schemas.openxmlformats.org/drawingml/2006/main" r:embed="R43c82a29b19c4f99"/>
           <a:stretch xmlns:a="http://schemas.openxmlformats.org/drawingml/2006/main"/>
         </p:blipFill>
         <p:spPr>
@@ -10599,6 +10947,7 @@
               </a:defRPr>
             </a:defPPr>
             <a:lvl1pPr algn="l">
+              <a:buNone/>
               <a:defRPr sz="3300" b="1">
                 <a:solidFill>
                   <a:srgbClr val="4A0221"/>
@@ -10609,6 +10958,7 @@
               </a:defRPr>
             </a:lvl1pPr>
             <a:lvl2pPr algn="l">
+              <a:buNone/>
               <a:defRPr sz="3300" b="1">
                 <a:solidFill>
                   <a:srgbClr val="4A0221"/>
@@ -10619,6 +10969,7 @@
               </a:defRPr>
             </a:lvl2pPr>
             <a:lvl3pPr algn="l">
+              <a:buNone/>
               <a:defRPr sz="3300" b="1">
                 <a:solidFill>
                   <a:srgbClr val="4A0221"/>
@@ -10629,6 +10980,7 @@
               </a:defRPr>
             </a:lvl3pPr>
             <a:lvl4pPr algn="l">
+              <a:buNone/>
               <a:defRPr sz="3300" b="1">
                 <a:solidFill>
                   <a:srgbClr val="4A0221"/>
@@ -10639,6 +10991,7 @@
               </a:defRPr>
             </a:lvl4pPr>
             <a:lvl5pPr algn="l">
+              <a:buNone/>
               <a:defRPr sz="3300" b="1">
                 <a:solidFill>
                   <a:srgbClr val="4A0221"/>
@@ -10649,6 +11002,7 @@
               </a:defRPr>
             </a:lvl5pPr>
             <a:lvl6pPr algn="l">
+              <a:buNone/>
               <a:defRPr sz="3300" b="1">
                 <a:solidFill>
                   <a:srgbClr val="4A0221"/>
@@ -10659,6 +11013,7 @@
               </a:defRPr>
             </a:lvl6pPr>
             <a:lvl7pPr algn="l">
+              <a:buNone/>
               <a:defRPr sz="3300" b="1">
                 <a:solidFill>
                   <a:srgbClr val="4A0221"/>
@@ -10669,6 +11024,7 @@
               </a:defRPr>
             </a:lvl7pPr>
             <a:lvl8pPr algn="l">
+              <a:buNone/>
               <a:defRPr sz="3300" b="1">
                 <a:solidFill>
                   <a:srgbClr val="4A0221"/>
@@ -10679,6 +11035,7 @@
               </a:defRPr>
             </a:lvl8pPr>
             <a:lvl9pPr algn="l">
+              <a:buNone/>
               <a:defRPr sz="3300" b="1">
                 <a:solidFill>
                   <a:srgbClr val="4A0221"/>
@@ -10691,6 +11048,7 @@
           </a:lstStyle>
           <a:p xmlns:a="http://schemas.openxmlformats.org/drawingml/2006/main">
             <a:pPr algn="l">
+              <a:buNone/>
               <a:defRPr sz="3300" b="1">
                 <a:solidFill>
                   <a:srgbClr val="4A0221"/>
@@ -10757,6 +11115,7 @@
               </a:defRPr>
             </a:defPPr>
             <a:lvl1pPr algn="r">
+              <a:buNone/>
               <a:defRPr sz="1200" b="0">
                 <a:solidFill>
                   <a:srgbClr val="756873"/>
@@ -10767,6 +11126,7 @@
               </a:defRPr>
             </a:lvl1pPr>
             <a:lvl2pPr algn="r">
+              <a:buNone/>
               <a:defRPr sz="1200" b="0">
                 <a:solidFill>
                   <a:srgbClr val="756873"/>
@@ -10777,6 +11137,7 @@
               </a:defRPr>
             </a:lvl2pPr>
             <a:lvl3pPr algn="r">
+              <a:buNone/>
               <a:defRPr sz="1200" b="0">
                 <a:solidFill>
                   <a:srgbClr val="756873"/>
@@ -10787,6 +11148,7 @@
               </a:defRPr>
             </a:lvl3pPr>
             <a:lvl4pPr algn="r">
+              <a:buNone/>
               <a:defRPr sz="1200" b="0">
                 <a:solidFill>
                   <a:srgbClr val="756873"/>
@@ -10797,6 +11159,7 @@
               </a:defRPr>
             </a:lvl4pPr>
             <a:lvl5pPr algn="r">
+              <a:buNone/>
               <a:defRPr sz="1200" b="0">
                 <a:solidFill>
                   <a:srgbClr val="756873"/>
@@ -10807,6 +11170,7 @@
               </a:defRPr>
             </a:lvl5pPr>
             <a:lvl6pPr algn="r">
+              <a:buNone/>
               <a:defRPr sz="1200" b="0">
                 <a:solidFill>
                   <a:srgbClr val="756873"/>
@@ -10817,6 +11181,7 @@
               </a:defRPr>
             </a:lvl6pPr>
             <a:lvl7pPr algn="r">
+              <a:buNone/>
               <a:defRPr sz="1200" b="0">
                 <a:solidFill>
                   <a:srgbClr val="756873"/>
@@ -10827,6 +11192,7 @@
               </a:defRPr>
             </a:lvl7pPr>
             <a:lvl8pPr algn="r">
+              <a:buNone/>
               <a:defRPr sz="1200" b="0">
                 <a:solidFill>
                   <a:srgbClr val="756873"/>
@@ -10837,6 +11203,7 @@
               </a:defRPr>
             </a:lvl8pPr>
             <a:lvl9pPr algn="r">
+              <a:buNone/>
               <a:defRPr sz="1200" b="0">
                 <a:solidFill>
                   <a:srgbClr val="756873"/>
@@ -10849,6 +11216,7 @@
           </a:lstStyle>
           <a:p xmlns:a="http://schemas.openxmlformats.org/drawingml/2006/main">
             <a:pPr algn="r">
+              <a:buNone/>
               <a:defRPr sz="1200" b="0">
                 <a:solidFill>
                   <a:srgbClr val="756873"/>
@@ -10915,6 +11283,7 @@
               </a:defRPr>
             </a:defPPr>
             <a:lvl1pPr algn="l">
+              <a:buNone/>
               <a:defRPr sz="7350" b="1">
                 <a:solidFill>
                   <a:srgbClr val="A31551"/>
@@ -10925,6 +11294,7 @@
               </a:defRPr>
             </a:lvl1pPr>
             <a:lvl2pPr algn="l">
+              <a:buNone/>
               <a:defRPr sz="7350" b="1">
                 <a:solidFill>
                   <a:srgbClr val="A31551"/>
@@ -10935,6 +11305,7 @@
               </a:defRPr>
             </a:lvl2pPr>
             <a:lvl3pPr algn="l">
+              <a:buNone/>
               <a:defRPr sz="7350" b="1">
                 <a:solidFill>
                   <a:srgbClr val="A31551"/>
@@ -10945,6 +11316,7 @@
               </a:defRPr>
             </a:lvl3pPr>
             <a:lvl4pPr algn="l">
+              <a:buNone/>
               <a:defRPr sz="7350" b="1">
                 <a:solidFill>
                   <a:srgbClr val="A31551"/>
@@ -10955,6 +11327,7 @@
               </a:defRPr>
             </a:lvl4pPr>
             <a:lvl5pPr algn="l">
+              <a:buNone/>
               <a:defRPr sz="7350" b="1">
                 <a:solidFill>
                   <a:srgbClr val="A31551"/>
@@ -10965,6 +11338,7 @@
               </a:defRPr>
             </a:lvl5pPr>
             <a:lvl6pPr algn="l">
+              <a:buNone/>
               <a:defRPr sz="7350" b="1">
                 <a:solidFill>
                   <a:srgbClr val="A31551"/>
@@ -10975,6 +11349,7 @@
               </a:defRPr>
             </a:lvl6pPr>
             <a:lvl7pPr algn="l">
+              <a:buNone/>
               <a:defRPr sz="7350" b="1">
                 <a:solidFill>
                   <a:srgbClr val="A31551"/>
@@ -10985,6 +11360,7 @@
               </a:defRPr>
             </a:lvl7pPr>
             <a:lvl8pPr algn="l">
+              <a:buNone/>
               <a:defRPr sz="7350" b="1">
                 <a:solidFill>
                   <a:srgbClr val="A31551"/>
@@ -10995,6 +11371,7 @@
               </a:defRPr>
             </a:lvl8pPr>
             <a:lvl9pPr algn="l">
+              <a:buNone/>
               <a:defRPr sz="7350" b="1">
                 <a:solidFill>
                   <a:srgbClr val="A31551"/>
@@ -11007,6 +11384,7 @@
           </a:lstStyle>
           <a:p xmlns:a="http://schemas.openxmlformats.org/drawingml/2006/main">
             <a:pPr algn="l">
+              <a:buNone/>
               <a:defRPr sz="7350" b="1">
                 <a:solidFill>
                   <a:srgbClr val="A31551"/>
@@ -11073,6 +11451,7 @@
               </a:defRPr>
             </a:defPPr>
             <a:lvl1pPr algn="l">
+              <a:buNone/>
               <a:defRPr sz="2850" b="1">
                 <a:solidFill>
                   <a:srgbClr val="4A0221"/>
@@ -11083,6 +11462,7 @@
               </a:defRPr>
             </a:lvl1pPr>
             <a:lvl2pPr algn="l">
+              <a:buNone/>
               <a:defRPr sz="2850" b="1">
                 <a:solidFill>
                   <a:srgbClr val="4A0221"/>
@@ -11093,6 +11473,7 @@
               </a:defRPr>
             </a:lvl2pPr>
             <a:lvl3pPr algn="l">
+              <a:buNone/>
               <a:defRPr sz="2850" b="1">
                 <a:solidFill>
                   <a:srgbClr val="4A0221"/>
@@ -11103,6 +11484,7 @@
               </a:defRPr>
             </a:lvl3pPr>
             <a:lvl4pPr algn="l">
+              <a:buNone/>
               <a:defRPr sz="2850" b="1">
                 <a:solidFill>
                   <a:srgbClr val="4A0221"/>
@@ -11113,6 +11495,7 @@
               </a:defRPr>
             </a:lvl4pPr>
             <a:lvl5pPr algn="l">
+              <a:buNone/>
               <a:defRPr sz="2850" b="1">
                 <a:solidFill>
                   <a:srgbClr val="4A0221"/>
@@ -11123,6 +11506,7 @@
               </a:defRPr>
             </a:lvl5pPr>
             <a:lvl6pPr algn="l">
+              <a:buNone/>
               <a:defRPr sz="2850" b="1">
                 <a:solidFill>
                   <a:srgbClr val="4A0221"/>
@@ -11133,6 +11517,7 @@
               </a:defRPr>
             </a:lvl6pPr>
             <a:lvl7pPr algn="l">
+              <a:buNone/>
               <a:defRPr sz="2850" b="1">
                 <a:solidFill>
                   <a:srgbClr val="4A0221"/>
@@ -11143,6 +11528,7 @@
               </a:defRPr>
             </a:lvl7pPr>
             <a:lvl8pPr algn="l">
+              <a:buNone/>
               <a:defRPr sz="2850" b="1">
                 <a:solidFill>
                   <a:srgbClr val="4A0221"/>
@@ -11153,6 +11539,7 @@
               </a:defRPr>
             </a:lvl8pPr>
             <a:lvl9pPr algn="l">
+              <a:buNone/>
               <a:defRPr sz="2850" b="1">
                 <a:solidFill>
                   <a:srgbClr val="4A0221"/>
@@ -11165,6 +11552,7 @@
           </a:lstStyle>
           <a:p xmlns:a="http://schemas.openxmlformats.org/drawingml/2006/main">
             <a:pPr algn="l">
+              <a:buNone/>
               <a:defRPr sz="2850" b="1">
                 <a:solidFill>
                   <a:srgbClr val="4A0221"/>
@@ -11188,6 +11576,7 @@
           </a:p>
           <a:p xmlns:a="http://schemas.openxmlformats.org/drawingml/2006/main">
             <a:pPr algn="l">
+              <a:buNone/>
               <a:defRPr sz="2850" b="1">
                 <a:solidFill>
                   <a:srgbClr val="4A0221"/>
@@ -11254,6 +11643,7 @@
               </a:defRPr>
             </a:defPPr>
             <a:lvl1pPr algn="l">
+              <a:buNone/>
               <a:defRPr sz="2325" b="1">
                 <a:solidFill>
                   <a:srgbClr val="A31551"/>
@@ -11264,6 +11654,7 @@
               </a:defRPr>
             </a:lvl1pPr>
             <a:lvl2pPr algn="l">
+              <a:buNone/>
               <a:defRPr sz="2325" b="1">
                 <a:solidFill>
                   <a:srgbClr val="A31551"/>
@@ -11274,6 +11665,7 @@
               </a:defRPr>
             </a:lvl2pPr>
             <a:lvl3pPr algn="l">
+              <a:buNone/>
               <a:defRPr sz="2325" b="1">
                 <a:solidFill>
                   <a:srgbClr val="A31551"/>
@@ -11284,6 +11676,7 @@
               </a:defRPr>
             </a:lvl3pPr>
             <a:lvl4pPr algn="l">
+              <a:buNone/>
               <a:defRPr sz="2325" b="1">
                 <a:solidFill>
                   <a:srgbClr val="A31551"/>
@@ -11294,6 +11687,7 @@
               </a:defRPr>
             </a:lvl4pPr>
             <a:lvl5pPr algn="l">
+              <a:buNone/>
               <a:defRPr sz="2325" b="1">
                 <a:solidFill>
                   <a:srgbClr val="A31551"/>
@@ -11304,6 +11698,7 @@
               </a:defRPr>
             </a:lvl5pPr>
             <a:lvl6pPr algn="l">
+              <a:buNone/>
               <a:defRPr sz="2325" b="1">
                 <a:solidFill>
                   <a:srgbClr val="A31551"/>
@@ -11314,6 +11709,7 @@
               </a:defRPr>
             </a:lvl6pPr>
             <a:lvl7pPr algn="l">
+              <a:buNone/>
               <a:defRPr sz="2325" b="1">
                 <a:solidFill>
                   <a:srgbClr val="A31551"/>
@@ -11324,6 +11720,7 @@
               </a:defRPr>
             </a:lvl7pPr>
             <a:lvl8pPr algn="l">
+              <a:buNone/>
               <a:defRPr sz="2325" b="1">
                 <a:solidFill>
                   <a:srgbClr val="A31551"/>
@@ -11334,6 +11731,7 @@
               </a:defRPr>
             </a:lvl8pPr>
             <a:lvl9pPr algn="l">
+              <a:buNone/>
               <a:defRPr sz="2325" b="1">
                 <a:solidFill>
                   <a:srgbClr val="A31551"/>
@@ -11346,6 +11744,7 @@
           </a:lstStyle>
           <a:p xmlns:a="http://schemas.openxmlformats.org/drawingml/2006/main">
             <a:pPr algn="l">
+              <a:buNone/>
               <a:defRPr sz="2325" b="1">
                 <a:solidFill>
                   <a:srgbClr val="A31551"/>
@@ -11412,6 +11811,7 @@
               </a:defRPr>
             </a:defPPr>
             <a:lvl1pPr algn="l">
+              <a:buNone/>
               <a:defRPr sz="2025" b="0">
                 <a:solidFill>
                   <a:srgbClr val="2D2630"/>
@@ -11422,6 +11822,7 @@
               </a:defRPr>
             </a:lvl1pPr>
             <a:lvl2pPr algn="l">
+              <a:buNone/>
               <a:defRPr sz="2025" b="0">
                 <a:solidFill>
                   <a:srgbClr val="2D2630"/>
@@ -11432,6 +11833,7 @@
               </a:defRPr>
             </a:lvl2pPr>
             <a:lvl3pPr algn="l">
+              <a:buNone/>
               <a:defRPr sz="2025" b="0">
                 <a:solidFill>
                   <a:srgbClr val="2D2630"/>
@@ -11442,6 +11844,7 @@
               </a:defRPr>
             </a:lvl3pPr>
             <a:lvl4pPr algn="l">
+              <a:buNone/>
               <a:defRPr sz="2025" b="0">
                 <a:solidFill>
                   <a:srgbClr val="2D2630"/>
@@ -11452,6 +11855,7 @@
               </a:defRPr>
             </a:lvl4pPr>
             <a:lvl5pPr algn="l">
+              <a:buNone/>
               <a:defRPr sz="2025" b="0">
                 <a:solidFill>
                   <a:srgbClr val="2D2630"/>
@@ -11462,6 +11866,7 @@
               </a:defRPr>
             </a:lvl5pPr>
             <a:lvl6pPr algn="l">
+              <a:buNone/>
               <a:defRPr sz="2025" b="0">
                 <a:solidFill>
                   <a:srgbClr val="2D2630"/>
@@ -11472,6 +11877,7 @@
               </a:defRPr>
             </a:lvl6pPr>
             <a:lvl7pPr algn="l">
+              <a:buNone/>
               <a:defRPr sz="2025" b="0">
                 <a:solidFill>
                   <a:srgbClr val="2D2630"/>
@@ -11482,6 +11888,7 @@
               </a:defRPr>
             </a:lvl7pPr>
             <a:lvl8pPr algn="l">
+              <a:buNone/>
               <a:defRPr sz="2025" b="0">
                 <a:solidFill>
                   <a:srgbClr val="2D2630"/>
@@ -11492,6 +11899,7 @@
               </a:defRPr>
             </a:lvl8pPr>
             <a:lvl9pPr algn="l">
+              <a:buNone/>
               <a:defRPr sz="2025" b="0">
                 <a:solidFill>
                   <a:srgbClr val="2D2630"/>
@@ -11504,6 +11912,7 @@
           </a:lstStyle>
           <a:p xmlns:a="http://schemas.openxmlformats.org/drawingml/2006/main">
             <a:pPr algn="l">
+              <a:buNone/>
               <a:defRPr sz="2025" b="0">
                 <a:solidFill>
                   <a:srgbClr val="2D2630"/>
@@ -11570,6 +11979,7 @@
               </a:defRPr>
             </a:defPPr>
             <a:lvl1pPr algn="l">
+              <a:buNone/>
               <a:defRPr sz="2325" b="1">
                 <a:solidFill>
                   <a:srgbClr val="A31551"/>
@@ -11580,6 +11990,7 @@
               </a:defRPr>
             </a:lvl1pPr>
             <a:lvl2pPr algn="l">
+              <a:buNone/>
               <a:defRPr sz="2325" b="1">
                 <a:solidFill>
                   <a:srgbClr val="A31551"/>
@@ -11590,6 +12001,7 @@
               </a:defRPr>
             </a:lvl2pPr>
             <a:lvl3pPr algn="l">
+              <a:buNone/>
               <a:defRPr sz="2325" b="1">
                 <a:solidFill>
                   <a:srgbClr val="A31551"/>
@@ -11600,6 +12012,7 @@
               </a:defRPr>
             </a:lvl3pPr>
             <a:lvl4pPr algn="l">
+              <a:buNone/>
               <a:defRPr sz="2325" b="1">
                 <a:solidFill>
                   <a:srgbClr val="A31551"/>
@@ -11610,6 +12023,7 @@
               </a:defRPr>
             </a:lvl4pPr>
             <a:lvl5pPr algn="l">
+              <a:buNone/>
               <a:defRPr sz="2325" b="1">
                 <a:solidFill>
                   <a:srgbClr val="A31551"/>
@@ -11620,6 +12034,7 @@
               </a:defRPr>
             </a:lvl5pPr>
             <a:lvl6pPr algn="l">
+              <a:buNone/>
               <a:defRPr sz="2325" b="1">
                 <a:solidFill>
                   <a:srgbClr val="A31551"/>
@@ -11630,6 +12045,7 @@
               </a:defRPr>
             </a:lvl6pPr>
             <a:lvl7pPr algn="l">
+              <a:buNone/>
               <a:defRPr sz="2325" b="1">
                 <a:solidFill>
                   <a:srgbClr val="A31551"/>
@@ -11640,6 +12056,7 @@
               </a:defRPr>
             </a:lvl7pPr>
             <a:lvl8pPr algn="l">
+              <a:buNone/>
               <a:defRPr sz="2325" b="1">
                 <a:solidFill>
                   <a:srgbClr val="A31551"/>
@@ -11650,6 +12067,7 @@
               </a:defRPr>
             </a:lvl8pPr>
             <a:lvl9pPr algn="l">
+              <a:buNone/>
               <a:defRPr sz="2325" b="1">
                 <a:solidFill>
                   <a:srgbClr val="A31551"/>
@@ -11662,6 +12080,7 @@
           </a:lstStyle>
           <a:p xmlns:a="http://schemas.openxmlformats.org/drawingml/2006/main">
             <a:pPr algn="l">
+              <a:buNone/>
               <a:defRPr sz="2325" b="1">
                 <a:solidFill>
                   <a:srgbClr val="A31551"/>
@@ -11728,6 +12147,7 @@
               </a:defRPr>
             </a:defPPr>
             <a:lvl1pPr algn="l">
+              <a:buNone/>
               <a:defRPr sz="2025" b="0">
                 <a:solidFill>
                   <a:srgbClr val="2D2630"/>
@@ -11738,6 +12158,7 @@
               </a:defRPr>
             </a:lvl1pPr>
             <a:lvl2pPr algn="l">
+              <a:buNone/>
               <a:defRPr sz="2025" b="0">
                 <a:solidFill>
                   <a:srgbClr val="2D2630"/>
@@ -11748,6 +12169,7 @@
               </a:defRPr>
             </a:lvl2pPr>
             <a:lvl3pPr algn="l">
+              <a:buNone/>
               <a:defRPr sz="2025" b="0">
                 <a:solidFill>
                   <a:srgbClr val="2D2630"/>
@@ -11758,6 +12180,7 @@
               </a:defRPr>
             </a:lvl3pPr>
             <a:lvl4pPr algn="l">
+              <a:buNone/>
               <a:defRPr sz="2025" b="0">
                 <a:solidFill>
                   <a:srgbClr val="2D2630"/>
@@ -11768,6 +12191,7 @@
               </a:defRPr>
             </a:lvl4pPr>
             <a:lvl5pPr algn="l">
+              <a:buNone/>
               <a:defRPr sz="2025" b="0">
                 <a:solidFill>
                   <a:srgbClr val="2D2630"/>
@@ -11778,6 +12202,7 @@
               </a:defRPr>
             </a:lvl5pPr>
             <a:lvl6pPr algn="l">
+              <a:buNone/>
               <a:defRPr sz="2025" b="0">
                 <a:solidFill>
                   <a:srgbClr val="2D2630"/>
@@ -11788,6 +12213,7 @@
               </a:defRPr>
             </a:lvl6pPr>
             <a:lvl7pPr algn="l">
+              <a:buNone/>
               <a:defRPr sz="2025" b="0">
                 <a:solidFill>
                   <a:srgbClr val="2D2630"/>
@@ -11798,6 +12224,7 @@
               </a:defRPr>
             </a:lvl7pPr>
             <a:lvl8pPr algn="l">
+              <a:buNone/>
               <a:defRPr sz="2025" b="0">
                 <a:solidFill>
                   <a:srgbClr val="2D2630"/>
@@ -11808,6 +12235,7 @@
               </a:defRPr>
             </a:lvl8pPr>
             <a:lvl9pPr algn="l">
+              <a:buNone/>
               <a:defRPr sz="2025" b="0">
                 <a:solidFill>
                   <a:srgbClr val="2D2630"/>
@@ -11820,6 +12248,7 @@
           </a:lstStyle>
           <a:p xmlns:a="http://schemas.openxmlformats.org/drawingml/2006/main">
             <a:pPr algn="l">
+              <a:buNone/>
               <a:defRPr sz="2025" b="0">
                 <a:solidFill>
                   <a:srgbClr val="2D2630"/>
@@ -11886,6 +12315,7 @@
               </a:defRPr>
             </a:defPPr>
             <a:lvl1pPr algn="l">
+              <a:buNone/>
               <a:defRPr sz="2325" b="1">
                 <a:solidFill>
                   <a:srgbClr val="A31551"/>
@@ -11896,6 +12326,7 @@
               </a:defRPr>
             </a:lvl1pPr>
             <a:lvl2pPr algn="l">
+              <a:buNone/>
               <a:defRPr sz="2325" b="1">
                 <a:solidFill>
                   <a:srgbClr val="A31551"/>
@@ -11906,6 +12337,7 @@
               </a:defRPr>
             </a:lvl2pPr>
             <a:lvl3pPr algn="l">
+              <a:buNone/>
               <a:defRPr sz="2325" b="1">
                 <a:solidFill>
                   <a:srgbClr val="A31551"/>
@@ -11916,6 +12348,7 @@
               </a:defRPr>
             </a:lvl3pPr>
             <a:lvl4pPr algn="l">
+              <a:buNone/>
               <a:defRPr sz="2325" b="1">
                 <a:solidFill>
                   <a:srgbClr val="A31551"/>
@@ -11926,6 +12359,7 @@
               </a:defRPr>
             </a:lvl4pPr>
             <a:lvl5pPr algn="l">
+              <a:buNone/>
               <a:defRPr sz="2325" b="1">
                 <a:solidFill>
                   <a:srgbClr val="A31551"/>
@@ -11936,6 +12370,7 @@
               </a:defRPr>
             </a:lvl5pPr>
             <a:lvl6pPr algn="l">
+              <a:buNone/>
               <a:defRPr sz="2325" b="1">
                 <a:solidFill>
                   <a:srgbClr val="A31551"/>
@@ -11946,6 +12381,7 @@
               </a:defRPr>
             </a:lvl6pPr>
             <a:lvl7pPr algn="l">
+              <a:buNone/>
               <a:defRPr sz="2325" b="1">
                 <a:solidFill>
                   <a:srgbClr val="A31551"/>
@@ -11956,6 +12392,7 @@
               </a:defRPr>
             </a:lvl7pPr>
             <a:lvl8pPr algn="l">
+              <a:buNone/>
               <a:defRPr sz="2325" b="1">
                 <a:solidFill>
                   <a:srgbClr val="A31551"/>
@@ -11966,6 +12403,7 @@
               </a:defRPr>
             </a:lvl8pPr>
             <a:lvl9pPr algn="l">
+              <a:buNone/>
               <a:defRPr sz="2325" b="1">
                 <a:solidFill>
                   <a:srgbClr val="A31551"/>
@@ -11978,6 +12416,7 @@
           </a:lstStyle>
           <a:p xmlns:a="http://schemas.openxmlformats.org/drawingml/2006/main">
             <a:pPr algn="l">
+              <a:buNone/>
               <a:defRPr sz="2325" b="1">
                 <a:solidFill>
                   <a:srgbClr val="A31551"/>
@@ -12044,6 +12483,7 @@
               </a:defRPr>
             </a:defPPr>
             <a:lvl1pPr algn="l">
+              <a:buNone/>
               <a:defRPr sz="2025" b="0">
                 <a:solidFill>
                   <a:srgbClr val="2D2630"/>
@@ -12054,6 +12494,7 @@
               </a:defRPr>
             </a:lvl1pPr>
             <a:lvl2pPr algn="l">
+              <a:buNone/>
               <a:defRPr sz="2025" b="0">
                 <a:solidFill>
                   <a:srgbClr val="2D2630"/>
@@ -12064,6 +12505,7 @@
               </a:defRPr>
             </a:lvl2pPr>
             <a:lvl3pPr algn="l">
+              <a:buNone/>
               <a:defRPr sz="2025" b="0">
                 <a:solidFill>
                   <a:srgbClr val="2D2630"/>
@@ -12074,6 +12516,7 @@
               </a:defRPr>
             </a:lvl3pPr>
             <a:lvl4pPr algn="l">
+              <a:buNone/>
               <a:defRPr sz="2025" b="0">
                 <a:solidFill>
                   <a:srgbClr val="2D2630"/>
@@ -12084,6 +12527,7 @@
               </a:defRPr>
             </a:lvl4pPr>
             <a:lvl5pPr algn="l">
+              <a:buNone/>
               <a:defRPr sz="2025" b="0">
                 <a:solidFill>
                   <a:srgbClr val="2D2630"/>
@@ -12094,6 +12538,7 @@
               </a:defRPr>
             </a:lvl5pPr>
             <a:lvl6pPr algn="l">
+              <a:buNone/>
               <a:defRPr sz="2025" b="0">
                 <a:solidFill>
                   <a:srgbClr val="2D2630"/>
@@ -12104,6 +12549,7 @@
               </a:defRPr>
             </a:lvl6pPr>
             <a:lvl7pPr algn="l">
+              <a:buNone/>
               <a:defRPr sz="2025" b="0">
                 <a:solidFill>
                   <a:srgbClr val="2D2630"/>
@@ -12114,6 +12560,7 @@
               </a:defRPr>
             </a:lvl7pPr>
             <a:lvl8pPr algn="l">
+              <a:buNone/>
               <a:defRPr sz="2025" b="0">
                 <a:solidFill>
                   <a:srgbClr val="2D2630"/>
@@ -12124,6 +12571,7 @@
               </a:defRPr>
             </a:lvl8pPr>
             <a:lvl9pPr algn="l">
+              <a:buNone/>
               <a:defRPr sz="2025" b="0">
                 <a:solidFill>
                   <a:srgbClr val="2D2630"/>
@@ -12136,6 +12584,7 @@
           </a:lstStyle>
           <a:p xmlns:a="http://schemas.openxmlformats.org/drawingml/2006/main">
             <a:pPr algn="l">
+              <a:buNone/>
               <a:defRPr sz="2025" b="0">
                 <a:solidFill>
                   <a:srgbClr val="2D2630"/>
@@ -12202,6 +12651,7 @@
               </a:defRPr>
             </a:defPPr>
             <a:lvl1pPr algn="l">
+              <a:buNone/>
               <a:defRPr sz="2325" b="1">
                 <a:solidFill>
                   <a:srgbClr val="A31551"/>
@@ -12212,6 +12662,7 @@
               </a:defRPr>
             </a:lvl1pPr>
             <a:lvl2pPr algn="l">
+              <a:buNone/>
               <a:defRPr sz="2325" b="1">
                 <a:solidFill>
                   <a:srgbClr val="A31551"/>
@@ -12222,6 +12673,7 @@
               </a:defRPr>
             </a:lvl2pPr>
             <a:lvl3pPr algn="l">
+              <a:buNone/>
               <a:defRPr sz="2325" b="1">
                 <a:solidFill>
                   <a:srgbClr val="A31551"/>
@@ -12232,6 +12684,7 @@
               </a:defRPr>
             </a:lvl3pPr>
             <a:lvl4pPr algn="l">
+              <a:buNone/>
               <a:defRPr sz="2325" b="1">
                 <a:solidFill>
                   <a:srgbClr val="A31551"/>
@@ -12242,6 +12695,7 @@
               </a:defRPr>
             </a:lvl4pPr>
             <a:lvl5pPr algn="l">
+              <a:buNone/>
               <a:defRPr sz="2325" b="1">
                 <a:solidFill>
                   <a:srgbClr val="A31551"/>
@@ -12252,6 +12706,7 @@
               </a:defRPr>
             </a:lvl5pPr>
             <a:lvl6pPr algn="l">
+              <a:buNone/>
               <a:defRPr sz="2325" b="1">
                 <a:solidFill>
                   <a:srgbClr val="A31551"/>
@@ -12262,6 +12717,7 @@
               </a:defRPr>
             </a:lvl6pPr>
             <a:lvl7pPr algn="l">
+              <a:buNone/>
               <a:defRPr sz="2325" b="1">
                 <a:solidFill>
                   <a:srgbClr val="A31551"/>
@@ -12272,6 +12728,7 @@
               </a:defRPr>
             </a:lvl7pPr>
             <a:lvl8pPr algn="l">
+              <a:buNone/>
               <a:defRPr sz="2325" b="1">
                 <a:solidFill>
                   <a:srgbClr val="A31551"/>
@@ -12282,6 +12739,7 @@
               </a:defRPr>
             </a:lvl8pPr>
             <a:lvl9pPr algn="l">
+              <a:buNone/>
               <a:defRPr sz="2325" b="1">
                 <a:solidFill>
                   <a:srgbClr val="A31551"/>
@@ -12294,6 +12752,7 @@
           </a:lstStyle>
           <a:p xmlns:a="http://schemas.openxmlformats.org/drawingml/2006/main">
             <a:pPr algn="l">
+              <a:buNone/>
               <a:defRPr sz="2325" b="1">
                 <a:solidFill>
                   <a:srgbClr val="A31551"/>
@@ -12360,6 +12819,7 @@
               </a:defRPr>
             </a:defPPr>
             <a:lvl1pPr algn="l">
+              <a:buNone/>
               <a:defRPr sz="2025" b="0">
                 <a:solidFill>
                   <a:srgbClr val="2D2630"/>
@@ -12370,6 +12830,7 @@
               </a:defRPr>
             </a:lvl1pPr>
             <a:lvl2pPr algn="l">
+              <a:buNone/>
               <a:defRPr sz="2025" b="0">
                 <a:solidFill>
                   <a:srgbClr val="2D2630"/>
@@ -12380,6 +12841,7 @@
               </a:defRPr>
             </a:lvl2pPr>
             <a:lvl3pPr algn="l">
+              <a:buNone/>
               <a:defRPr sz="2025" b="0">
                 <a:solidFill>
                   <a:srgbClr val="2D2630"/>
@@ -12390,6 +12852,7 @@
               </a:defRPr>
             </a:lvl3pPr>
             <a:lvl4pPr algn="l">
+              <a:buNone/>
               <a:defRPr sz="2025" b="0">
                 <a:solidFill>
                   <a:srgbClr val="2D2630"/>
@@ -12400,6 +12863,7 @@
               </a:defRPr>
             </a:lvl4pPr>
             <a:lvl5pPr algn="l">
+              <a:buNone/>
               <a:defRPr sz="2025" b="0">
                 <a:solidFill>
                   <a:srgbClr val="2D2630"/>
@@ -12410,6 +12874,7 @@
               </a:defRPr>
             </a:lvl5pPr>
             <a:lvl6pPr algn="l">
+              <a:buNone/>
               <a:defRPr sz="2025" b="0">
                 <a:solidFill>
                   <a:srgbClr val="2D2630"/>
@@ -12420,6 +12885,7 @@
               </a:defRPr>
             </a:lvl6pPr>
             <a:lvl7pPr algn="l">
+              <a:buNone/>
               <a:defRPr sz="2025" b="0">
                 <a:solidFill>
                   <a:srgbClr val="2D2630"/>
@@ -12430,6 +12896,7 @@
               </a:defRPr>
             </a:lvl7pPr>
             <a:lvl8pPr algn="l">
+              <a:buNone/>
               <a:defRPr sz="2025" b="0">
                 <a:solidFill>
                   <a:srgbClr val="2D2630"/>
@@ -12440,6 +12907,7 @@
               </a:defRPr>
             </a:lvl8pPr>
             <a:lvl9pPr algn="l">
+              <a:buNone/>
               <a:defRPr sz="2025" b="0">
                 <a:solidFill>
                   <a:srgbClr val="2D2630"/>
@@ -12452,6 +12920,7 @@
           </a:lstStyle>
           <a:p xmlns:a="http://schemas.openxmlformats.org/drawingml/2006/main">
             <a:pPr algn="l">
+              <a:buNone/>
               <a:defRPr sz="2025" b="0">
                 <a:solidFill>
                   <a:srgbClr val="2D2630"/>
@@ -12518,6 +12987,7 @@
               </a:defRPr>
             </a:defPPr>
             <a:lvl1pPr algn="l">
+              <a:buNone/>
               <a:defRPr sz="1500" b="0">
                 <a:solidFill>
                   <a:srgbClr val="756873"/>
@@ -12528,6 +12998,7 @@
               </a:defRPr>
             </a:lvl1pPr>
             <a:lvl2pPr algn="l">
+              <a:buNone/>
               <a:defRPr sz="1500" b="0">
                 <a:solidFill>
                   <a:srgbClr val="756873"/>
@@ -12538,6 +13009,7 @@
               </a:defRPr>
             </a:lvl2pPr>
             <a:lvl3pPr algn="l">
+              <a:buNone/>
               <a:defRPr sz="1500" b="0">
                 <a:solidFill>
                   <a:srgbClr val="756873"/>
@@ -12548,6 +13020,7 @@
               </a:defRPr>
             </a:lvl3pPr>
             <a:lvl4pPr algn="l">
+              <a:buNone/>
               <a:defRPr sz="1500" b="0">
                 <a:solidFill>
                   <a:srgbClr val="756873"/>
@@ -12558,6 +13031,7 @@
               </a:defRPr>
             </a:lvl4pPr>
             <a:lvl5pPr algn="l">
+              <a:buNone/>
               <a:defRPr sz="1500" b="0">
                 <a:solidFill>
                   <a:srgbClr val="756873"/>
@@ -12568,6 +13042,7 @@
               </a:defRPr>
             </a:lvl5pPr>
             <a:lvl6pPr algn="l">
+              <a:buNone/>
               <a:defRPr sz="1500" b="0">
                 <a:solidFill>
                   <a:srgbClr val="756873"/>
@@ -12578,6 +13053,7 @@
               </a:defRPr>
             </a:lvl6pPr>
             <a:lvl7pPr algn="l">
+              <a:buNone/>
               <a:defRPr sz="1500" b="0">
                 <a:solidFill>
                   <a:srgbClr val="756873"/>
@@ -12588,6 +13064,7 @@
               </a:defRPr>
             </a:lvl7pPr>
             <a:lvl8pPr algn="l">
+              <a:buNone/>
               <a:defRPr sz="1500" b="0">
                 <a:solidFill>
                   <a:srgbClr val="756873"/>
@@ -12598,6 +13075,7 @@
               </a:defRPr>
             </a:lvl8pPr>
             <a:lvl9pPr algn="l">
+              <a:buNone/>
               <a:defRPr sz="1500" b="0">
                 <a:solidFill>
                   <a:srgbClr val="756873"/>
@@ -12610,6 +13088,7 @@
           </a:lstStyle>
           <a:p xmlns:a="http://schemas.openxmlformats.org/drawingml/2006/main">
             <a:pPr algn="l">
+              <a:buNone/>
               <a:defRPr sz="1500" b="0">
                 <a:solidFill>
                   <a:srgbClr val="756873"/>
@@ -12705,6 +13184,7 @@
               </a:defRPr>
             </a:defPPr>
             <a:lvl1pPr algn="l">
+              <a:buNone/>
               <a:defRPr sz="3300" b="1">
                 <a:solidFill>
                   <a:srgbClr val="4A0221"/>
@@ -12715,6 +13195,7 @@
               </a:defRPr>
             </a:lvl1pPr>
             <a:lvl2pPr algn="l">
+              <a:buNone/>
               <a:defRPr sz="3300" b="1">
                 <a:solidFill>
                   <a:srgbClr val="4A0221"/>
@@ -12725,6 +13206,7 @@
               </a:defRPr>
             </a:lvl2pPr>
             <a:lvl3pPr algn="l">
+              <a:buNone/>
               <a:defRPr sz="3300" b="1">
                 <a:solidFill>
                   <a:srgbClr val="4A0221"/>
@@ -12735,6 +13217,7 @@
               </a:defRPr>
             </a:lvl3pPr>
             <a:lvl4pPr algn="l">
+              <a:buNone/>
               <a:defRPr sz="3300" b="1">
                 <a:solidFill>
                   <a:srgbClr val="4A0221"/>
@@ -12745,6 +13228,7 @@
               </a:defRPr>
             </a:lvl4pPr>
             <a:lvl5pPr algn="l">
+              <a:buNone/>
               <a:defRPr sz="3300" b="1">
                 <a:solidFill>
                   <a:srgbClr val="4A0221"/>
@@ -12755,6 +13239,7 @@
               </a:defRPr>
             </a:lvl5pPr>
             <a:lvl6pPr algn="l">
+              <a:buNone/>
               <a:defRPr sz="3300" b="1">
                 <a:solidFill>
                   <a:srgbClr val="4A0221"/>
@@ -12765,6 +13250,7 @@
               </a:defRPr>
             </a:lvl6pPr>
             <a:lvl7pPr algn="l">
+              <a:buNone/>
               <a:defRPr sz="3300" b="1">
                 <a:solidFill>
                   <a:srgbClr val="4A0221"/>
@@ -12775,6 +13261,7 @@
               </a:defRPr>
             </a:lvl7pPr>
             <a:lvl8pPr algn="l">
+              <a:buNone/>
               <a:defRPr sz="3300" b="1">
                 <a:solidFill>
                   <a:srgbClr val="4A0221"/>
@@ -12785,6 +13272,7 @@
               </a:defRPr>
             </a:lvl8pPr>
             <a:lvl9pPr algn="l">
+              <a:buNone/>
               <a:defRPr sz="3300" b="1">
                 <a:solidFill>
                   <a:srgbClr val="4A0221"/>
@@ -12797,6 +13285,7 @@
           </a:lstStyle>
           <a:p xmlns:a="http://schemas.openxmlformats.org/drawingml/2006/main">
             <a:pPr algn="l">
+              <a:buNone/>
               <a:defRPr sz="3300" b="1">
                 <a:solidFill>
                   <a:srgbClr val="4A0221"/>
@@ -12863,6 +13352,7 @@
               </a:defRPr>
             </a:defPPr>
             <a:lvl1pPr algn="r">
+              <a:buNone/>
               <a:defRPr sz="1200" b="0">
                 <a:solidFill>
                   <a:srgbClr val="756873"/>
@@ -12873,6 +13363,7 @@
               </a:defRPr>
             </a:lvl1pPr>
             <a:lvl2pPr algn="r">
+              <a:buNone/>
               <a:defRPr sz="1200" b="0">
                 <a:solidFill>
                   <a:srgbClr val="756873"/>
@@ -12883,6 +13374,7 @@
               </a:defRPr>
             </a:lvl2pPr>
             <a:lvl3pPr algn="r">
+              <a:buNone/>
               <a:defRPr sz="1200" b="0">
                 <a:solidFill>
                   <a:srgbClr val="756873"/>
@@ -12893,6 +13385,7 @@
               </a:defRPr>
             </a:lvl3pPr>
             <a:lvl4pPr algn="r">
+              <a:buNone/>
               <a:defRPr sz="1200" b="0">
                 <a:solidFill>
                   <a:srgbClr val="756873"/>
@@ -12903,6 +13396,7 @@
               </a:defRPr>
             </a:lvl4pPr>
             <a:lvl5pPr algn="r">
+              <a:buNone/>
               <a:defRPr sz="1200" b="0">
                 <a:solidFill>
                   <a:srgbClr val="756873"/>
@@ -12913,6 +13407,7 @@
               </a:defRPr>
             </a:lvl5pPr>
             <a:lvl6pPr algn="r">
+              <a:buNone/>
               <a:defRPr sz="1200" b="0">
                 <a:solidFill>
                   <a:srgbClr val="756873"/>
@@ -12923,6 +13418,7 @@
               </a:defRPr>
             </a:lvl6pPr>
             <a:lvl7pPr algn="r">
+              <a:buNone/>
               <a:defRPr sz="1200" b="0">
                 <a:solidFill>
                   <a:srgbClr val="756873"/>
@@ -12933,6 +13429,7 @@
               </a:defRPr>
             </a:lvl7pPr>
             <a:lvl8pPr algn="r">
+              <a:buNone/>
               <a:defRPr sz="1200" b="0">
                 <a:solidFill>
                   <a:srgbClr val="756873"/>
@@ -12943,6 +13440,7 @@
               </a:defRPr>
             </a:lvl8pPr>
             <a:lvl9pPr algn="r">
+              <a:buNone/>
               <a:defRPr sz="1200" b="0">
                 <a:solidFill>
                   <a:srgbClr val="756873"/>
@@ -12955,6 +13453,7 @@
           </a:lstStyle>
           <a:p xmlns:a="http://schemas.openxmlformats.org/drawingml/2006/main">
             <a:pPr algn="r">
+              <a:buNone/>
               <a:defRPr sz="1200" b="0">
                 <a:solidFill>
                   <a:srgbClr val="756873"/>
@@ -13021,6 +13520,7 @@
               </a:defRPr>
             </a:defPPr>
             <a:lvl1pPr algn="l">
+              <a:buNone/>
               <a:defRPr sz="2325" b="1">
                 <a:solidFill>
                   <a:srgbClr val="A31551"/>
@@ -13031,6 +13531,7 @@
               </a:defRPr>
             </a:lvl1pPr>
             <a:lvl2pPr algn="l">
+              <a:buNone/>
               <a:defRPr sz="2325" b="1">
                 <a:solidFill>
                   <a:srgbClr val="A31551"/>
@@ -13041,6 +13542,7 @@
               </a:defRPr>
             </a:lvl2pPr>
             <a:lvl3pPr algn="l">
+              <a:buNone/>
               <a:defRPr sz="2325" b="1">
                 <a:solidFill>
                   <a:srgbClr val="A31551"/>
@@ -13051,6 +13553,7 @@
               </a:defRPr>
             </a:lvl3pPr>
             <a:lvl4pPr algn="l">
+              <a:buNone/>
               <a:defRPr sz="2325" b="1">
                 <a:solidFill>
                   <a:srgbClr val="A31551"/>
@@ -13061,6 +13564,7 @@
               </a:defRPr>
             </a:lvl4pPr>
             <a:lvl5pPr algn="l">
+              <a:buNone/>
               <a:defRPr sz="2325" b="1">
                 <a:solidFill>
                   <a:srgbClr val="A31551"/>
@@ -13071,6 +13575,7 @@
               </a:defRPr>
             </a:lvl5pPr>
             <a:lvl6pPr algn="l">
+              <a:buNone/>
               <a:defRPr sz="2325" b="1">
                 <a:solidFill>
                   <a:srgbClr val="A31551"/>
@@ -13081,6 +13586,7 @@
               </a:defRPr>
             </a:lvl6pPr>
             <a:lvl7pPr algn="l">
+              <a:buNone/>
               <a:defRPr sz="2325" b="1">
                 <a:solidFill>
                   <a:srgbClr val="A31551"/>
@@ -13091,6 +13597,7 @@
               </a:defRPr>
             </a:lvl7pPr>
             <a:lvl8pPr algn="l">
+              <a:buNone/>
               <a:defRPr sz="2325" b="1">
                 <a:solidFill>
                   <a:srgbClr val="A31551"/>
@@ -13101,6 +13608,7 @@
               </a:defRPr>
             </a:lvl8pPr>
             <a:lvl9pPr algn="l">
+              <a:buNone/>
               <a:defRPr sz="2325" b="1">
                 <a:solidFill>
                   <a:srgbClr val="A31551"/>
@@ -13113,6 +13621,7 @@
           </a:lstStyle>
           <a:p xmlns:a="http://schemas.openxmlformats.org/drawingml/2006/main">
             <a:pPr algn="l">
+              <a:buNone/>
               <a:defRPr sz="2325" b="1">
                 <a:solidFill>
                   <a:srgbClr val="A31551"/>
@@ -13179,6 +13688,7 @@
               </a:defRPr>
             </a:defPPr>
             <a:lvl1pPr algn="l">
+              <a:buNone/>
               <a:defRPr sz="2025" b="0">
                 <a:solidFill>
                   <a:srgbClr val="2D2630"/>
@@ -13189,6 +13699,7 @@
               </a:defRPr>
             </a:lvl1pPr>
             <a:lvl2pPr algn="l">
+              <a:buNone/>
               <a:defRPr sz="2025" b="0">
                 <a:solidFill>
                   <a:srgbClr val="2D2630"/>
@@ -13199,6 +13710,7 @@
               </a:defRPr>
             </a:lvl2pPr>
             <a:lvl3pPr algn="l">
+              <a:buNone/>
               <a:defRPr sz="2025" b="0">
                 <a:solidFill>
                   <a:srgbClr val="2D2630"/>
@@ -13209,6 +13721,7 @@
               </a:defRPr>
             </a:lvl3pPr>
             <a:lvl4pPr algn="l">
+              <a:buNone/>
               <a:defRPr sz="2025" b="0">
                 <a:solidFill>
                   <a:srgbClr val="2D2630"/>
@@ -13219,6 +13732,7 @@
               </a:defRPr>
             </a:lvl4pPr>
             <a:lvl5pPr algn="l">
+              <a:buNone/>
               <a:defRPr sz="2025" b="0">
                 <a:solidFill>
                   <a:srgbClr val="2D2630"/>
@@ -13229,6 +13743,7 @@
               </a:defRPr>
             </a:lvl5pPr>
             <a:lvl6pPr algn="l">
+              <a:buNone/>
               <a:defRPr sz="2025" b="0">
                 <a:solidFill>
                   <a:srgbClr val="2D2630"/>
@@ -13239,6 +13754,7 @@
               </a:defRPr>
             </a:lvl6pPr>
             <a:lvl7pPr algn="l">
+              <a:buNone/>
               <a:defRPr sz="2025" b="0">
                 <a:solidFill>
                   <a:srgbClr val="2D2630"/>
@@ -13249,6 +13765,7 @@
               </a:defRPr>
             </a:lvl7pPr>
             <a:lvl8pPr algn="l">
+              <a:buNone/>
               <a:defRPr sz="2025" b="0">
                 <a:solidFill>
                   <a:srgbClr val="2D2630"/>
@@ -13259,6 +13776,7 @@
               </a:defRPr>
             </a:lvl8pPr>
             <a:lvl9pPr algn="l">
+              <a:buNone/>
               <a:defRPr sz="2025" b="0">
                 <a:solidFill>
                   <a:srgbClr val="2D2630"/>
@@ -13271,6 +13789,7 @@
           </a:lstStyle>
           <a:p xmlns:a="http://schemas.openxmlformats.org/drawingml/2006/main">
             <a:pPr algn="l">
+              <a:buNone/>
               <a:defRPr sz="2025" b="0">
                 <a:solidFill>
                   <a:srgbClr val="2D2630"/>
@@ -13337,6 +13856,7 @@
               </a:defRPr>
             </a:defPPr>
             <a:lvl1pPr algn="l">
+              <a:buNone/>
               <a:defRPr sz="2025" b="0">
                 <a:solidFill>
                   <a:srgbClr val="2D2630"/>
@@ -13347,6 +13867,7 @@
               </a:defRPr>
             </a:lvl1pPr>
             <a:lvl2pPr algn="l">
+              <a:buNone/>
               <a:defRPr sz="2025" b="0">
                 <a:solidFill>
                   <a:srgbClr val="2D2630"/>
@@ -13357,6 +13878,7 @@
               </a:defRPr>
             </a:lvl2pPr>
             <a:lvl3pPr algn="l">
+              <a:buNone/>
               <a:defRPr sz="2025" b="0">
                 <a:solidFill>
                   <a:srgbClr val="2D2630"/>
@@ -13367,6 +13889,7 @@
               </a:defRPr>
             </a:lvl3pPr>
             <a:lvl4pPr algn="l">
+              <a:buNone/>
               <a:defRPr sz="2025" b="0">
                 <a:solidFill>
                   <a:srgbClr val="2D2630"/>
@@ -13377,6 +13900,7 @@
               </a:defRPr>
             </a:lvl4pPr>
             <a:lvl5pPr algn="l">
+              <a:buNone/>
               <a:defRPr sz="2025" b="0">
                 <a:solidFill>
                   <a:srgbClr val="2D2630"/>
@@ -13387,6 +13911,7 @@
               </a:defRPr>
             </a:lvl5pPr>
             <a:lvl6pPr algn="l">
+              <a:buNone/>
               <a:defRPr sz="2025" b="0">
                 <a:solidFill>
                   <a:srgbClr val="2D2630"/>
@@ -13397,6 +13922,7 @@
               </a:defRPr>
             </a:lvl6pPr>
             <a:lvl7pPr algn="l">
+              <a:buNone/>
               <a:defRPr sz="2025" b="0">
                 <a:solidFill>
                   <a:srgbClr val="2D2630"/>
@@ -13407,6 +13933,7 @@
               </a:defRPr>
             </a:lvl7pPr>
             <a:lvl8pPr algn="l">
+              <a:buNone/>
               <a:defRPr sz="2025" b="0">
                 <a:solidFill>
                   <a:srgbClr val="2D2630"/>
@@ -13417,6 +13944,7 @@
               </a:defRPr>
             </a:lvl8pPr>
             <a:lvl9pPr algn="l">
+              <a:buNone/>
               <a:defRPr sz="2025" b="0">
                 <a:solidFill>
                   <a:srgbClr val="2D2630"/>
@@ -13429,6 +13957,7 @@
           </a:lstStyle>
           <a:p xmlns:a="http://schemas.openxmlformats.org/drawingml/2006/main">
             <a:pPr algn="l">
+              <a:buNone/>
               <a:defRPr sz="2025" b="0">
                 <a:solidFill>
                   <a:srgbClr val="2D2630"/>
@@ -13495,6 +14024,7 @@
               </a:defRPr>
             </a:defPPr>
             <a:lvl1pPr algn="l">
+              <a:buNone/>
               <a:defRPr sz="2025" b="0">
                 <a:solidFill>
                   <a:srgbClr val="2D2630"/>
@@ -13505,6 +14035,7 @@
               </a:defRPr>
             </a:lvl1pPr>
             <a:lvl2pPr algn="l">
+              <a:buNone/>
               <a:defRPr sz="2025" b="0">
                 <a:solidFill>
                   <a:srgbClr val="2D2630"/>
@@ -13515,6 +14046,7 @@
               </a:defRPr>
             </a:lvl2pPr>
             <a:lvl3pPr algn="l">
+              <a:buNone/>
               <a:defRPr sz="2025" b="0">
                 <a:solidFill>
                   <a:srgbClr val="2D2630"/>
@@ -13525,6 +14057,7 @@
               </a:defRPr>
             </a:lvl3pPr>
             <a:lvl4pPr algn="l">
+              <a:buNone/>
               <a:defRPr sz="2025" b="0">
                 <a:solidFill>
                   <a:srgbClr val="2D2630"/>
@@ -13535,6 +14068,7 @@
               </a:defRPr>
             </a:lvl4pPr>
             <a:lvl5pPr algn="l">
+              <a:buNone/>
               <a:defRPr sz="2025" b="0">
                 <a:solidFill>
                   <a:srgbClr val="2D2630"/>
@@ -13545,6 +14079,7 @@
               </a:defRPr>
             </a:lvl5pPr>
             <a:lvl6pPr algn="l">
+              <a:buNone/>
               <a:defRPr sz="2025" b="0">
                 <a:solidFill>
                   <a:srgbClr val="2D2630"/>
@@ -13555,6 +14090,7 @@
               </a:defRPr>
             </a:lvl6pPr>
             <a:lvl7pPr algn="l">
+              <a:buNone/>
               <a:defRPr sz="2025" b="0">
                 <a:solidFill>
                   <a:srgbClr val="2D2630"/>
@@ -13565,6 +14101,7 @@
               </a:defRPr>
             </a:lvl7pPr>
             <a:lvl8pPr algn="l">
+              <a:buNone/>
               <a:defRPr sz="2025" b="0">
                 <a:solidFill>
                   <a:srgbClr val="2D2630"/>
@@ -13575,6 +14112,7 @@
               </a:defRPr>
             </a:lvl8pPr>
             <a:lvl9pPr algn="l">
+              <a:buNone/>
               <a:defRPr sz="2025" b="0">
                 <a:solidFill>
                   <a:srgbClr val="2D2630"/>
@@ -13587,6 +14125,7 @@
           </a:lstStyle>
           <a:p xmlns:a="http://schemas.openxmlformats.org/drawingml/2006/main">
             <a:pPr algn="l">
+              <a:buNone/>
               <a:defRPr sz="2025" b="0">
                 <a:solidFill>
                   <a:srgbClr val="2D2630"/>
@@ -13653,6 +14192,7 @@
               </a:defRPr>
             </a:defPPr>
             <a:lvl1pPr algn="l">
+              <a:buNone/>
               <a:defRPr sz="2025" b="0">
                 <a:solidFill>
                   <a:srgbClr val="2D2630"/>
@@ -13663,6 +14203,7 @@
               </a:defRPr>
             </a:lvl1pPr>
             <a:lvl2pPr algn="l">
+              <a:buNone/>
               <a:defRPr sz="2025" b="0">
                 <a:solidFill>
                   <a:srgbClr val="2D2630"/>
@@ -13673,6 +14214,7 @@
               </a:defRPr>
             </a:lvl2pPr>
             <a:lvl3pPr algn="l">
+              <a:buNone/>
               <a:defRPr sz="2025" b="0">
                 <a:solidFill>
                   <a:srgbClr val="2D2630"/>
@@ -13683,6 +14225,7 @@
               </a:defRPr>
             </a:lvl3pPr>
             <a:lvl4pPr algn="l">
+              <a:buNone/>
               <a:defRPr sz="2025" b="0">
                 <a:solidFill>
                   <a:srgbClr val="2D2630"/>
@@ -13693,6 +14236,7 @@
               </a:defRPr>
             </a:lvl4pPr>
             <a:lvl5pPr algn="l">
+              <a:buNone/>
               <a:defRPr sz="2025" b="0">
                 <a:solidFill>
                   <a:srgbClr val="2D2630"/>
@@ -13703,6 +14247,7 @@
               </a:defRPr>
             </a:lvl5pPr>
             <a:lvl6pPr algn="l">
+              <a:buNone/>
               <a:defRPr sz="2025" b="0">
                 <a:solidFill>
                   <a:srgbClr val="2D2630"/>
@@ -13713,6 +14258,7 @@
               </a:defRPr>
             </a:lvl6pPr>
             <a:lvl7pPr algn="l">
+              <a:buNone/>
               <a:defRPr sz="2025" b="0">
                 <a:solidFill>
                   <a:srgbClr val="2D2630"/>
@@ -13723,6 +14269,7 @@
               </a:defRPr>
             </a:lvl7pPr>
             <a:lvl8pPr algn="l">
+              <a:buNone/>
               <a:defRPr sz="2025" b="0">
                 <a:solidFill>
                   <a:srgbClr val="2D2630"/>
@@ -13733,6 +14280,7 @@
               </a:defRPr>
             </a:lvl8pPr>
             <a:lvl9pPr algn="l">
+              <a:buNone/>
               <a:defRPr sz="2025" b="0">
                 <a:solidFill>
                   <a:srgbClr val="2D2630"/>
@@ -13745,6 +14293,7 @@
           </a:lstStyle>
           <a:p xmlns:a="http://schemas.openxmlformats.org/drawingml/2006/main">
             <a:pPr algn="l">
+              <a:buNone/>
               <a:defRPr sz="2025" b="0">
                 <a:solidFill>
                   <a:srgbClr val="2D2630"/>
@@ -13811,6 +14360,7 @@
               </a:defRPr>
             </a:defPPr>
             <a:lvl1pPr algn="l">
+              <a:buNone/>
               <a:defRPr sz="2025" b="0">
                 <a:solidFill>
                   <a:srgbClr val="2D2630"/>
@@ -13821,6 +14371,7 @@
               </a:defRPr>
             </a:lvl1pPr>
             <a:lvl2pPr algn="l">
+              <a:buNone/>
               <a:defRPr sz="2025" b="0">
                 <a:solidFill>
                   <a:srgbClr val="2D2630"/>
@@ -13831,6 +14382,7 @@
               </a:defRPr>
             </a:lvl2pPr>
             <a:lvl3pPr algn="l">
+              <a:buNone/>
               <a:defRPr sz="2025" b="0">
                 <a:solidFill>
                   <a:srgbClr val="2D2630"/>
@@ -13841,6 +14393,7 @@
               </a:defRPr>
             </a:lvl3pPr>
             <a:lvl4pPr algn="l">
+              <a:buNone/>
               <a:defRPr sz="2025" b="0">
                 <a:solidFill>
                   <a:srgbClr val="2D2630"/>
@@ -13851,6 +14404,7 @@
               </a:defRPr>
             </a:lvl4pPr>
             <a:lvl5pPr algn="l">
+              <a:buNone/>
               <a:defRPr sz="2025" b="0">
                 <a:solidFill>
                   <a:srgbClr val="2D2630"/>
@@ -13861,6 +14415,7 @@
               </a:defRPr>
             </a:lvl5pPr>
             <a:lvl6pPr algn="l">
+              <a:buNone/>
               <a:defRPr sz="2025" b="0">
                 <a:solidFill>
                   <a:srgbClr val="2D2630"/>
@@ -13871,6 +14426,7 @@
               </a:defRPr>
             </a:lvl6pPr>
             <a:lvl7pPr algn="l">
+              <a:buNone/>
               <a:defRPr sz="2025" b="0">
                 <a:solidFill>
                   <a:srgbClr val="2D2630"/>
@@ -13881,6 +14437,7 @@
               </a:defRPr>
             </a:lvl7pPr>
             <a:lvl8pPr algn="l">
+              <a:buNone/>
               <a:defRPr sz="2025" b="0">
                 <a:solidFill>
                   <a:srgbClr val="2D2630"/>
@@ -13891,6 +14448,7 @@
               </a:defRPr>
             </a:lvl8pPr>
             <a:lvl9pPr algn="l">
+              <a:buNone/>
               <a:defRPr sz="2025" b="0">
                 <a:solidFill>
                   <a:srgbClr val="2D2630"/>
@@ -13903,6 +14461,7 @@
           </a:lstStyle>
           <a:p xmlns:a="http://schemas.openxmlformats.org/drawingml/2006/main">
             <a:pPr algn="l">
+              <a:buNone/>
               <a:defRPr sz="2025" b="0">
                 <a:solidFill>
                   <a:srgbClr val="2D2630"/>
@@ -13969,6 +14528,7 @@
               </a:defRPr>
             </a:defPPr>
             <a:lvl1pPr algn="l">
+              <a:buNone/>
               <a:defRPr sz="2325" b="1">
                 <a:solidFill>
                   <a:srgbClr val="A31551"/>
@@ -13979,6 +14539,7 @@
               </a:defRPr>
             </a:lvl1pPr>
             <a:lvl2pPr algn="l">
+              <a:buNone/>
               <a:defRPr sz="2325" b="1">
                 <a:solidFill>
                   <a:srgbClr val="A31551"/>
@@ -13989,6 +14550,7 @@
               </a:defRPr>
             </a:lvl2pPr>
             <a:lvl3pPr algn="l">
+              <a:buNone/>
               <a:defRPr sz="2325" b="1">
                 <a:solidFill>
                   <a:srgbClr val="A31551"/>
@@ -13999,6 +14561,7 @@
               </a:defRPr>
             </a:lvl3pPr>
             <a:lvl4pPr algn="l">
+              <a:buNone/>
               <a:defRPr sz="2325" b="1">
                 <a:solidFill>
                   <a:srgbClr val="A31551"/>
@@ -14009,6 +14572,7 @@
               </a:defRPr>
             </a:lvl4pPr>
             <a:lvl5pPr algn="l">
+              <a:buNone/>
               <a:defRPr sz="2325" b="1">
                 <a:solidFill>
                   <a:srgbClr val="A31551"/>
@@ -14019,6 +14583,7 @@
               </a:defRPr>
             </a:lvl5pPr>
             <a:lvl6pPr algn="l">
+              <a:buNone/>
               <a:defRPr sz="2325" b="1">
                 <a:solidFill>
                   <a:srgbClr val="A31551"/>
@@ -14029,6 +14594,7 @@
               </a:defRPr>
             </a:lvl6pPr>
             <a:lvl7pPr algn="l">
+              <a:buNone/>
               <a:defRPr sz="2325" b="1">
                 <a:solidFill>
                   <a:srgbClr val="A31551"/>
@@ -14039,6 +14605,7 @@
               </a:defRPr>
             </a:lvl7pPr>
             <a:lvl8pPr algn="l">
+              <a:buNone/>
               <a:defRPr sz="2325" b="1">
                 <a:solidFill>
                   <a:srgbClr val="A31551"/>
@@ -14049,6 +14616,7 @@
               </a:defRPr>
             </a:lvl8pPr>
             <a:lvl9pPr algn="l">
+              <a:buNone/>
               <a:defRPr sz="2325" b="1">
                 <a:solidFill>
                   <a:srgbClr val="A31551"/>
@@ -14061,6 +14629,7 @@
           </a:lstStyle>
           <a:p xmlns:a="http://schemas.openxmlformats.org/drawingml/2006/main">
             <a:pPr algn="l">
+              <a:buNone/>
               <a:defRPr sz="2325" b="1">
                 <a:solidFill>
                   <a:srgbClr val="A31551"/>
@@ -14127,6 +14696,7 @@
               </a:defRPr>
             </a:defPPr>
             <a:lvl1pPr algn="l">
+              <a:buNone/>
               <a:defRPr sz="2025" b="0">
                 <a:solidFill>
                   <a:srgbClr val="2D2630"/>
@@ -14137,6 +14707,7 @@
               </a:defRPr>
             </a:lvl1pPr>
             <a:lvl2pPr algn="l">
+              <a:buNone/>
               <a:defRPr sz="2025" b="0">
                 <a:solidFill>
                   <a:srgbClr val="2D2630"/>
@@ -14147,6 +14718,7 @@
               </a:defRPr>
             </a:lvl2pPr>
             <a:lvl3pPr algn="l">
+              <a:buNone/>
               <a:defRPr sz="2025" b="0">
                 <a:solidFill>
                   <a:srgbClr val="2D2630"/>
@@ -14157,6 +14729,7 @@
               </a:defRPr>
             </a:lvl3pPr>
             <a:lvl4pPr algn="l">
+              <a:buNone/>
               <a:defRPr sz="2025" b="0">
                 <a:solidFill>
                   <a:srgbClr val="2D2630"/>
@@ -14167,6 +14740,7 @@
               </a:defRPr>
             </a:lvl4pPr>
             <a:lvl5pPr algn="l">
+              <a:buNone/>
               <a:defRPr sz="2025" b="0">
                 <a:solidFill>
                   <a:srgbClr val="2D2630"/>
@@ -14177,6 +14751,7 @@
               </a:defRPr>
             </a:lvl5pPr>
             <a:lvl6pPr algn="l">
+              <a:buNone/>
               <a:defRPr sz="2025" b="0">
                 <a:solidFill>
                   <a:srgbClr val="2D2630"/>
@@ -14187,6 +14762,7 @@
               </a:defRPr>
             </a:lvl6pPr>
             <a:lvl7pPr algn="l">
+              <a:buNone/>
               <a:defRPr sz="2025" b="0">
                 <a:solidFill>
                   <a:srgbClr val="2D2630"/>
@@ -14197,6 +14773,7 @@
               </a:defRPr>
             </a:lvl7pPr>
             <a:lvl8pPr algn="l">
+              <a:buNone/>
               <a:defRPr sz="2025" b="0">
                 <a:solidFill>
                   <a:srgbClr val="2D2630"/>
@@ -14207,6 +14784,7 @@
               </a:defRPr>
             </a:lvl8pPr>
             <a:lvl9pPr algn="l">
+              <a:buNone/>
               <a:defRPr sz="2025" b="0">
                 <a:solidFill>
                   <a:srgbClr val="2D2630"/>
@@ -14219,6 +14797,7 @@
           </a:lstStyle>
           <a:p xmlns:a="http://schemas.openxmlformats.org/drawingml/2006/main">
             <a:pPr algn="l">
+              <a:buNone/>
               <a:defRPr sz="2025" b="0">
                 <a:solidFill>
                   <a:srgbClr val="2D2630"/>
@@ -14285,6 +14864,7 @@
               </a:defRPr>
             </a:defPPr>
             <a:lvl1pPr algn="l">
+              <a:buNone/>
               <a:defRPr sz="2025" b="0">
                 <a:solidFill>
                   <a:srgbClr val="2D2630"/>
@@ -14295,6 +14875,7 @@
               </a:defRPr>
             </a:lvl1pPr>
             <a:lvl2pPr algn="l">
+              <a:buNone/>
               <a:defRPr sz="2025" b="0">
                 <a:solidFill>
                   <a:srgbClr val="2D2630"/>
@@ -14305,6 +14886,7 @@
               </a:defRPr>
             </a:lvl2pPr>
             <a:lvl3pPr algn="l">
+              <a:buNone/>
               <a:defRPr sz="2025" b="0">
                 <a:solidFill>
                   <a:srgbClr val="2D2630"/>
@@ -14315,6 +14897,7 @@
               </a:defRPr>
             </a:lvl3pPr>
             <a:lvl4pPr algn="l">
+              <a:buNone/>
               <a:defRPr sz="2025" b="0">
                 <a:solidFill>
                   <a:srgbClr val="2D2630"/>
@@ -14325,6 +14908,7 @@
               </a:defRPr>
             </a:lvl4pPr>
             <a:lvl5pPr algn="l">
+              <a:buNone/>
               <a:defRPr sz="2025" b="0">
                 <a:solidFill>
                   <a:srgbClr val="2D2630"/>
@@ -14335,6 +14919,7 @@
               </a:defRPr>
             </a:lvl5pPr>
             <a:lvl6pPr algn="l">
+              <a:buNone/>
               <a:defRPr sz="2025" b="0">
                 <a:solidFill>
                   <a:srgbClr val="2D2630"/>
@@ -14345,6 +14930,7 @@
               </a:defRPr>
             </a:lvl6pPr>
             <a:lvl7pPr algn="l">
+              <a:buNone/>
               <a:defRPr sz="2025" b="0">
                 <a:solidFill>
                   <a:srgbClr val="2D2630"/>
@@ -14355,6 +14941,7 @@
               </a:defRPr>
             </a:lvl7pPr>
             <a:lvl8pPr algn="l">
+              <a:buNone/>
               <a:defRPr sz="2025" b="0">
                 <a:solidFill>
                   <a:srgbClr val="2D2630"/>
@@ -14365,6 +14952,7 @@
               </a:defRPr>
             </a:lvl8pPr>
             <a:lvl9pPr algn="l">
+              <a:buNone/>
               <a:defRPr sz="2025" b="0">
                 <a:solidFill>
                   <a:srgbClr val="2D2630"/>
@@ -14377,6 +14965,7 @@
           </a:lstStyle>
           <a:p xmlns:a="http://schemas.openxmlformats.org/drawingml/2006/main">
             <a:pPr algn="l">
+              <a:buNone/>
               <a:defRPr sz="2025" b="0">
                 <a:solidFill>
                   <a:srgbClr val="2D2630"/>
@@ -14443,6 +15032,7 @@
               </a:defRPr>
             </a:defPPr>
             <a:lvl1pPr algn="l">
+              <a:buNone/>
               <a:defRPr sz="2025" b="0">
                 <a:solidFill>
                   <a:srgbClr val="2D2630"/>
@@ -14453,6 +15043,7 @@
               </a:defRPr>
             </a:lvl1pPr>
             <a:lvl2pPr algn="l">
+              <a:buNone/>
               <a:defRPr sz="2025" b="0">
                 <a:solidFill>
                   <a:srgbClr val="2D2630"/>
@@ -14463,6 +15054,7 @@
               </a:defRPr>
             </a:lvl2pPr>
             <a:lvl3pPr algn="l">
+              <a:buNone/>
               <a:defRPr sz="2025" b="0">
                 <a:solidFill>
                   <a:srgbClr val="2D2630"/>
@@ -14473,6 +15065,7 @@
               </a:defRPr>
             </a:lvl3pPr>
             <a:lvl4pPr algn="l">
+              <a:buNone/>
               <a:defRPr sz="2025" b="0">
                 <a:solidFill>
                   <a:srgbClr val="2D2630"/>
@@ -14483,6 +15076,7 @@
               </a:defRPr>
             </a:lvl4pPr>
             <a:lvl5pPr algn="l">
+              <a:buNone/>
               <a:defRPr sz="2025" b="0">
                 <a:solidFill>
                   <a:srgbClr val="2D2630"/>
@@ -14493,6 +15087,7 @@
               </a:defRPr>
             </a:lvl5pPr>
             <a:lvl6pPr algn="l">
+              <a:buNone/>
               <a:defRPr sz="2025" b="0">
                 <a:solidFill>
                   <a:srgbClr val="2D2630"/>
@@ -14503,6 +15098,7 @@
               </a:defRPr>
             </a:lvl6pPr>
             <a:lvl7pPr algn="l">
+              <a:buNone/>
               <a:defRPr sz="2025" b="0">
                 <a:solidFill>
                   <a:srgbClr val="2D2630"/>
@@ -14513,6 +15109,7 @@
               </a:defRPr>
             </a:lvl7pPr>
             <a:lvl8pPr algn="l">
+              <a:buNone/>
               <a:defRPr sz="2025" b="0">
                 <a:solidFill>
                   <a:srgbClr val="2D2630"/>
@@ -14523,6 +15120,7 @@
               </a:defRPr>
             </a:lvl8pPr>
             <a:lvl9pPr algn="l">
+              <a:buNone/>
               <a:defRPr sz="2025" b="0">
                 <a:solidFill>
                   <a:srgbClr val="2D2630"/>
@@ -14535,6 +15133,7 @@
           </a:lstStyle>
           <a:p xmlns:a="http://schemas.openxmlformats.org/drawingml/2006/main">
             <a:pPr algn="l">
+              <a:buNone/>
               <a:defRPr sz="2025" b="0">
                 <a:solidFill>
                   <a:srgbClr val="2D2630"/>
@@ -14601,6 +15200,7 @@
               </a:defRPr>
             </a:defPPr>
             <a:lvl1pPr algn="l">
+              <a:buNone/>
               <a:defRPr sz="2025" b="0">
                 <a:solidFill>
                   <a:srgbClr val="2D2630"/>
@@ -14611,6 +15211,7 @@
               </a:defRPr>
             </a:lvl1pPr>
             <a:lvl2pPr algn="l">
+              <a:buNone/>
               <a:defRPr sz="2025" b="0">
                 <a:solidFill>
                   <a:srgbClr val="2D2630"/>
@@ -14621,6 +15222,7 @@
               </a:defRPr>
             </a:lvl2pPr>
             <a:lvl3pPr algn="l">
+              <a:buNone/>
               <a:defRPr sz="2025" b="0">
                 <a:solidFill>
                   <a:srgbClr val="2D2630"/>
@@ -14631,6 +15233,7 @@
               </a:defRPr>
             </a:lvl3pPr>
             <a:lvl4pPr algn="l">
+              <a:buNone/>
               <a:defRPr sz="2025" b="0">
                 <a:solidFill>
                   <a:srgbClr val="2D2630"/>
@@ -14641,6 +15244,7 @@
               </a:defRPr>
             </a:lvl4pPr>
             <a:lvl5pPr algn="l">
+              <a:buNone/>
               <a:defRPr sz="2025" b="0">
                 <a:solidFill>
                   <a:srgbClr val="2D2630"/>
@@ -14651,6 +15255,7 @@
               </a:defRPr>
             </a:lvl5pPr>
             <a:lvl6pPr algn="l">
+              <a:buNone/>
               <a:defRPr sz="2025" b="0">
                 <a:solidFill>
                   <a:srgbClr val="2D2630"/>
@@ -14661,6 +15266,7 @@
               </a:defRPr>
             </a:lvl6pPr>
             <a:lvl7pPr algn="l">
+              <a:buNone/>
               <a:defRPr sz="2025" b="0">
                 <a:solidFill>
                   <a:srgbClr val="2D2630"/>
@@ -14671,6 +15277,7 @@
               </a:defRPr>
             </a:lvl7pPr>
             <a:lvl8pPr algn="l">
+              <a:buNone/>
               <a:defRPr sz="2025" b="0">
                 <a:solidFill>
                   <a:srgbClr val="2D2630"/>
@@ -14681,6 +15288,7 @@
               </a:defRPr>
             </a:lvl8pPr>
             <a:lvl9pPr algn="l">
+              <a:buNone/>
               <a:defRPr sz="2025" b="0">
                 <a:solidFill>
                   <a:srgbClr val="2D2630"/>
@@ -14693,6 +15301,7 @@
           </a:lstStyle>
           <a:p xmlns:a="http://schemas.openxmlformats.org/drawingml/2006/main">
             <a:pPr algn="l">
+              <a:buNone/>
               <a:defRPr sz="2025" b="0">
                 <a:solidFill>
                   <a:srgbClr val="2D2630"/>
@@ -14759,6 +15368,7 @@
               </a:defRPr>
             </a:defPPr>
             <a:lvl1pPr algn="l">
+              <a:buNone/>
               <a:defRPr sz="2325" b="1">
                 <a:solidFill>
                   <a:srgbClr val="A31551"/>
@@ -14769,6 +15379,7 @@
               </a:defRPr>
             </a:lvl1pPr>
             <a:lvl2pPr algn="l">
+              <a:buNone/>
               <a:defRPr sz="2325" b="1">
                 <a:solidFill>
                   <a:srgbClr val="A31551"/>
@@ -14779,6 +15390,7 @@
               </a:defRPr>
             </a:lvl2pPr>
             <a:lvl3pPr algn="l">
+              <a:buNone/>
               <a:defRPr sz="2325" b="1">
                 <a:solidFill>
                   <a:srgbClr val="A31551"/>
@@ -14789,6 +15401,7 @@
               </a:defRPr>
             </a:lvl3pPr>
             <a:lvl4pPr algn="l">
+              <a:buNone/>
               <a:defRPr sz="2325" b="1">
                 <a:solidFill>
                   <a:srgbClr val="A31551"/>
@@ -14799,6 +15412,7 @@
               </a:defRPr>
             </a:lvl4pPr>
             <a:lvl5pPr algn="l">
+              <a:buNone/>
               <a:defRPr sz="2325" b="1">
                 <a:solidFill>
                   <a:srgbClr val="A31551"/>
@@ -14809,6 +15423,7 @@
               </a:defRPr>
             </a:lvl5pPr>
             <a:lvl6pPr algn="l">
+              <a:buNone/>
               <a:defRPr sz="2325" b="1">
                 <a:solidFill>
                   <a:srgbClr val="A31551"/>
@@ -14819,6 +15434,7 @@
               </a:defRPr>
             </a:lvl6pPr>
             <a:lvl7pPr algn="l">
+              <a:buNone/>
               <a:defRPr sz="2325" b="1">
                 <a:solidFill>
                   <a:srgbClr val="A31551"/>
@@ -14829,6 +15445,7 @@
               </a:defRPr>
             </a:lvl7pPr>
             <a:lvl8pPr algn="l">
+              <a:buNone/>
               <a:defRPr sz="2325" b="1">
                 <a:solidFill>
                   <a:srgbClr val="A31551"/>
@@ -14839,6 +15456,7 @@
               </a:defRPr>
             </a:lvl8pPr>
             <a:lvl9pPr algn="l">
+              <a:buNone/>
               <a:defRPr sz="2325" b="1">
                 <a:solidFill>
                   <a:srgbClr val="A31551"/>
@@ -14851,6 +15469,7 @@
           </a:lstStyle>
           <a:p xmlns:a="http://schemas.openxmlformats.org/drawingml/2006/main">
             <a:pPr algn="l">
+              <a:buNone/>
               <a:defRPr sz="2325" b="1">
                 <a:solidFill>
                   <a:srgbClr val="A31551"/>
@@ -14917,6 +15536,7 @@
               </a:defRPr>
             </a:defPPr>
             <a:lvl1pPr algn="l">
+              <a:buNone/>
               <a:defRPr sz="2025" b="0">
                 <a:solidFill>
                   <a:srgbClr val="2D2630"/>
@@ -14927,6 +15547,7 @@
               </a:defRPr>
             </a:lvl1pPr>
             <a:lvl2pPr algn="l">
+              <a:buNone/>
               <a:defRPr sz="2025" b="0">
                 <a:solidFill>
                   <a:srgbClr val="2D2630"/>
@@ -14937,6 +15558,7 @@
               </a:defRPr>
             </a:lvl2pPr>
             <a:lvl3pPr algn="l">
+              <a:buNone/>
               <a:defRPr sz="2025" b="0">
                 <a:solidFill>
                   <a:srgbClr val="2D2630"/>
@@ -14947,6 +15569,7 @@
               </a:defRPr>
             </a:lvl3pPr>
             <a:lvl4pPr algn="l">
+              <a:buNone/>
               <a:defRPr sz="2025" b="0">
                 <a:solidFill>
                   <a:srgbClr val="2D2630"/>
@@ -14957,6 +15580,7 @@
               </a:defRPr>
             </a:lvl4pPr>
             <a:lvl5pPr algn="l">
+              <a:buNone/>
               <a:defRPr sz="2025" b="0">
                 <a:solidFill>
                   <a:srgbClr val="2D2630"/>
@@ -14967,6 +15591,7 @@
               </a:defRPr>
             </a:lvl5pPr>
             <a:lvl6pPr algn="l">
+              <a:buNone/>
               <a:defRPr sz="2025" b="0">
                 <a:solidFill>
                   <a:srgbClr val="2D2630"/>
@@ -14977,6 +15602,7 @@
               </a:defRPr>
             </a:lvl6pPr>
             <a:lvl7pPr algn="l">
+              <a:buNone/>
               <a:defRPr sz="2025" b="0">
                 <a:solidFill>
                   <a:srgbClr val="2D2630"/>
@@ -14987,6 +15613,7 @@
               </a:defRPr>
             </a:lvl7pPr>
             <a:lvl8pPr algn="l">
+              <a:buNone/>
               <a:defRPr sz="2025" b="0">
                 <a:solidFill>
                   <a:srgbClr val="2D2630"/>
@@ -14997,6 +15624,7 @@
               </a:defRPr>
             </a:lvl8pPr>
             <a:lvl9pPr algn="l">
+              <a:buNone/>
               <a:defRPr sz="2025" b="0">
                 <a:solidFill>
                   <a:srgbClr val="2D2630"/>
@@ -15009,6 +15637,7 @@
           </a:lstStyle>
           <a:p xmlns:a="http://schemas.openxmlformats.org/drawingml/2006/main">
             <a:pPr algn="l">
+              <a:buNone/>
               <a:defRPr sz="2025" b="0">
                 <a:solidFill>
                   <a:srgbClr val="2D2630"/>
@@ -15032,6 +15661,7 @@
           </a:p>
           <a:p xmlns:a="http://schemas.openxmlformats.org/drawingml/2006/main">
             <a:pPr algn="l">
+              <a:buNone/>
               <a:defRPr sz="2025" b="0">
                 <a:solidFill>
                   <a:srgbClr val="2D2630"/>
@@ -15098,6 +15728,7 @@
               </a:defRPr>
             </a:defPPr>
             <a:lvl1pPr algn="l">
+              <a:buNone/>
               <a:defRPr sz="2025" b="0">
                 <a:solidFill>
                   <a:srgbClr val="2D2630"/>
@@ -15108,6 +15739,7 @@
               </a:defRPr>
             </a:lvl1pPr>
             <a:lvl2pPr algn="l">
+              <a:buNone/>
               <a:defRPr sz="2025" b="0">
                 <a:solidFill>
                   <a:srgbClr val="2D2630"/>
@@ -15118,6 +15750,7 @@
               </a:defRPr>
             </a:lvl2pPr>
             <a:lvl3pPr algn="l">
+              <a:buNone/>
               <a:defRPr sz="2025" b="0">
                 <a:solidFill>
                   <a:srgbClr val="2D2630"/>
@@ -15128,6 +15761,7 @@
               </a:defRPr>
             </a:lvl3pPr>
             <a:lvl4pPr algn="l">
+              <a:buNone/>
               <a:defRPr sz="2025" b="0">
                 <a:solidFill>
                   <a:srgbClr val="2D2630"/>
@@ -15138,6 +15772,7 @@
               </a:defRPr>
             </a:lvl4pPr>
             <a:lvl5pPr algn="l">
+              <a:buNone/>
               <a:defRPr sz="2025" b="0">
                 <a:solidFill>
                   <a:srgbClr val="2D2630"/>
@@ -15148,6 +15783,7 @@
               </a:defRPr>
             </a:lvl5pPr>
             <a:lvl6pPr algn="l">
+              <a:buNone/>
               <a:defRPr sz="2025" b="0">
                 <a:solidFill>
                   <a:srgbClr val="2D2630"/>
@@ -15158,6 +15794,7 @@
               </a:defRPr>
             </a:lvl6pPr>
             <a:lvl7pPr algn="l">
+              <a:buNone/>
               <a:defRPr sz="2025" b="0">
                 <a:solidFill>
                   <a:srgbClr val="2D2630"/>
@@ -15168,6 +15805,7 @@
               </a:defRPr>
             </a:lvl7pPr>
             <a:lvl8pPr algn="l">
+              <a:buNone/>
               <a:defRPr sz="2025" b="0">
                 <a:solidFill>
                   <a:srgbClr val="2D2630"/>
@@ -15178,6 +15816,7 @@
               </a:defRPr>
             </a:lvl8pPr>
             <a:lvl9pPr algn="l">
+              <a:buNone/>
               <a:defRPr sz="2025" b="0">
                 <a:solidFill>
                   <a:srgbClr val="2D2630"/>
@@ -15190,6 +15829,7 @@
           </a:lstStyle>
           <a:p xmlns:a="http://schemas.openxmlformats.org/drawingml/2006/main">
             <a:pPr algn="l">
+              <a:buNone/>
               <a:defRPr sz="2025" b="0">
                 <a:solidFill>
                   <a:srgbClr val="2D2630"/>
@@ -15213,6 +15853,7 @@
           </a:p>
           <a:p xmlns:a="http://schemas.openxmlformats.org/drawingml/2006/main">
             <a:pPr algn="l">
+              <a:buNone/>
               <a:defRPr sz="2025" b="0">
                 <a:solidFill>
                   <a:srgbClr val="2D2630"/>
@@ -15279,6 +15920,7 @@
               </a:defRPr>
             </a:defPPr>
             <a:lvl1pPr algn="l">
+              <a:buNone/>
               <a:defRPr sz="1500" b="0">
                 <a:solidFill>
                   <a:srgbClr val="756873"/>
@@ -15289,6 +15931,7 @@
               </a:defRPr>
             </a:lvl1pPr>
             <a:lvl2pPr algn="l">
+              <a:buNone/>
               <a:defRPr sz="1500" b="0">
                 <a:solidFill>
                   <a:srgbClr val="756873"/>
@@ -15299,6 +15942,7 @@
               </a:defRPr>
             </a:lvl2pPr>
             <a:lvl3pPr algn="l">
+              <a:buNone/>
               <a:defRPr sz="1500" b="0">
                 <a:solidFill>
                   <a:srgbClr val="756873"/>
@@ -15309,6 +15953,7 @@
               </a:defRPr>
             </a:lvl3pPr>
             <a:lvl4pPr algn="l">
+              <a:buNone/>
               <a:defRPr sz="1500" b="0">
                 <a:solidFill>
                   <a:srgbClr val="756873"/>
@@ -15319,6 +15964,7 @@
               </a:defRPr>
             </a:lvl4pPr>
             <a:lvl5pPr algn="l">
+              <a:buNone/>
               <a:defRPr sz="1500" b="0">
                 <a:solidFill>
                   <a:srgbClr val="756873"/>
@@ -15329,6 +15975,7 @@
               </a:defRPr>
             </a:lvl5pPr>
             <a:lvl6pPr algn="l">
+              <a:buNone/>
               <a:defRPr sz="1500" b="0">
                 <a:solidFill>
                   <a:srgbClr val="756873"/>
@@ -15339,6 +15986,7 @@
               </a:defRPr>
             </a:lvl6pPr>
             <a:lvl7pPr algn="l">
+              <a:buNone/>
               <a:defRPr sz="1500" b="0">
                 <a:solidFill>
                   <a:srgbClr val="756873"/>
@@ -15349,6 +15997,7 @@
               </a:defRPr>
             </a:lvl7pPr>
             <a:lvl8pPr algn="l">
+              <a:buNone/>
               <a:defRPr sz="1500" b="0">
                 <a:solidFill>
                   <a:srgbClr val="756873"/>
@@ -15359,6 +16008,7 @@
               </a:defRPr>
             </a:lvl8pPr>
             <a:lvl9pPr algn="l">
+              <a:buNone/>
               <a:defRPr sz="1500" b="0">
                 <a:solidFill>
                   <a:srgbClr val="756873"/>
@@ -15371,6 +16021,7 @@
           </a:lstStyle>
           <a:p xmlns:a="http://schemas.openxmlformats.org/drawingml/2006/main">
             <a:pPr algn="l">
+              <a:buNone/>
               <a:defRPr sz="1500" b="0">
                 <a:solidFill>
                   <a:srgbClr val="756873"/>
@@ -15466,6 +16117,7 @@
               </a:defRPr>
             </a:defPPr>
             <a:lvl1pPr algn="l">
+              <a:buNone/>
               <a:defRPr sz="3300" b="1">
                 <a:solidFill>
                   <a:srgbClr val="FFFFFF"/>
@@ -15476,6 +16128,7 @@
               </a:defRPr>
             </a:lvl1pPr>
             <a:lvl2pPr algn="l">
+              <a:buNone/>
               <a:defRPr sz="3300" b="1">
                 <a:solidFill>
                   <a:srgbClr val="FFFFFF"/>
@@ -15486,6 +16139,7 @@
               </a:defRPr>
             </a:lvl2pPr>
             <a:lvl3pPr algn="l">
+              <a:buNone/>
               <a:defRPr sz="3300" b="1">
                 <a:solidFill>
                   <a:srgbClr val="FFFFFF"/>
@@ -15496,6 +16150,7 @@
               </a:defRPr>
             </a:lvl3pPr>
             <a:lvl4pPr algn="l">
+              <a:buNone/>
               <a:defRPr sz="3300" b="1">
                 <a:solidFill>
                   <a:srgbClr val="FFFFFF"/>
@@ -15506,6 +16161,7 @@
               </a:defRPr>
             </a:lvl4pPr>
             <a:lvl5pPr algn="l">
+              <a:buNone/>
               <a:defRPr sz="3300" b="1">
                 <a:solidFill>
                   <a:srgbClr val="FFFFFF"/>
@@ -15516,6 +16172,7 @@
               </a:defRPr>
             </a:lvl5pPr>
             <a:lvl6pPr algn="l">
+              <a:buNone/>
               <a:defRPr sz="3300" b="1">
                 <a:solidFill>
                   <a:srgbClr val="FFFFFF"/>
@@ -15526,6 +16183,7 @@
               </a:defRPr>
             </a:lvl6pPr>
             <a:lvl7pPr algn="l">
+              <a:buNone/>
               <a:defRPr sz="3300" b="1">
                 <a:solidFill>
                   <a:srgbClr val="FFFFFF"/>
@@ -15536,6 +16194,7 @@
               </a:defRPr>
             </a:lvl7pPr>
             <a:lvl8pPr algn="l">
+              <a:buNone/>
               <a:defRPr sz="3300" b="1">
                 <a:solidFill>
                   <a:srgbClr val="FFFFFF"/>
@@ -15546,6 +16205,7 @@
               </a:defRPr>
             </a:lvl8pPr>
             <a:lvl9pPr algn="l">
+              <a:buNone/>
               <a:defRPr sz="3300" b="1">
                 <a:solidFill>
                   <a:srgbClr val="FFFFFF"/>
@@ -15558,6 +16218,7 @@
           </a:lstStyle>
           <a:p xmlns:a="http://schemas.openxmlformats.org/drawingml/2006/main">
             <a:pPr algn="l">
+              <a:buNone/>
               <a:defRPr sz="3300" b="1">
                 <a:solidFill>
                   <a:srgbClr val="FFFFFF"/>
@@ -15624,6 +16285,7 @@
               </a:defRPr>
             </a:defPPr>
             <a:lvl1pPr algn="r">
+              <a:buNone/>
               <a:defRPr sz="1200" b="0">
                 <a:solidFill>
                   <a:srgbClr val="C9A8B7"/>
@@ -15634,6 +16296,7 @@
               </a:defRPr>
             </a:lvl1pPr>
             <a:lvl2pPr algn="r">
+              <a:buNone/>
               <a:defRPr sz="1200" b="0">
                 <a:solidFill>
                   <a:srgbClr val="C9A8B7"/>
@@ -15644,6 +16307,7 @@
               </a:defRPr>
             </a:lvl2pPr>
             <a:lvl3pPr algn="r">
+              <a:buNone/>
               <a:defRPr sz="1200" b="0">
                 <a:solidFill>
                   <a:srgbClr val="C9A8B7"/>
@@ -15654,6 +16318,7 @@
               </a:defRPr>
             </a:lvl3pPr>
             <a:lvl4pPr algn="r">
+              <a:buNone/>
               <a:defRPr sz="1200" b="0">
                 <a:solidFill>
                   <a:srgbClr val="C9A8B7"/>
@@ -15664,6 +16329,7 @@
               </a:defRPr>
             </a:lvl4pPr>
             <a:lvl5pPr algn="r">
+              <a:buNone/>
               <a:defRPr sz="1200" b="0">
                 <a:solidFill>
                   <a:srgbClr val="C9A8B7"/>
@@ -15674,6 +16340,7 @@
               </a:defRPr>
             </a:lvl5pPr>
             <a:lvl6pPr algn="r">
+              <a:buNone/>
               <a:defRPr sz="1200" b="0">
                 <a:solidFill>
                   <a:srgbClr val="C9A8B7"/>
@@ -15684,6 +16351,7 @@
               </a:defRPr>
             </a:lvl6pPr>
             <a:lvl7pPr algn="r">
+              <a:buNone/>
               <a:defRPr sz="1200" b="0">
                 <a:solidFill>
                   <a:srgbClr val="C9A8B7"/>
@@ -15694,6 +16362,7 @@
               </a:defRPr>
             </a:lvl7pPr>
             <a:lvl8pPr algn="r">
+              <a:buNone/>
               <a:defRPr sz="1200" b="0">
                 <a:solidFill>
                   <a:srgbClr val="C9A8B7"/>
@@ -15704,6 +16373,7 @@
               </a:defRPr>
             </a:lvl8pPr>
             <a:lvl9pPr algn="r">
+              <a:buNone/>
               <a:defRPr sz="1200" b="0">
                 <a:solidFill>
                   <a:srgbClr val="C9A8B7"/>
@@ -15716,6 +16386,7 @@
           </a:lstStyle>
           <a:p xmlns:a="http://schemas.openxmlformats.org/drawingml/2006/main">
             <a:pPr algn="r">
+              <a:buNone/>
               <a:defRPr sz="1200" b="0">
                 <a:solidFill>
                   <a:srgbClr val="C9A8B7"/>
@@ -15782,6 +16453,7 @@
               </a:defRPr>
             </a:defPPr>
             <a:lvl1pPr algn="l">
+              <a:buNone/>
               <a:defRPr sz="5700" b="1">
                 <a:solidFill>
                   <a:srgbClr val="FFFFFF"/>
@@ -15792,6 +16464,7 @@
               </a:defRPr>
             </a:lvl1pPr>
             <a:lvl2pPr algn="l">
+              <a:buNone/>
               <a:defRPr sz="5700" b="1">
                 <a:solidFill>
                   <a:srgbClr val="FFFFFF"/>
@@ -15802,6 +16475,7 @@
               </a:defRPr>
             </a:lvl2pPr>
             <a:lvl3pPr algn="l">
+              <a:buNone/>
               <a:defRPr sz="5700" b="1">
                 <a:solidFill>
                   <a:srgbClr val="FFFFFF"/>
@@ -15812,6 +16486,7 @@
               </a:defRPr>
             </a:lvl3pPr>
             <a:lvl4pPr algn="l">
+              <a:buNone/>
               <a:defRPr sz="5700" b="1">
                 <a:solidFill>
                   <a:srgbClr val="FFFFFF"/>
@@ -15822,6 +16497,7 @@
               </a:defRPr>
             </a:lvl4pPr>
             <a:lvl5pPr algn="l">
+              <a:buNone/>
               <a:defRPr sz="5700" b="1">
                 <a:solidFill>
                   <a:srgbClr val="FFFFFF"/>
@@ -15832,6 +16508,7 @@
               </a:defRPr>
             </a:lvl5pPr>
             <a:lvl6pPr algn="l">
+              <a:buNone/>
               <a:defRPr sz="5700" b="1">
                 <a:solidFill>
                   <a:srgbClr val="FFFFFF"/>
@@ -15842,6 +16519,7 @@
               </a:defRPr>
             </a:lvl6pPr>
             <a:lvl7pPr algn="l">
+              <a:buNone/>
               <a:defRPr sz="5700" b="1">
                 <a:solidFill>
                   <a:srgbClr val="FFFFFF"/>
@@ -15852,6 +16530,7 @@
               </a:defRPr>
             </a:lvl7pPr>
             <a:lvl8pPr algn="l">
+              <a:buNone/>
               <a:defRPr sz="5700" b="1">
                 <a:solidFill>
                   <a:srgbClr val="FFFFFF"/>
@@ -15862,6 +16541,7 @@
               </a:defRPr>
             </a:lvl8pPr>
             <a:lvl9pPr algn="l">
+              <a:buNone/>
               <a:defRPr sz="5700" b="1">
                 <a:solidFill>
                   <a:srgbClr val="FFFFFF"/>
@@ -15874,6 +16554,7 @@
           </a:lstStyle>
           <a:p xmlns:a="http://schemas.openxmlformats.org/drawingml/2006/main">
             <a:pPr algn="l">
+              <a:buNone/>
               <a:defRPr sz="5700" b="1">
                 <a:solidFill>
                   <a:srgbClr val="FFFFFF"/>
@@ -15897,6 +16578,7 @@
           </a:p>
           <a:p xmlns:a="http://schemas.openxmlformats.org/drawingml/2006/main">
             <a:pPr algn="l">
+              <a:buNone/>
               <a:defRPr sz="5700" b="1">
                 <a:solidFill>
                   <a:srgbClr val="FFFFFF"/>
@@ -15963,6 +16645,7 @@
               </a:defRPr>
             </a:defPPr>
             <a:lvl1pPr algn="l">
+              <a:buNone/>
               <a:defRPr sz="2550" b="0">
                 <a:solidFill>
                   <a:srgbClr val="F0E2E9"/>
@@ -15973,6 +16656,7 @@
               </a:defRPr>
             </a:lvl1pPr>
             <a:lvl2pPr algn="l">
+              <a:buNone/>
               <a:defRPr sz="2550" b="0">
                 <a:solidFill>
                   <a:srgbClr val="F0E2E9"/>
@@ -15983,6 +16667,7 @@
               </a:defRPr>
             </a:lvl2pPr>
             <a:lvl3pPr algn="l">
+              <a:buNone/>
               <a:defRPr sz="2550" b="0">
                 <a:solidFill>
                   <a:srgbClr val="F0E2E9"/>
@@ -15993,6 +16678,7 @@
               </a:defRPr>
             </a:lvl3pPr>
             <a:lvl4pPr algn="l">
+              <a:buNone/>
               <a:defRPr sz="2550" b="0">
                 <a:solidFill>
                   <a:srgbClr val="F0E2E9"/>
@@ -16003,6 +16689,7 @@
               </a:defRPr>
             </a:lvl4pPr>
             <a:lvl5pPr algn="l">
+              <a:buNone/>
               <a:defRPr sz="2550" b="0">
                 <a:solidFill>
                   <a:srgbClr val="F0E2E9"/>
@@ -16013,6 +16700,7 @@
               </a:defRPr>
             </a:lvl5pPr>
             <a:lvl6pPr algn="l">
+              <a:buNone/>
               <a:defRPr sz="2550" b="0">
                 <a:solidFill>
                   <a:srgbClr val="F0E2E9"/>
@@ -16023,6 +16711,7 @@
               </a:defRPr>
             </a:lvl6pPr>
             <a:lvl7pPr algn="l">
+              <a:buNone/>
               <a:defRPr sz="2550" b="0">
                 <a:solidFill>
                   <a:srgbClr val="F0E2E9"/>
@@ -16033,6 +16722,7 @@
               </a:defRPr>
             </a:lvl7pPr>
             <a:lvl8pPr algn="l">
+              <a:buNone/>
               <a:defRPr sz="2550" b="0">
                 <a:solidFill>
                   <a:srgbClr val="F0E2E9"/>
@@ -16043,6 +16733,7 @@
               </a:defRPr>
             </a:lvl8pPr>
             <a:lvl9pPr algn="l">
+              <a:buNone/>
               <a:defRPr sz="2550" b="0">
                 <a:solidFill>
                   <a:srgbClr val="F0E2E9"/>
@@ -16055,6 +16746,7 @@
           </a:lstStyle>
           <a:p xmlns:a="http://schemas.openxmlformats.org/drawingml/2006/main">
             <a:pPr algn="l">
+              <a:buNone/>
               <a:defRPr sz="2550" b="0">
                 <a:solidFill>
                   <a:srgbClr val="F0E2E9"/>
@@ -16078,6 +16770,7 @@
           </a:p>
           <a:p xmlns:a="http://schemas.openxmlformats.org/drawingml/2006/main">
             <a:pPr algn="l">
+              <a:buNone/>
               <a:defRPr sz="2550" b="0">
                 <a:solidFill>
                   <a:srgbClr val="F0E2E9"/>
@@ -16144,6 +16837,7 @@
               </a:defRPr>
             </a:defPPr>
             <a:lvl1pPr algn="l">
+              <a:buNone/>
               <a:defRPr sz="1500" b="0">
                 <a:solidFill>
                   <a:srgbClr val="DDBFCD"/>
@@ -16154,6 +16848,7 @@
               </a:defRPr>
             </a:lvl1pPr>
             <a:lvl2pPr algn="l">
+              <a:buNone/>
               <a:defRPr sz="1500" b="0">
                 <a:solidFill>
                   <a:srgbClr val="DDBFCD"/>
@@ -16164,6 +16859,7 @@
               </a:defRPr>
             </a:lvl2pPr>
             <a:lvl3pPr algn="l">
+              <a:buNone/>
               <a:defRPr sz="1500" b="0">
                 <a:solidFill>
                   <a:srgbClr val="DDBFCD"/>
@@ -16174,6 +16870,7 @@
               </a:defRPr>
             </a:lvl3pPr>
             <a:lvl4pPr algn="l">
+              <a:buNone/>
               <a:defRPr sz="1500" b="0">
                 <a:solidFill>
                   <a:srgbClr val="DDBFCD"/>
@@ -16184,6 +16881,7 @@
               </a:defRPr>
             </a:lvl4pPr>
             <a:lvl5pPr algn="l">
+              <a:buNone/>
               <a:defRPr sz="1500" b="0">
                 <a:solidFill>
                   <a:srgbClr val="DDBFCD"/>
@@ -16194,6 +16892,7 @@
               </a:defRPr>
             </a:lvl5pPr>
             <a:lvl6pPr algn="l">
+              <a:buNone/>
               <a:defRPr sz="1500" b="0">
                 <a:solidFill>
                   <a:srgbClr val="DDBFCD"/>
@@ -16204,6 +16903,7 @@
               </a:defRPr>
             </a:lvl6pPr>
             <a:lvl7pPr algn="l">
+              <a:buNone/>
               <a:defRPr sz="1500" b="0">
                 <a:solidFill>
                   <a:srgbClr val="DDBFCD"/>
@@ -16214,6 +16914,7 @@
               </a:defRPr>
             </a:lvl7pPr>
             <a:lvl8pPr algn="l">
+              <a:buNone/>
               <a:defRPr sz="1500" b="0">
                 <a:solidFill>
                   <a:srgbClr val="DDBFCD"/>
@@ -16224,6 +16925,7 @@
               </a:defRPr>
             </a:lvl8pPr>
             <a:lvl9pPr algn="l">
+              <a:buNone/>
               <a:defRPr sz="1500" b="0">
                 <a:solidFill>
                   <a:srgbClr val="DDBFCD"/>
@@ -16236,6 +16938,7 @@
           </a:lstStyle>
           <a:p xmlns:a="http://schemas.openxmlformats.org/drawingml/2006/main">
             <a:pPr algn="l">
+              <a:buNone/>
               <a:defRPr sz="1500" b="0">
                 <a:solidFill>
                   <a:srgbClr val="DDBFCD"/>
@@ -16331,6 +17034,7 @@
               </a:defRPr>
             </a:defPPr>
             <a:lvl1pPr algn="l">
+              <a:buNone/>
               <a:defRPr sz="3300" b="1">
                 <a:solidFill>
                   <a:srgbClr val="4A0221"/>
@@ -16341,6 +17045,7 @@
               </a:defRPr>
             </a:lvl1pPr>
             <a:lvl2pPr algn="l">
+              <a:buNone/>
               <a:defRPr sz="3300" b="1">
                 <a:solidFill>
                   <a:srgbClr val="4A0221"/>
@@ -16351,6 +17056,7 @@
               </a:defRPr>
             </a:lvl2pPr>
             <a:lvl3pPr algn="l">
+              <a:buNone/>
               <a:defRPr sz="3300" b="1">
                 <a:solidFill>
                   <a:srgbClr val="4A0221"/>
@@ -16361,6 +17067,7 @@
               </a:defRPr>
             </a:lvl3pPr>
             <a:lvl4pPr algn="l">
+              <a:buNone/>
               <a:defRPr sz="3300" b="1">
                 <a:solidFill>
                   <a:srgbClr val="4A0221"/>
@@ -16371,6 +17078,7 @@
               </a:defRPr>
             </a:lvl4pPr>
             <a:lvl5pPr algn="l">
+              <a:buNone/>
               <a:defRPr sz="3300" b="1">
                 <a:solidFill>
                   <a:srgbClr val="4A0221"/>
@@ -16381,6 +17089,7 @@
               </a:defRPr>
             </a:lvl5pPr>
             <a:lvl6pPr algn="l">
+              <a:buNone/>
               <a:defRPr sz="3300" b="1">
                 <a:solidFill>
                   <a:srgbClr val="4A0221"/>
@@ -16391,6 +17100,7 @@
               </a:defRPr>
             </a:lvl6pPr>
             <a:lvl7pPr algn="l">
+              <a:buNone/>
               <a:defRPr sz="3300" b="1">
                 <a:solidFill>
                   <a:srgbClr val="4A0221"/>
@@ -16401,6 +17111,7 @@
               </a:defRPr>
             </a:lvl7pPr>
             <a:lvl8pPr algn="l">
+              <a:buNone/>
               <a:defRPr sz="3300" b="1">
                 <a:solidFill>
                   <a:srgbClr val="4A0221"/>
@@ -16411,6 +17122,7 @@
               </a:defRPr>
             </a:lvl8pPr>
             <a:lvl9pPr algn="l">
+              <a:buNone/>
               <a:defRPr sz="3300" b="1">
                 <a:solidFill>
                   <a:srgbClr val="4A0221"/>
@@ -16423,6 +17135,7 @@
           </a:lstStyle>
           <a:p xmlns:a="http://schemas.openxmlformats.org/drawingml/2006/main">
             <a:pPr algn="l">
+              <a:buNone/>
               <a:defRPr sz="3300" b="1">
                 <a:solidFill>
                   <a:srgbClr val="4A0221"/>
@@ -16489,6 +17202,7 @@
               </a:defRPr>
             </a:defPPr>
             <a:lvl1pPr algn="r">
+              <a:buNone/>
               <a:defRPr sz="1200" b="0">
                 <a:solidFill>
                   <a:srgbClr val="756873"/>
@@ -16499,6 +17213,7 @@
               </a:defRPr>
             </a:lvl1pPr>
             <a:lvl2pPr algn="r">
+              <a:buNone/>
               <a:defRPr sz="1200" b="0">
                 <a:solidFill>
                   <a:srgbClr val="756873"/>
@@ -16509,6 +17224,7 @@
               </a:defRPr>
             </a:lvl2pPr>
             <a:lvl3pPr algn="r">
+              <a:buNone/>
               <a:defRPr sz="1200" b="0">
                 <a:solidFill>
                   <a:srgbClr val="756873"/>
@@ -16519,6 +17235,7 @@
               </a:defRPr>
             </a:lvl3pPr>
             <a:lvl4pPr algn="r">
+              <a:buNone/>
               <a:defRPr sz="1200" b="0">
                 <a:solidFill>
                   <a:srgbClr val="756873"/>
@@ -16529,6 +17246,7 @@
               </a:defRPr>
             </a:lvl4pPr>
             <a:lvl5pPr algn="r">
+              <a:buNone/>
               <a:defRPr sz="1200" b="0">
                 <a:solidFill>
                   <a:srgbClr val="756873"/>
@@ -16539,6 +17257,7 @@
               </a:defRPr>
             </a:lvl5pPr>
             <a:lvl6pPr algn="r">
+              <a:buNone/>
               <a:defRPr sz="1200" b="0">
                 <a:solidFill>
                   <a:srgbClr val="756873"/>
@@ -16549,6 +17268,7 @@
               </a:defRPr>
             </a:lvl6pPr>
             <a:lvl7pPr algn="r">
+              <a:buNone/>
               <a:defRPr sz="1200" b="0">
                 <a:solidFill>
                   <a:srgbClr val="756873"/>
@@ -16559,6 +17279,7 @@
               </a:defRPr>
             </a:lvl7pPr>
             <a:lvl8pPr algn="r">
+              <a:buNone/>
               <a:defRPr sz="1200" b="0">
                 <a:solidFill>
                   <a:srgbClr val="756873"/>
@@ -16569,6 +17290,7 @@
               </a:defRPr>
             </a:lvl8pPr>
             <a:lvl9pPr algn="r">
+              <a:buNone/>
               <a:defRPr sz="1200" b="0">
                 <a:solidFill>
                   <a:srgbClr val="756873"/>
@@ -16581,6 +17303,7 @@
           </a:lstStyle>
           <a:p xmlns:a="http://schemas.openxmlformats.org/drawingml/2006/main">
             <a:pPr algn="r">
+              <a:buNone/>
               <a:defRPr sz="1200" b="0">
                 <a:solidFill>
                   <a:srgbClr val="756873"/>
@@ -16647,6 +17370,7 @@
               </a:defRPr>
             </a:defPPr>
             <a:lvl1pPr algn="l">
+              <a:buNone/>
               <a:defRPr sz="2775" b="1">
                 <a:solidFill>
                   <a:srgbClr val="4A0221"/>
@@ -16657,6 +17381,7 @@
               </a:defRPr>
             </a:lvl1pPr>
             <a:lvl2pPr algn="l">
+              <a:buNone/>
               <a:defRPr sz="2775" b="1">
                 <a:solidFill>
                   <a:srgbClr val="4A0221"/>
@@ -16667,6 +17392,7 @@
               </a:defRPr>
             </a:lvl2pPr>
             <a:lvl3pPr algn="l">
+              <a:buNone/>
               <a:defRPr sz="2775" b="1">
                 <a:solidFill>
                   <a:srgbClr val="4A0221"/>
@@ -16677,6 +17403,7 @@
               </a:defRPr>
             </a:lvl3pPr>
             <a:lvl4pPr algn="l">
+              <a:buNone/>
               <a:defRPr sz="2775" b="1">
                 <a:solidFill>
                   <a:srgbClr val="4A0221"/>
@@ -16687,6 +17414,7 @@
               </a:defRPr>
             </a:lvl4pPr>
             <a:lvl5pPr algn="l">
+              <a:buNone/>
               <a:defRPr sz="2775" b="1">
                 <a:solidFill>
                   <a:srgbClr val="4A0221"/>
@@ -16697,6 +17425,7 @@
               </a:defRPr>
             </a:lvl5pPr>
             <a:lvl6pPr algn="l">
+              <a:buNone/>
               <a:defRPr sz="2775" b="1">
                 <a:solidFill>
                   <a:srgbClr val="4A0221"/>
@@ -16707,6 +17436,7 @@
               </a:defRPr>
             </a:lvl6pPr>
             <a:lvl7pPr algn="l">
+              <a:buNone/>
               <a:defRPr sz="2775" b="1">
                 <a:solidFill>
                   <a:srgbClr val="4A0221"/>
@@ -16717,6 +17447,7 @@
               </a:defRPr>
             </a:lvl7pPr>
             <a:lvl8pPr algn="l">
+              <a:buNone/>
               <a:defRPr sz="2775" b="1">
                 <a:solidFill>
                   <a:srgbClr val="4A0221"/>
@@ -16727,6 +17458,7 @@
               </a:defRPr>
             </a:lvl8pPr>
             <a:lvl9pPr algn="l">
+              <a:buNone/>
               <a:defRPr sz="2775" b="1">
                 <a:solidFill>
                   <a:srgbClr val="4A0221"/>
@@ -16739,6 +17471,7 @@
           </a:lstStyle>
           <a:p xmlns:a="http://schemas.openxmlformats.org/drawingml/2006/main">
             <a:pPr algn="l">
+              <a:buNone/>
               <a:defRPr sz="2775" b="1">
                 <a:solidFill>
                   <a:srgbClr val="4A0221"/>
@@ -16805,6 +17538,7 @@
               </a:defRPr>
             </a:defPPr>
             <a:lvl1pPr algn="l">
+              <a:buNone/>
               <a:defRPr sz="3225" b="1">
                 <a:solidFill>
                   <a:srgbClr val="A31551"/>
@@ -16815,6 +17549,7 @@
               </a:defRPr>
             </a:lvl1pPr>
             <a:lvl2pPr algn="l">
+              <a:buNone/>
               <a:defRPr sz="3225" b="1">
                 <a:solidFill>
                   <a:srgbClr val="A31551"/>
@@ -16825,6 +17560,7 @@
               </a:defRPr>
             </a:lvl2pPr>
             <a:lvl3pPr algn="l">
+              <a:buNone/>
               <a:defRPr sz="3225" b="1">
                 <a:solidFill>
                   <a:srgbClr val="A31551"/>
@@ -16835,6 +17571,7 @@
               </a:defRPr>
             </a:lvl3pPr>
             <a:lvl4pPr algn="l">
+              <a:buNone/>
               <a:defRPr sz="3225" b="1">
                 <a:solidFill>
                   <a:srgbClr val="A31551"/>
@@ -16845,6 +17582,7 @@
               </a:defRPr>
             </a:lvl4pPr>
             <a:lvl5pPr algn="l">
+              <a:buNone/>
               <a:defRPr sz="3225" b="1">
                 <a:solidFill>
                   <a:srgbClr val="A31551"/>
@@ -16855,6 +17593,7 @@
               </a:defRPr>
             </a:lvl5pPr>
             <a:lvl6pPr algn="l">
+              <a:buNone/>
               <a:defRPr sz="3225" b="1">
                 <a:solidFill>
                   <a:srgbClr val="A31551"/>
@@ -16865,6 +17604,7 @@
               </a:defRPr>
             </a:lvl6pPr>
             <a:lvl7pPr algn="l">
+              <a:buNone/>
               <a:defRPr sz="3225" b="1">
                 <a:solidFill>
                   <a:srgbClr val="A31551"/>
@@ -16875,6 +17615,7 @@
               </a:defRPr>
             </a:lvl7pPr>
             <a:lvl8pPr algn="l">
+              <a:buNone/>
               <a:defRPr sz="3225" b="1">
                 <a:solidFill>
                   <a:srgbClr val="A31551"/>
@@ -16885,6 +17626,7 @@
               </a:defRPr>
             </a:lvl8pPr>
             <a:lvl9pPr algn="l">
+              <a:buNone/>
               <a:defRPr sz="3225" b="1">
                 <a:solidFill>
                   <a:srgbClr val="A31551"/>
@@ -16897,6 +17639,7 @@
           </a:lstStyle>
           <a:p xmlns:a="http://schemas.openxmlformats.org/drawingml/2006/main">
             <a:pPr algn="l">
+              <a:buNone/>
               <a:defRPr sz="3225" b="1">
                 <a:solidFill>
                   <a:srgbClr val="A31551"/>
@@ -16963,6 +17706,7 @@
               </a:defRPr>
             </a:defPPr>
             <a:lvl1pPr algn="l">
+              <a:buNone/>
               <a:defRPr sz="2100" b="0">
                 <a:solidFill>
                   <a:srgbClr val="2D2630"/>
@@ -16973,6 +17717,7 @@
               </a:defRPr>
             </a:lvl1pPr>
             <a:lvl2pPr algn="l">
+              <a:buNone/>
               <a:defRPr sz="2100" b="0">
                 <a:solidFill>
                   <a:srgbClr val="2D2630"/>
@@ -16983,6 +17728,7 @@
               </a:defRPr>
             </a:lvl2pPr>
             <a:lvl3pPr algn="l">
+              <a:buNone/>
               <a:defRPr sz="2100" b="0">
                 <a:solidFill>
                   <a:srgbClr val="2D2630"/>
@@ -16993,6 +17739,7 @@
               </a:defRPr>
             </a:lvl3pPr>
             <a:lvl4pPr algn="l">
+              <a:buNone/>
               <a:defRPr sz="2100" b="0">
                 <a:solidFill>
                   <a:srgbClr val="2D2630"/>
@@ -17003,6 +17750,7 @@
               </a:defRPr>
             </a:lvl4pPr>
             <a:lvl5pPr algn="l">
+              <a:buNone/>
               <a:defRPr sz="2100" b="0">
                 <a:solidFill>
                   <a:srgbClr val="2D2630"/>
@@ -17013,6 +17761,7 @@
               </a:defRPr>
             </a:lvl5pPr>
             <a:lvl6pPr algn="l">
+              <a:buNone/>
               <a:defRPr sz="2100" b="0">
                 <a:solidFill>
                   <a:srgbClr val="2D2630"/>
@@ -17023,6 +17772,7 @@
               </a:defRPr>
             </a:lvl6pPr>
             <a:lvl7pPr algn="l">
+              <a:buNone/>
               <a:defRPr sz="2100" b="0">
                 <a:solidFill>
                   <a:srgbClr val="2D2630"/>
@@ -17033,6 +17783,7 @@
               </a:defRPr>
             </a:lvl7pPr>
             <a:lvl8pPr algn="l">
+              <a:buNone/>
               <a:defRPr sz="2100" b="0">
                 <a:solidFill>
                   <a:srgbClr val="2D2630"/>
@@ -17043,6 +17794,7 @@
               </a:defRPr>
             </a:lvl8pPr>
             <a:lvl9pPr algn="l">
+              <a:buNone/>
               <a:defRPr sz="2100" b="0">
                 <a:solidFill>
                   <a:srgbClr val="2D2630"/>
@@ -17055,6 +17807,7 @@
           </a:lstStyle>
           <a:p xmlns:a="http://schemas.openxmlformats.org/drawingml/2006/main">
             <a:pPr algn="l">
+              <a:buNone/>
               <a:defRPr sz="2100" b="0">
                 <a:solidFill>
                   <a:srgbClr val="2D2630"/>
@@ -17121,6 +17874,7 @@
               </a:defRPr>
             </a:defPPr>
             <a:lvl1pPr algn="l">
+              <a:buNone/>
               <a:defRPr sz="2775" b="1">
                 <a:solidFill>
                   <a:srgbClr val="4A0221"/>
@@ -17131,6 +17885,7 @@
               </a:defRPr>
             </a:lvl1pPr>
             <a:lvl2pPr algn="l">
+              <a:buNone/>
               <a:defRPr sz="2775" b="1">
                 <a:solidFill>
                   <a:srgbClr val="4A0221"/>
@@ -17141,6 +17896,7 @@
               </a:defRPr>
             </a:lvl2pPr>
             <a:lvl3pPr algn="l">
+              <a:buNone/>
               <a:defRPr sz="2775" b="1">
                 <a:solidFill>
                   <a:srgbClr val="4A0221"/>
@@ -17151,6 +17907,7 @@
               </a:defRPr>
             </a:lvl3pPr>
             <a:lvl4pPr algn="l">
+              <a:buNone/>
               <a:defRPr sz="2775" b="1">
                 <a:solidFill>
                   <a:srgbClr val="4A0221"/>
@@ -17161,6 +17918,7 @@
               </a:defRPr>
             </a:lvl4pPr>
             <a:lvl5pPr algn="l">
+              <a:buNone/>
               <a:defRPr sz="2775" b="1">
                 <a:solidFill>
                   <a:srgbClr val="4A0221"/>
@@ -17171,6 +17929,7 @@
               </a:defRPr>
             </a:lvl5pPr>
             <a:lvl6pPr algn="l">
+              <a:buNone/>
               <a:defRPr sz="2775" b="1">
                 <a:solidFill>
                   <a:srgbClr val="4A0221"/>
@@ -17181,6 +17940,7 @@
               </a:defRPr>
             </a:lvl6pPr>
             <a:lvl7pPr algn="l">
+              <a:buNone/>
               <a:defRPr sz="2775" b="1">
                 <a:solidFill>
                   <a:srgbClr val="4A0221"/>
@@ -17191,6 +17951,7 @@
               </a:defRPr>
             </a:lvl7pPr>
             <a:lvl8pPr algn="l">
+              <a:buNone/>
               <a:defRPr sz="2775" b="1">
                 <a:solidFill>
                   <a:srgbClr val="4A0221"/>
@@ -17201,6 +17962,7 @@
               </a:defRPr>
             </a:lvl8pPr>
             <a:lvl9pPr algn="l">
+              <a:buNone/>
               <a:defRPr sz="2775" b="1">
                 <a:solidFill>
                   <a:srgbClr val="4A0221"/>
@@ -17213,6 +17975,7 @@
           </a:lstStyle>
           <a:p xmlns:a="http://schemas.openxmlformats.org/drawingml/2006/main">
             <a:pPr algn="l">
+              <a:buNone/>
               <a:defRPr sz="2775" b="1">
                 <a:solidFill>
                   <a:srgbClr val="4A0221"/>
@@ -17279,6 +18042,7 @@
               </a:defRPr>
             </a:defPPr>
             <a:lvl1pPr algn="l">
+              <a:buNone/>
               <a:defRPr sz="3225" b="1">
                 <a:solidFill>
                   <a:srgbClr val="A31551"/>
@@ -17289,6 +18053,7 @@
               </a:defRPr>
             </a:lvl1pPr>
             <a:lvl2pPr algn="l">
+              <a:buNone/>
               <a:defRPr sz="3225" b="1">
                 <a:solidFill>
                   <a:srgbClr val="A31551"/>
@@ -17299,6 +18064,7 @@
               </a:defRPr>
             </a:lvl2pPr>
             <a:lvl3pPr algn="l">
+              <a:buNone/>
               <a:defRPr sz="3225" b="1">
                 <a:solidFill>
                   <a:srgbClr val="A31551"/>
@@ -17309,6 +18075,7 @@
               </a:defRPr>
             </a:lvl3pPr>
             <a:lvl4pPr algn="l">
+              <a:buNone/>
               <a:defRPr sz="3225" b="1">
                 <a:solidFill>
                   <a:srgbClr val="A31551"/>
@@ -17319,6 +18086,7 @@
               </a:defRPr>
             </a:lvl4pPr>
             <a:lvl5pPr algn="l">
+              <a:buNone/>
               <a:defRPr sz="3225" b="1">
                 <a:solidFill>
                   <a:srgbClr val="A31551"/>
@@ -17329,6 +18097,7 @@
               </a:defRPr>
             </a:lvl5pPr>
             <a:lvl6pPr algn="l">
+              <a:buNone/>
               <a:defRPr sz="3225" b="1">
                 <a:solidFill>
                   <a:srgbClr val="A31551"/>
@@ -17339,6 +18108,7 @@
               </a:defRPr>
             </a:lvl6pPr>
             <a:lvl7pPr algn="l">
+              <a:buNone/>
               <a:defRPr sz="3225" b="1">
                 <a:solidFill>
                   <a:srgbClr val="A31551"/>
@@ -17349,6 +18119,7 @@
               </a:defRPr>
             </a:lvl7pPr>
             <a:lvl8pPr algn="l">
+              <a:buNone/>
               <a:defRPr sz="3225" b="1">
                 <a:solidFill>
                   <a:srgbClr val="A31551"/>
@@ -17359,6 +18130,7 @@
               </a:defRPr>
             </a:lvl8pPr>
             <a:lvl9pPr algn="l">
+              <a:buNone/>
               <a:defRPr sz="3225" b="1">
                 <a:solidFill>
                   <a:srgbClr val="A31551"/>
@@ -17371,6 +18143,7 @@
           </a:lstStyle>
           <a:p xmlns:a="http://schemas.openxmlformats.org/drawingml/2006/main">
             <a:pPr algn="l">
+              <a:buNone/>
               <a:defRPr sz="3225" b="1">
                 <a:solidFill>
                   <a:srgbClr val="A31551"/>
@@ -17437,6 +18210,7 @@
               </a:defRPr>
             </a:defPPr>
             <a:lvl1pPr algn="l">
+              <a:buNone/>
               <a:defRPr sz="1500" b="0">
                 <a:solidFill>
                   <a:srgbClr val="756873"/>
@@ -17447,6 +18221,7 @@
               </a:defRPr>
             </a:lvl1pPr>
             <a:lvl2pPr algn="l">
+              <a:buNone/>
               <a:defRPr sz="1500" b="0">
                 <a:solidFill>
                   <a:srgbClr val="756873"/>
@@ -17457,6 +18232,7 @@
               </a:defRPr>
             </a:lvl2pPr>
             <a:lvl3pPr algn="l">
+              <a:buNone/>
               <a:defRPr sz="1500" b="0">
                 <a:solidFill>
                   <a:srgbClr val="756873"/>
@@ -17467,6 +18243,7 @@
               </a:defRPr>
             </a:lvl3pPr>
             <a:lvl4pPr algn="l">
+              <a:buNone/>
               <a:defRPr sz="1500" b="0">
                 <a:solidFill>
                   <a:srgbClr val="756873"/>
@@ -17477,6 +18254,7 @@
               </a:defRPr>
             </a:lvl4pPr>
             <a:lvl5pPr algn="l">
+              <a:buNone/>
               <a:defRPr sz="1500" b="0">
                 <a:solidFill>
                   <a:srgbClr val="756873"/>
@@ -17487,6 +18265,7 @@
               </a:defRPr>
             </a:lvl5pPr>
             <a:lvl6pPr algn="l">
+              <a:buNone/>
               <a:defRPr sz="1500" b="0">
                 <a:solidFill>
                   <a:srgbClr val="756873"/>
@@ -17497,6 +18276,7 @@
               </a:defRPr>
             </a:lvl6pPr>
             <a:lvl7pPr algn="l">
+              <a:buNone/>
               <a:defRPr sz="1500" b="0">
                 <a:solidFill>
                   <a:srgbClr val="756873"/>
@@ -17507,6 +18287,7 @@
               </a:defRPr>
             </a:lvl7pPr>
             <a:lvl8pPr algn="l">
+              <a:buNone/>
               <a:defRPr sz="1500" b="0">
                 <a:solidFill>
                   <a:srgbClr val="756873"/>
@@ -17517,6 +18298,7 @@
               </a:defRPr>
             </a:lvl8pPr>
             <a:lvl9pPr algn="l">
+              <a:buNone/>
               <a:defRPr sz="1500" b="0">
                 <a:solidFill>
                   <a:srgbClr val="756873"/>
@@ -17529,6 +18311,7 @@
           </a:lstStyle>
           <a:p xmlns:a="http://schemas.openxmlformats.org/drawingml/2006/main">
             <a:pPr algn="l">
+              <a:buNone/>
               <a:defRPr sz="1500" b="0">
                 <a:solidFill>
                   <a:srgbClr val="756873"/>
@@ -17624,6 +18407,7 @@
               </a:defRPr>
             </a:defPPr>
             <a:lvl1pPr algn="l">
+              <a:buNone/>
               <a:defRPr sz="3300" b="1">
                 <a:solidFill>
                   <a:srgbClr val="4A0221"/>
@@ -17634,6 +18418,7 @@
               </a:defRPr>
             </a:lvl1pPr>
             <a:lvl2pPr algn="l">
+              <a:buNone/>
               <a:defRPr sz="3300" b="1">
                 <a:solidFill>
                   <a:srgbClr val="4A0221"/>
@@ -17644,6 +18429,7 @@
               </a:defRPr>
             </a:lvl2pPr>
             <a:lvl3pPr algn="l">
+              <a:buNone/>
               <a:defRPr sz="3300" b="1">
                 <a:solidFill>
                   <a:srgbClr val="4A0221"/>
@@ -17654,6 +18440,7 @@
               </a:defRPr>
             </a:lvl3pPr>
             <a:lvl4pPr algn="l">
+              <a:buNone/>
               <a:defRPr sz="3300" b="1">
                 <a:solidFill>
                   <a:srgbClr val="4A0221"/>
@@ -17664,6 +18451,7 @@
               </a:defRPr>
             </a:lvl4pPr>
             <a:lvl5pPr algn="l">
+              <a:buNone/>
               <a:defRPr sz="3300" b="1">
                 <a:solidFill>
                   <a:srgbClr val="4A0221"/>
@@ -17674,6 +18462,7 @@
               </a:defRPr>
             </a:lvl5pPr>
             <a:lvl6pPr algn="l">
+              <a:buNone/>
               <a:defRPr sz="3300" b="1">
                 <a:solidFill>
                   <a:srgbClr val="4A0221"/>
@@ -17684,6 +18473,7 @@
               </a:defRPr>
             </a:lvl6pPr>
             <a:lvl7pPr algn="l">
+              <a:buNone/>
               <a:defRPr sz="3300" b="1">
                 <a:solidFill>
                   <a:srgbClr val="4A0221"/>
@@ -17694,6 +18484,7 @@
               </a:defRPr>
             </a:lvl7pPr>
             <a:lvl8pPr algn="l">
+              <a:buNone/>
               <a:defRPr sz="3300" b="1">
                 <a:solidFill>
                   <a:srgbClr val="4A0221"/>
@@ -17704,6 +18495,7 @@
               </a:defRPr>
             </a:lvl8pPr>
             <a:lvl9pPr algn="l">
+              <a:buNone/>
               <a:defRPr sz="3300" b="1">
                 <a:solidFill>
                   <a:srgbClr val="4A0221"/>
@@ -17716,6 +18508,7 @@
           </a:lstStyle>
           <a:p xmlns:a="http://schemas.openxmlformats.org/drawingml/2006/main">
             <a:pPr algn="l">
+              <a:buNone/>
               <a:defRPr sz="3300" b="1">
                 <a:solidFill>
                   <a:srgbClr val="4A0221"/>
@@ -17782,6 +18575,7 @@
               </a:defRPr>
             </a:defPPr>
             <a:lvl1pPr algn="r">
+              <a:buNone/>
               <a:defRPr sz="1200" b="0">
                 <a:solidFill>
                   <a:srgbClr val="756873"/>
@@ -17792,6 +18586,7 @@
               </a:defRPr>
             </a:lvl1pPr>
             <a:lvl2pPr algn="r">
+              <a:buNone/>
               <a:defRPr sz="1200" b="0">
                 <a:solidFill>
                   <a:srgbClr val="756873"/>
@@ -17802,6 +18597,7 @@
               </a:defRPr>
             </a:lvl2pPr>
             <a:lvl3pPr algn="r">
+              <a:buNone/>
               <a:defRPr sz="1200" b="0">
                 <a:solidFill>
                   <a:srgbClr val="756873"/>
@@ -17812,6 +18608,7 @@
               </a:defRPr>
             </a:lvl3pPr>
             <a:lvl4pPr algn="r">
+              <a:buNone/>
               <a:defRPr sz="1200" b="0">
                 <a:solidFill>
                   <a:srgbClr val="756873"/>
@@ -17822,6 +18619,7 @@
               </a:defRPr>
             </a:lvl4pPr>
             <a:lvl5pPr algn="r">
+              <a:buNone/>
               <a:defRPr sz="1200" b="0">
                 <a:solidFill>
                   <a:srgbClr val="756873"/>
@@ -17832,6 +18630,7 @@
               </a:defRPr>
             </a:lvl5pPr>
             <a:lvl6pPr algn="r">
+              <a:buNone/>
               <a:defRPr sz="1200" b="0">
                 <a:solidFill>
                   <a:srgbClr val="756873"/>
@@ -17842,6 +18641,7 @@
               </a:defRPr>
             </a:lvl6pPr>
             <a:lvl7pPr algn="r">
+              <a:buNone/>
               <a:defRPr sz="1200" b="0">
                 <a:solidFill>
                   <a:srgbClr val="756873"/>
@@ -17852,6 +18652,7 @@
               </a:defRPr>
             </a:lvl7pPr>
             <a:lvl8pPr algn="r">
+              <a:buNone/>
               <a:defRPr sz="1200" b="0">
                 <a:solidFill>
                   <a:srgbClr val="756873"/>
@@ -17862,6 +18663,7 @@
               </a:defRPr>
             </a:lvl8pPr>
             <a:lvl9pPr algn="r">
+              <a:buNone/>
               <a:defRPr sz="1200" b="0">
                 <a:solidFill>
                   <a:srgbClr val="756873"/>
@@ -17874,6 +18676,7 @@
           </a:lstStyle>
           <a:p xmlns:a="http://schemas.openxmlformats.org/drawingml/2006/main">
             <a:pPr algn="r">
+              <a:buNone/>
               <a:defRPr sz="1200" b="0">
                 <a:solidFill>
                   <a:srgbClr val="756873"/>
@@ -17940,6 +18743,7 @@
               </a:defRPr>
             </a:defPPr>
             <a:lvl1pPr algn="l">
+              <a:buNone/>
               <a:defRPr sz="7800" b="1">
                 <a:solidFill>
                   <a:srgbClr val="A31551"/>
@@ -17950,6 +18754,7 @@
               </a:defRPr>
             </a:lvl1pPr>
             <a:lvl2pPr algn="l">
+              <a:buNone/>
               <a:defRPr sz="7800" b="1">
                 <a:solidFill>
                   <a:srgbClr val="A31551"/>
@@ -17960,6 +18765,7 @@
               </a:defRPr>
             </a:lvl2pPr>
             <a:lvl3pPr algn="l">
+              <a:buNone/>
               <a:defRPr sz="7800" b="1">
                 <a:solidFill>
                   <a:srgbClr val="A31551"/>
@@ -17970,6 +18776,7 @@
               </a:defRPr>
             </a:lvl3pPr>
             <a:lvl4pPr algn="l">
+              <a:buNone/>
               <a:defRPr sz="7800" b="1">
                 <a:solidFill>
                   <a:srgbClr val="A31551"/>
@@ -17980,6 +18787,7 @@
               </a:defRPr>
             </a:lvl4pPr>
             <a:lvl5pPr algn="l">
+              <a:buNone/>
               <a:defRPr sz="7800" b="1">
                 <a:solidFill>
                   <a:srgbClr val="A31551"/>
@@ -17990,6 +18798,7 @@
               </a:defRPr>
             </a:lvl5pPr>
             <a:lvl6pPr algn="l">
+              <a:buNone/>
               <a:defRPr sz="7800" b="1">
                 <a:solidFill>
                   <a:srgbClr val="A31551"/>
@@ -18000,6 +18809,7 @@
               </a:defRPr>
             </a:lvl6pPr>
             <a:lvl7pPr algn="l">
+              <a:buNone/>
               <a:defRPr sz="7800" b="1">
                 <a:solidFill>
                   <a:srgbClr val="A31551"/>
@@ -18010,6 +18820,7 @@
               </a:defRPr>
             </a:lvl7pPr>
             <a:lvl8pPr algn="l">
+              <a:buNone/>
               <a:defRPr sz="7800" b="1">
                 <a:solidFill>
                   <a:srgbClr val="A31551"/>
@@ -18020,6 +18831,7 @@
               </a:defRPr>
             </a:lvl8pPr>
             <a:lvl9pPr algn="l">
+              <a:buNone/>
               <a:defRPr sz="7800" b="1">
                 <a:solidFill>
                   <a:srgbClr val="A31551"/>
@@ -18032,6 +18844,7 @@
           </a:lstStyle>
           <a:p xmlns:a="http://schemas.openxmlformats.org/drawingml/2006/main">
             <a:pPr algn="l">
+              <a:buNone/>
               <a:defRPr sz="7800" b="1">
                 <a:solidFill>
                   <a:srgbClr val="A31551"/>
@@ -18098,6 +18911,7 @@
               </a:defRPr>
             </a:defPPr>
             <a:lvl1pPr algn="l">
+              <a:buNone/>
               <a:defRPr sz="2325" b="1">
                 <a:solidFill>
                   <a:srgbClr val="A31551"/>
@@ -18108,6 +18922,7 @@
               </a:defRPr>
             </a:lvl1pPr>
             <a:lvl2pPr algn="l">
+              <a:buNone/>
               <a:defRPr sz="2325" b="1">
                 <a:solidFill>
                   <a:srgbClr val="A31551"/>
@@ -18118,6 +18933,7 @@
               </a:defRPr>
             </a:lvl2pPr>
             <a:lvl3pPr algn="l">
+              <a:buNone/>
               <a:defRPr sz="2325" b="1">
                 <a:solidFill>
                   <a:srgbClr val="A31551"/>
@@ -18128,6 +18944,7 @@
               </a:defRPr>
             </a:lvl3pPr>
             <a:lvl4pPr algn="l">
+              <a:buNone/>
               <a:defRPr sz="2325" b="1">
                 <a:solidFill>
                   <a:srgbClr val="A31551"/>
@@ -18138,6 +18955,7 @@
               </a:defRPr>
             </a:lvl4pPr>
             <a:lvl5pPr algn="l">
+              <a:buNone/>
               <a:defRPr sz="2325" b="1">
                 <a:solidFill>
                   <a:srgbClr val="A31551"/>
@@ -18148,6 +18966,7 @@
               </a:defRPr>
             </a:lvl5pPr>
             <a:lvl6pPr algn="l">
+              <a:buNone/>
               <a:defRPr sz="2325" b="1">
                 <a:solidFill>
                   <a:srgbClr val="A31551"/>
@@ -18158,6 +18977,7 @@
               </a:defRPr>
             </a:lvl6pPr>
             <a:lvl7pPr algn="l">
+              <a:buNone/>
               <a:defRPr sz="2325" b="1">
                 <a:solidFill>
                   <a:srgbClr val="A31551"/>
@@ -18168,6 +18988,7 @@
               </a:defRPr>
             </a:lvl7pPr>
             <a:lvl8pPr algn="l">
+              <a:buNone/>
               <a:defRPr sz="2325" b="1">
                 <a:solidFill>
                   <a:srgbClr val="A31551"/>
@@ -18178,6 +18999,7 @@
               </a:defRPr>
             </a:lvl8pPr>
             <a:lvl9pPr algn="l">
+              <a:buNone/>
               <a:defRPr sz="2325" b="1">
                 <a:solidFill>
                   <a:srgbClr val="A31551"/>
@@ -18190,6 +19012,7 @@
           </a:lstStyle>
           <a:p xmlns:a="http://schemas.openxmlformats.org/drawingml/2006/main">
             <a:pPr algn="l">
+              <a:buNone/>
               <a:defRPr sz="2325" b="1">
                 <a:solidFill>
                   <a:srgbClr val="A31551"/>
@@ -18256,6 +19079,7 @@
               </a:defRPr>
             </a:defPPr>
             <a:lvl1pPr algn="l">
+              <a:buNone/>
               <a:defRPr sz="2175" b="0">
                 <a:solidFill>
                   <a:srgbClr val="2D2630"/>
@@ -18266,6 +19090,7 @@
               </a:defRPr>
             </a:lvl1pPr>
             <a:lvl2pPr algn="l">
+              <a:buNone/>
               <a:defRPr sz="2175" b="0">
                 <a:solidFill>
                   <a:srgbClr val="2D2630"/>
@@ -18276,6 +19101,7 @@
               </a:defRPr>
             </a:lvl2pPr>
             <a:lvl3pPr algn="l">
+              <a:buNone/>
               <a:defRPr sz="2175" b="0">
                 <a:solidFill>
                   <a:srgbClr val="2D2630"/>
@@ -18286,6 +19112,7 @@
               </a:defRPr>
             </a:lvl3pPr>
             <a:lvl4pPr algn="l">
+              <a:buNone/>
               <a:defRPr sz="2175" b="0">
                 <a:solidFill>
                   <a:srgbClr val="2D2630"/>
@@ -18296,6 +19123,7 @@
               </a:defRPr>
             </a:lvl4pPr>
             <a:lvl5pPr algn="l">
+              <a:buNone/>
               <a:defRPr sz="2175" b="0">
                 <a:solidFill>
                   <a:srgbClr val="2D2630"/>
@@ -18306,6 +19134,7 @@
               </a:defRPr>
             </a:lvl5pPr>
             <a:lvl6pPr algn="l">
+              <a:buNone/>
               <a:defRPr sz="2175" b="0">
                 <a:solidFill>
                   <a:srgbClr val="2D2630"/>
@@ -18316,6 +19145,7 @@
               </a:defRPr>
             </a:lvl6pPr>
             <a:lvl7pPr algn="l">
+              <a:buNone/>
               <a:defRPr sz="2175" b="0">
                 <a:solidFill>
                   <a:srgbClr val="2D2630"/>
@@ -18326,6 +19156,7 @@
               </a:defRPr>
             </a:lvl7pPr>
             <a:lvl8pPr algn="l">
+              <a:buNone/>
               <a:defRPr sz="2175" b="0">
                 <a:solidFill>
                   <a:srgbClr val="2D2630"/>
@@ -18336,6 +19167,7 @@
               </a:defRPr>
             </a:lvl8pPr>
             <a:lvl9pPr algn="l">
+              <a:buNone/>
               <a:defRPr sz="2175" b="0">
                 <a:solidFill>
                   <a:srgbClr val="2D2630"/>
@@ -18348,6 +19180,7 @@
           </a:lstStyle>
           <a:p xmlns:a="http://schemas.openxmlformats.org/drawingml/2006/main">
             <a:pPr algn="l">
+              <a:buNone/>
               <a:defRPr sz="2175" b="0">
                 <a:solidFill>
                   <a:srgbClr val="2D2630"/>
@@ -18414,6 +19247,7 @@
               </a:defRPr>
             </a:defPPr>
             <a:lvl1pPr algn="l">
+              <a:buNone/>
               <a:defRPr sz="2325" b="1">
                 <a:solidFill>
                   <a:srgbClr val="A31551"/>
@@ -18424,6 +19258,7 @@
               </a:defRPr>
             </a:lvl1pPr>
             <a:lvl2pPr algn="l">
+              <a:buNone/>
               <a:defRPr sz="2325" b="1">
                 <a:solidFill>
                   <a:srgbClr val="A31551"/>
@@ -18434,6 +19269,7 @@
               </a:defRPr>
             </a:lvl2pPr>
             <a:lvl3pPr algn="l">
+              <a:buNone/>
               <a:defRPr sz="2325" b="1">
                 <a:solidFill>
                   <a:srgbClr val="A31551"/>
@@ -18444,6 +19280,7 @@
               </a:defRPr>
             </a:lvl3pPr>
             <a:lvl4pPr algn="l">
+              <a:buNone/>
               <a:defRPr sz="2325" b="1">
                 <a:solidFill>
                   <a:srgbClr val="A31551"/>
@@ -18454,6 +19291,7 @@
               </a:defRPr>
             </a:lvl4pPr>
             <a:lvl5pPr algn="l">
+              <a:buNone/>
               <a:defRPr sz="2325" b="1">
                 <a:solidFill>
                   <a:srgbClr val="A31551"/>
@@ -18464,6 +19302,7 @@
               </a:defRPr>
             </a:lvl5pPr>
             <a:lvl6pPr algn="l">
+              <a:buNone/>
               <a:defRPr sz="2325" b="1">
                 <a:solidFill>
                   <a:srgbClr val="A31551"/>
@@ -18474,6 +19313,7 @@
               </a:defRPr>
             </a:lvl6pPr>
             <a:lvl7pPr algn="l">
+              <a:buNone/>
               <a:defRPr sz="2325" b="1">
                 <a:solidFill>
                   <a:srgbClr val="A31551"/>
@@ -18484,6 +19324,7 @@
               </a:defRPr>
             </a:lvl7pPr>
             <a:lvl8pPr algn="l">
+              <a:buNone/>
               <a:defRPr sz="2325" b="1">
                 <a:solidFill>
                   <a:srgbClr val="A31551"/>
@@ -18494,6 +19335,7 @@
               </a:defRPr>
             </a:lvl8pPr>
             <a:lvl9pPr algn="l">
+              <a:buNone/>
               <a:defRPr sz="2325" b="1">
                 <a:solidFill>
                   <a:srgbClr val="A31551"/>
@@ -18506,6 +19348,7 @@
           </a:lstStyle>
           <a:p xmlns:a="http://schemas.openxmlformats.org/drawingml/2006/main">
             <a:pPr algn="l">
+              <a:buNone/>
               <a:defRPr sz="2325" b="1">
                 <a:solidFill>
                   <a:srgbClr val="A31551"/>
@@ -18572,6 +19415,7 @@
               </a:defRPr>
             </a:defPPr>
             <a:lvl1pPr algn="l">
+              <a:buNone/>
               <a:defRPr sz="2175" b="0">
                 <a:solidFill>
                   <a:srgbClr val="2D2630"/>
@@ -18582,6 +19426,7 @@
               </a:defRPr>
             </a:lvl1pPr>
             <a:lvl2pPr algn="l">
+              <a:buNone/>
               <a:defRPr sz="2175" b="0">
                 <a:solidFill>
                   <a:srgbClr val="2D2630"/>
@@ -18592,6 +19437,7 @@
               </a:defRPr>
             </a:lvl2pPr>
             <a:lvl3pPr algn="l">
+              <a:buNone/>
               <a:defRPr sz="2175" b="0">
                 <a:solidFill>
                   <a:srgbClr val="2D2630"/>
@@ -18602,6 +19448,7 @@
               </a:defRPr>
             </a:lvl3pPr>
             <a:lvl4pPr algn="l">
+              <a:buNone/>
               <a:defRPr sz="2175" b="0">
                 <a:solidFill>
                   <a:srgbClr val="2D2630"/>
@@ -18612,6 +19459,7 @@
               </a:defRPr>
             </a:lvl4pPr>
             <a:lvl5pPr algn="l">
+              <a:buNone/>
               <a:defRPr sz="2175" b="0">
                 <a:solidFill>
                   <a:srgbClr val="2D2630"/>
@@ -18622,6 +19470,7 @@
               </a:defRPr>
             </a:lvl5pPr>
             <a:lvl6pPr algn="l">
+              <a:buNone/>
               <a:defRPr sz="2175" b="0">
                 <a:solidFill>
                   <a:srgbClr val="2D2630"/>
@@ -18632,6 +19481,7 @@
               </a:defRPr>
             </a:lvl6pPr>
             <a:lvl7pPr algn="l">
+              <a:buNone/>
               <a:defRPr sz="2175" b="0">
                 <a:solidFill>
                   <a:srgbClr val="2D2630"/>
@@ -18642,6 +19492,7 @@
               </a:defRPr>
             </a:lvl7pPr>
             <a:lvl8pPr algn="l">
+              <a:buNone/>
               <a:defRPr sz="2175" b="0">
                 <a:solidFill>
                   <a:srgbClr val="2D2630"/>
@@ -18652,6 +19503,7 @@
               </a:defRPr>
             </a:lvl8pPr>
             <a:lvl9pPr algn="l">
+              <a:buNone/>
               <a:defRPr sz="2175" b="0">
                 <a:solidFill>
                   <a:srgbClr val="2D2630"/>
@@ -18664,6 +19516,7 @@
           </a:lstStyle>
           <a:p xmlns:a="http://schemas.openxmlformats.org/drawingml/2006/main">
             <a:pPr algn="l">
+              <a:buNone/>
               <a:defRPr sz="2175" b="0">
                 <a:solidFill>
                   <a:srgbClr val="2D2630"/>
@@ -18730,6 +19583,7 @@
               </a:defRPr>
             </a:defPPr>
             <a:lvl1pPr algn="l">
+              <a:buNone/>
               <a:defRPr sz="1500" b="0">
                 <a:solidFill>
                   <a:srgbClr val="756873"/>
@@ -18740,6 +19594,7 @@
               </a:defRPr>
             </a:lvl1pPr>
             <a:lvl2pPr algn="l">
+              <a:buNone/>
               <a:defRPr sz="1500" b="0">
                 <a:solidFill>
                   <a:srgbClr val="756873"/>
@@ -18750,6 +19605,7 @@
               </a:defRPr>
             </a:lvl2pPr>
             <a:lvl3pPr algn="l">
+              <a:buNone/>
               <a:defRPr sz="1500" b="0">
                 <a:solidFill>
                   <a:srgbClr val="756873"/>
@@ -18760,6 +19616,7 @@
               </a:defRPr>
             </a:lvl3pPr>
             <a:lvl4pPr algn="l">
+              <a:buNone/>
               <a:defRPr sz="1500" b="0">
                 <a:solidFill>
                   <a:srgbClr val="756873"/>
@@ -18770,6 +19627,7 @@
               </a:defRPr>
             </a:lvl4pPr>
             <a:lvl5pPr algn="l">
+              <a:buNone/>
               <a:defRPr sz="1500" b="0">
                 <a:solidFill>
                   <a:srgbClr val="756873"/>
@@ -18780,6 +19638,7 @@
               </a:defRPr>
             </a:lvl5pPr>
             <a:lvl6pPr algn="l">
+              <a:buNone/>
               <a:defRPr sz="1500" b="0">
                 <a:solidFill>
                   <a:srgbClr val="756873"/>
@@ -18790,6 +19649,7 @@
               </a:defRPr>
             </a:lvl6pPr>
             <a:lvl7pPr algn="l">
+              <a:buNone/>
               <a:defRPr sz="1500" b="0">
                 <a:solidFill>
                   <a:srgbClr val="756873"/>
@@ -18800,6 +19660,7 @@
               </a:defRPr>
             </a:lvl7pPr>
             <a:lvl8pPr algn="l">
+              <a:buNone/>
               <a:defRPr sz="1500" b="0">
                 <a:solidFill>
                   <a:srgbClr val="756873"/>
@@ -18810,6 +19671,7 @@
               </a:defRPr>
             </a:lvl8pPr>
             <a:lvl9pPr algn="l">
+              <a:buNone/>
               <a:defRPr sz="1500" b="0">
                 <a:solidFill>
                   <a:srgbClr val="756873"/>
@@ -18822,6 +19684,7 @@
           </a:lstStyle>
           <a:p xmlns:a="http://schemas.openxmlformats.org/drawingml/2006/main">
             <a:pPr algn="l">
+              <a:buNone/>
               <a:defRPr sz="1500" b="0">
                 <a:solidFill>
                   <a:srgbClr val="756873"/>
@@ -18917,6 +19780,7 @@
               </a:defRPr>
             </a:defPPr>
             <a:lvl1pPr algn="l">
+              <a:buNone/>
               <a:defRPr sz="3300" b="1">
                 <a:solidFill>
                   <a:srgbClr val="4A0221"/>
@@ -18927,6 +19791,7 @@
               </a:defRPr>
             </a:lvl1pPr>
             <a:lvl2pPr algn="l">
+              <a:buNone/>
               <a:defRPr sz="3300" b="1">
                 <a:solidFill>
                   <a:srgbClr val="4A0221"/>
@@ -18937,6 +19802,7 @@
               </a:defRPr>
             </a:lvl2pPr>
             <a:lvl3pPr algn="l">
+              <a:buNone/>
               <a:defRPr sz="3300" b="1">
                 <a:solidFill>
                   <a:srgbClr val="4A0221"/>
@@ -18947,6 +19813,7 @@
               </a:defRPr>
             </a:lvl3pPr>
             <a:lvl4pPr algn="l">
+              <a:buNone/>
               <a:defRPr sz="3300" b="1">
                 <a:solidFill>
                   <a:srgbClr val="4A0221"/>
@@ -18957,6 +19824,7 @@
               </a:defRPr>
             </a:lvl4pPr>
             <a:lvl5pPr algn="l">
+              <a:buNone/>
               <a:defRPr sz="3300" b="1">
                 <a:solidFill>
                   <a:srgbClr val="4A0221"/>
@@ -18967,6 +19835,7 @@
               </a:defRPr>
             </a:lvl5pPr>
             <a:lvl6pPr algn="l">
+              <a:buNone/>
               <a:defRPr sz="3300" b="1">
                 <a:solidFill>
                   <a:srgbClr val="4A0221"/>
@@ -18977,6 +19846,7 @@
               </a:defRPr>
             </a:lvl6pPr>
             <a:lvl7pPr algn="l">
+              <a:buNone/>
               <a:defRPr sz="3300" b="1">
                 <a:solidFill>
                   <a:srgbClr val="4A0221"/>
@@ -18987,6 +19857,7 @@
               </a:defRPr>
             </a:lvl7pPr>
             <a:lvl8pPr algn="l">
+              <a:buNone/>
               <a:defRPr sz="3300" b="1">
                 <a:solidFill>
                   <a:srgbClr val="4A0221"/>
@@ -18997,6 +19868,7 @@
               </a:defRPr>
             </a:lvl8pPr>
             <a:lvl9pPr algn="l">
+              <a:buNone/>
               <a:defRPr sz="3300" b="1">
                 <a:solidFill>
                   <a:srgbClr val="4A0221"/>
@@ -19009,6 +19881,7 @@
           </a:lstStyle>
           <a:p xmlns:a="http://schemas.openxmlformats.org/drawingml/2006/main">
             <a:pPr algn="l">
+              <a:buNone/>
               <a:defRPr sz="3300" b="1">
                 <a:solidFill>
                   <a:srgbClr val="4A0221"/>
@@ -19075,6 +19948,7 @@
               </a:defRPr>
             </a:defPPr>
             <a:lvl1pPr algn="r">
+              <a:buNone/>
               <a:defRPr sz="1200" b="0">
                 <a:solidFill>
                   <a:srgbClr val="756873"/>
@@ -19085,6 +19959,7 @@
               </a:defRPr>
             </a:lvl1pPr>
             <a:lvl2pPr algn="r">
+              <a:buNone/>
               <a:defRPr sz="1200" b="0">
                 <a:solidFill>
                   <a:srgbClr val="756873"/>
@@ -19095,6 +19970,7 @@
               </a:defRPr>
             </a:lvl2pPr>
             <a:lvl3pPr algn="r">
+              <a:buNone/>
               <a:defRPr sz="1200" b="0">
                 <a:solidFill>
                   <a:srgbClr val="756873"/>
@@ -19105,6 +19981,7 @@
               </a:defRPr>
             </a:lvl3pPr>
             <a:lvl4pPr algn="r">
+              <a:buNone/>
               <a:defRPr sz="1200" b="0">
                 <a:solidFill>
                   <a:srgbClr val="756873"/>
@@ -19115,6 +19992,7 @@
               </a:defRPr>
             </a:lvl4pPr>
             <a:lvl5pPr algn="r">
+              <a:buNone/>
               <a:defRPr sz="1200" b="0">
                 <a:solidFill>
                   <a:srgbClr val="756873"/>
@@ -19125,6 +20003,7 @@
               </a:defRPr>
             </a:lvl5pPr>
             <a:lvl6pPr algn="r">
+              <a:buNone/>
               <a:defRPr sz="1200" b="0">
                 <a:solidFill>
                   <a:srgbClr val="756873"/>
@@ -19135,6 +20014,7 @@
               </a:defRPr>
             </a:lvl6pPr>
             <a:lvl7pPr algn="r">
+              <a:buNone/>
               <a:defRPr sz="1200" b="0">
                 <a:solidFill>
                   <a:srgbClr val="756873"/>
@@ -19145,6 +20025,7 @@
               </a:defRPr>
             </a:lvl7pPr>
             <a:lvl8pPr algn="r">
+              <a:buNone/>
               <a:defRPr sz="1200" b="0">
                 <a:solidFill>
                   <a:srgbClr val="756873"/>
@@ -19155,6 +20036,7 @@
               </a:defRPr>
             </a:lvl8pPr>
             <a:lvl9pPr algn="r">
+              <a:buNone/>
               <a:defRPr sz="1200" b="0">
                 <a:solidFill>
                   <a:srgbClr val="756873"/>
@@ -19167,6 +20049,7 @@
           </a:lstStyle>
           <a:p xmlns:a="http://schemas.openxmlformats.org/drawingml/2006/main">
             <a:pPr algn="r">
+              <a:buNone/>
               <a:defRPr sz="1200" b="0">
                 <a:solidFill>
                   <a:srgbClr val="756873"/>
@@ -19233,6 +20116,7 @@
               </a:defRPr>
             </a:defPPr>
             <a:lvl1pPr algn="l">
+              <a:buNone/>
               <a:defRPr sz="2850" b="1">
                 <a:solidFill>
                   <a:srgbClr val="A31551"/>
@@ -19243,6 +20127,7 @@
               </a:defRPr>
             </a:lvl1pPr>
             <a:lvl2pPr algn="l">
+              <a:buNone/>
               <a:defRPr sz="2850" b="1">
                 <a:solidFill>
                   <a:srgbClr val="A31551"/>
@@ -19253,6 +20138,7 @@
               </a:defRPr>
             </a:lvl2pPr>
             <a:lvl3pPr algn="l">
+              <a:buNone/>
               <a:defRPr sz="2850" b="1">
                 <a:solidFill>
                   <a:srgbClr val="A31551"/>
@@ -19263,6 +20149,7 @@
               </a:defRPr>
             </a:lvl3pPr>
             <a:lvl4pPr algn="l">
+              <a:buNone/>
               <a:defRPr sz="2850" b="1">
                 <a:solidFill>
                   <a:srgbClr val="A31551"/>
@@ -19273,6 +20160,7 @@
               </a:defRPr>
             </a:lvl4pPr>
             <a:lvl5pPr algn="l">
+              <a:buNone/>
               <a:defRPr sz="2850" b="1">
                 <a:solidFill>
                   <a:srgbClr val="A31551"/>
@@ -19283,6 +20171,7 @@
               </a:defRPr>
             </a:lvl5pPr>
             <a:lvl6pPr algn="l">
+              <a:buNone/>
               <a:defRPr sz="2850" b="1">
                 <a:solidFill>
                   <a:srgbClr val="A31551"/>
@@ -19293,6 +20182,7 @@
               </a:defRPr>
             </a:lvl6pPr>
             <a:lvl7pPr algn="l">
+              <a:buNone/>
               <a:defRPr sz="2850" b="1">
                 <a:solidFill>
                   <a:srgbClr val="A31551"/>
@@ -19303,6 +20193,7 @@
               </a:defRPr>
             </a:lvl7pPr>
             <a:lvl8pPr algn="l">
+              <a:buNone/>
               <a:defRPr sz="2850" b="1">
                 <a:solidFill>
                   <a:srgbClr val="A31551"/>
@@ -19313,6 +20204,7 @@
               </a:defRPr>
             </a:lvl8pPr>
             <a:lvl9pPr algn="l">
+              <a:buNone/>
               <a:defRPr sz="2850" b="1">
                 <a:solidFill>
                   <a:srgbClr val="A31551"/>
@@ -19325,6 +20217,7 @@
           </a:lstStyle>
           <a:p xmlns:a="http://schemas.openxmlformats.org/drawingml/2006/main">
             <a:pPr algn="l">
+              <a:buNone/>
               <a:defRPr sz="2850" b="1">
                 <a:solidFill>
                   <a:srgbClr val="A31551"/>
@@ -19391,6 +20284,7 @@
               </a:defRPr>
             </a:defPPr>
             <a:lvl1pPr algn="l">
+              <a:buNone/>
               <a:defRPr sz="2325" b="0">
                 <a:solidFill>
                   <a:srgbClr val="2D2630"/>
@@ -19401,6 +20295,7 @@
               </a:defRPr>
             </a:lvl1pPr>
             <a:lvl2pPr algn="l">
+              <a:buNone/>
               <a:defRPr sz="2325" b="0">
                 <a:solidFill>
                   <a:srgbClr val="2D2630"/>
@@ -19411,6 +20306,7 @@
               </a:defRPr>
             </a:lvl2pPr>
             <a:lvl3pPr algn="l">
+              <a:buNone/>
               <a:defRPr sz="2325" b="0">
                 <a:solidFill>
                   <a:srgbClr val="2D2630"/>
@@ -19421,6 +20317,7 @@
               </a:defRPr>
             </a:lvl3pPr>
             <a:lvl4pPr algn="l">
+              <a:buNone/>
               <a:defRPr sz="2325" b="0">
                 <a:solidFill>
                   <a:srgbClr val="2D2630"/>
@@ -19431,6 +20328,7 @@
               </a:defRPr>
             </a:lvl4pPr>
             <a:lvl5pPr algn="l">
+              <a:buNone/>
               <a:defRPr sz="2325" b="0">
                 <a:solidFill>
                   <a:srgbClr val="2D2630"/>
@@ -19441,6 +20339,7 @@
               </a:defRPr>
             </a:lvl5pPr>
             <a:lvl6pPr algn="l">
+              <a:buNone/>
               <a:defRPr sz="2325" b="0">
                 <a:solidFill>
                   <a:srgbClr val="2D2630"/>
@@ -19451,6 +20350,7 @@
               </a:defRPr>
             </a:lvl6pPr>
             <a:lvl7pPr algn="l">
+              <a:buNone/>
               <a:defRPr sz="2325" b="0">
                 <a:solidFill>
                   <a:srgbClr val="2D2630"/>
@@ -19461,6 +20361,7 @@
               </a:defRPr>
             </a:lvl7pPr>
             <a:lvl8pPr algn="l">
+              <a:buNone/>
               <a:defRPr sz="2325" b="0">
                 <a:solidFill>
                   <a:srgbClr val="2D2630"/>
@@ -19471,6 +20372,7 @@
               </a:defRPr>
             </a:lvl8pPr>
             <a:lvl9pPr algn="l">
+              <a:buNone/>
               <a:defRPr sz="2325" b="0">
                 <a:solidFill>
                   <a:srgbClr val="2D2630"/>
@@ -19483,6 +20385,7 @@
           </a:lstStyle>
           <a:p xmlns:a="http://schemas.openxmlformats.org/drawingml/2006/main">
             <a:pPr algn="l">
+              <a:buNone/>
               <a:defRPr sz="2325" b="0">
                 <a:solidFill>
                   <a:srgbClr val="2D2630"/>
@@ -19549,6 +20452,7 @@
               </a:defRPr>
             </a:defPPr>
             <a:lvl1pPr algn="l">
+              <a:buNone/>
               <a:defRPr sz="2850" b="1">
                 <a:solidFill>
                   <a:srgbClr val="A31551"/>
@@ -19559,6 +20463,7 @@
               </a:defRPr>
             </a:lvl1pPr>
             <a:lvl2pPr algn="l">
+              <a:buNone/>
               <a:defRPr sz="2850" b="1">
                 <a:solidFill>
                   <a:srgbClr val="A31551"/>
@@ -19569,6 +20474,7 @@
               </a:defRPr>
             </a:lvl2pPr>
             <a:lvl3pPr algn="l">
+              <a:buNone/>
               <a:defRPr sz="2850" b="1">
                 <a:solidFill>
                   <a:srgbClr val="A31551"/>
@@ -19579,6 +20485,7 @@
               </a:defRPr>
             </a:lvl3pPr>
             <a:lvl4pPr algn="l">
+              <a:buNone/>
               <a:defRPr sz="2850" b="1">
                 <a:solidFill>
                   <a:srgbClr val="A31551"/>
@@ -19589,6 +20496,7 @@
               </a:defRPr>
             </a:lvl4pPr>
             <a:lvl5pPr algn="l">
+              <a:buNone/>
               <a:defRPr sz="2850" b="1">
                 <a:solidFill>
                   <a:srgbClr val="A31551"/>
@@ -19599,6 +20507,7 @@
               </a:defRPr>
             </a:lvl5pPr>
             <a:lvl6pPr algn="l">
+              <a:buNone/>
               <a:defRPr sz="2850" b="1">
                 <a:solidFill>
                   <a:srgbClr val="A31551"/>
@@ -19609,6 +20518,7 @@
               </a:defRPr>
             </a:lvl6pPr>
             <a:lvl7pPr algn="l">
+              <a:buNone/>
               <a:defRPr sz="2850" b="1">
                 <a:solidFill>
                   <a:srgbClr val="A31551"/>
@@ -19619,6 +20529,7 @@
               </a:defRPr>
             </a:lvl7pPr>
             <a:lvl8pPr algn="l">
+              <a:buNone/>
               <a:defRPr sz="2850" b="1">
                 <a:solidFill>
                   <a:srgbClr val="A31551"/>
@@ -19629,6 +20540,7 @@
               </a:defRPr>
             </a:lvl8pPr>
             <a:lvl9pPr algn="l">
+              <a:buNone/>
               <a:defRPr sz="2850" b="1">
                 <a:solidFill>
                   <a:srgbClr val="A31551"/>
@@ -19641,6 +20553,7 @@
           </a:lstStyle>
           <a:p xmlns:a="http://schemas.openxmlformats.org/drawingml/2006/main">
             <a:pPr algn="l">
+              <a:buNone/>
               <a:defRPr sz="2850" b="1">
                 <a:solidFill>
                   <a:srgbClr val="A31551"/>
@@ -19707,6 +20620,7 @@
               </a:defRPr>
             </a:defPPr>
             <a:lvl1pPr algn="l">
+              <a:buNone/>
               <a:defRPr sz="2325" b="0">
                 <a:solidFill>
                   <a:srgbClr val="2D2630"/>
@@ -19717,6 +20631,7 @@
               </a:defRPr>
             </a:lvl1pPr>
             <a:lvl2pPr algn="l">
+              <a:buNone/>
               <a:defRPr sz="2325" b="0">
                 <a:solidFill>
                   <a:srgbClr val="2D2630"/>
@@ -19727,6 +20642,7 @@
               </a:defRPr>
             </a:lvl2pPr>
             <a:lvl3pPr algn="l">
+              <a:buNone/>
               <a:defRPr sz="2325" b="0">
                 <a:solidFill>
                   <a:srgbClr val="2D2630"/>
@@ -19737,6 +20653,7 @@
               </a:defRPr>
             </a:lvl3pPr>
             <a:lvl4pPr algn="l">
+              <a:buNone/>
               <a:defRPr sz="2325" b="0">
                 <a:solidFill>
                   <a:srgbClr val="2D2630"/>
@@ -19747,6 +20664,7 @@
               </a:defRPr>
             </a:lvl4pPr>
             <a:lvl5pPr algn="l">
+              <a:buNone/>
               <a:defRPr sz="2325" b="0">
                 <a:solidFill>
                   <a:srgbClr val="2D2630"/>
@@ -19757,6 +20675,7 @@
               </a:defRPr>
             </a:lvl5pPr>
             <a:lvl6pPr algn="l">
+              <a:buNone/>
               <a:defRPr sz="2325" b="0">
                 <a:solidFill>
                   <a:srgbClr val="2D2630"/>
@@ -19767,6 +20686,7 @@
               </a:defRPr>
             </a:lvl6pPr>
             <a:lvl7pPr algn="l">
+              <a:buNone/>
               <a:defRPr sz="2325" b="0">
                 <a:solidFill>
                   <a:srgbClr val="2D2630"/>
@@ -19777,6 +20697,7 @@
               </a:defRPr>
             </a:lvl7pPr>
             <a:lvl8pPr algn="l">
+              <a:buNone/>
               <a:defRPr sz="2325" b="0">
                 <a:solidFill>
                   <a:srgbClr val="2D2630"/>
@@ -19787,6 +20708,7 @@
               </a:defRPr>
             </a:lvl8pPr>
             <a:lvl9pPr algn="l">
+              <a:buNone/>
               <a:defRPr sz="2325" b="0">
                 <a:solidFill>
                   <a:srgbClr val="2D2630"/>
@@ -19799,6 +20721,7 @@
           </a:lstStyle>
           <a:p xmlns:a="http://schemas.openxmlformats.org/drawingml/2006/main">
             <a:pPr algn="l">
+              <a:buNone/>
               <a:defRPr sz="2325" b="0">
                 <a:solidFill>
                   <a:srgbClr val="2D2630"/>
@@ -19865,6 +20788,7 @@
               </a:defRPr>
             </a:defPPr>
             <a:lvl1pPr algn="l">
+              <a:buNone/>
               <a:defRPr sz="2850" b="1">
                 <a:solidFill>
                   <a:srgbClr val="A31551"/>
@@ -19875,6 +20799,7 @@
               </a:defRPr>
             </a:lvl1pPr>
             <a:lvl2pPr algn="l">
+              <a:buNone/>
               <a:defRPr sz="2850" b="1">
                 <a:solidFill>
                   <a:srgbClr val="A31551"/>
@@ -19885,6 +20810,7 @@
               </a:defRPr>
             </a:lvl2pPr>
             <a:lvl3pPr algn="l">
+              <a:buNone/>
               <a:defRPr sz="2850" b="1">
                 <a:solidFill>
                   <a:srgbClr val="A31551"/>
@@ -19895,6 +20821,7 @@
               </a:defRPr>
             </a:lvl3pPr>
             <a:lvl4pPr algn="l">
+              <a:buNone/>
               <a:defRPr sz="2850" b="1">
                 <a:solidFill>
                   <a:srgbClr val="A31551"/>
@@ -19905,6 +20832,7 @@
               </a:defRPr>
             </a:lvl4pPr>
             <a:lvl5pPr algn="l">
+              <a:buNone/>
               <a:defRPr sz="2850" b="1">
                 <a:solidFill>
                   <a:srgbClr val="A31551"/>
@@ -19915,6 +20843,7 @@
               </a:defRPr>
             </a:lvl5pPr>
             <a:lvl6pPr algn="l">
+              <a:buNone/>
               <a:defRPr sz="2850" b="1">
                 <a:solidFill>
                   <a:srgbClr val="A31551"/>
@@ -19925,6 +20854,7 @@
               </a:defRPr>
             </a:lvl6pPr>
             <a:lvl7pPr algn="l">
+              <a:buNone/>
               <a:defRPr sz="2850" b="1">
                 <a:solidFill>
                   <a:srgbClr val="A31551"/>
@@ -19935,6 +20865,7 @@
               </a:defRPr>
             </a:lvl7pPr>
             <a:lvl8pPr algn="l">
+              <a:buNone/>
               <a:defRPr sz="2850" b="1">
                 <a:solidFill>
                   <a:srgbClr val="A31551"/>
@@ -19945,6 +20876,7 @@
               </a:defRPr>
             </a:lvl8pPr>
             <a:lvl9pPr algn="l">
+              <a:buNone/>
               <a:defRPr sz="2850" b="1">
                 <a:solidFill>
                   <a:srgbClr val="A31551"/>
@@ -19957,6 +20889,7 @@
           </a:lstStyle>
           <a:p xmlns:a="http://schemas.openxmlformats.org/drawingml/2006/main">
             <a:pPr algn="l">
+              <a:buNone/>
               <a:defRPr sz="2850" b="1">
                 <a:solidFill>
                   <a:srgbClr val="A31551"/>
@@ -20023,6 +20956,7 @@
               </a:defRPr>
             </a:defPPr>
             <a:lvl1pPr algn="l">
+              <a:buNone/>
               <a:defRPr sz="2325" b="0">
                 <a:solidFill>
                   <a:srgbClr val="2D2630"/>
@@ -20033,6 +20967,7 @@
               </a:defRPr>
             </a:lvl1pPr>
             <a:lvl2pPr algn="l">
+              <a:buNone/>
               <a:defRPr sz="2325" b="0">
                 <a:solidFill>
                   <a:srgbClr val="2D2630"/>
@@ -20043,6 +20978,7 @@
               </a:defRPr>
             </a:lvl2pPr>
             <a:lvl3pPr algn="l">
+              <a:buNone/>
               <a:defRPr sz="2325" b="0">
                 <a:solidFill>
                   <a:srgbClr val="2D2630"/>
@@ -20053,6 +20989,7 @@
               </a:defRPr>
             </a:lvl3pPr>
             <a:lvl4pPr algn="l">
+              <a:buNone/>
               <a:defRPr sz="2325" b="0">
                 <a:solidFill>
                   <a:srgbClr val="2D2630"/>
@@ -20063,6 +21000,7 @@
               </a:defRPr>
             </a:lvl4pPr>
             <a:lvl5pPr algn="l">
+              <a:buNone/>
               <a:defRPr sz="2325" b="0">
                 <a:solidFill>
                   <a:srgbClr val="2D2630"/>
@@ -20073,6 +21011,7 @@
               </a:defRPr>
             </a:lvl5pPr>
             <a:lvl6pPr algn="l">
+              <a:buNone/>
               <a:defRPr sz="2325" b="0">
                 <a:solidFill>
                   <a:srgbClr val="2D2630"/>
@@ -20083,6 +21022,7 @@
               </a:defRPr>
             </a:lvl6pPr>
             <a:lvl7pPr algn="l">
+              <a:buNone/>
               <a:defRPr sz="2325" b="0">
                 <a:solidFill>
                   <a:srgbClr val="2D2630"/>
@@ -20093,6 +21033,7 @@
               </a:defRPr>
             </a:lvl7pPr>
             <a:lvl8pPr algn="l">
+              <a:buNone/>
               <a:defRPr sz="2325" b="0">
                 <a:solidFill>
                   <a:srgbClr val="2D2630"/>
@@ -20103,6 +21044,7 @@
               </a:defRPr>
             </a:lvl8pPr>
             <a:lvl9pPr algn="l">
+              <a:buNone/>
               <a:defRPr sz="2325" b="0">
                 <a:solidFill>
                   <a:srgbClr val="2D2630"/>
@@ -20115,6 +21057,7 @@
           </a:lstStyle>
           <a:p xmlns:a="http://schemas.openxmlformats.org/drawingml/2006/main">
             <a:pPr algn="l">
+              <a:buNone/>
               <a:defRPr sz="2325" b="0">
                 <a:solidFill>
                   <a:srgbClr val="2D2630"/>
@@ -20181,6 +21124,7 @@
               </a:defRPr>
             </a:defPPr>
             <a:lvl1pPr algn="l">
+              <a:buNone/>
               <a:defRPr sz="2850" b="1">
                 <a:solidFill>
                   <a:srgbClr val="A31551"/>
@@ -20191,6 +21135,7 @@
               </a:defRPr>
             </a:lvl1pPr>
             <a:lvl2pPr algn="l">
+              <a:buNone/>
               <a:defRPr sz="2850" b="1">
                 <a:solidFill>
                   <a:srgbClr val="A31551"/>
@@ -20201,6 +21146,7 @@
               </a:defRPr>
             </a:lvl2pPr>
             <a:lvl3pPr algn="l">
+              <a:buNone/>
               <a:defRPr sz="2850" b="1">
                 <a:solidFill>
                   <a:srgbClr val="A31551"/>
@@ -20211,6 +21157,7 @@
               </a:defRPr>
             </a:lvl3pPr>
             <a:lvl4pPr algn="l">
+              <a:buNone/>
               <a:defRPr sz="2850" b="1">
                 <a:solidFill>
                   <a:srgbClr val="A31551"/>
@@ -20221,6 +21168,7 @@
               </a:defRPr>
             </a:lvl4pPr>
             <a:lvl5pPr algn="l">
+              <a:buNone/>
               <a:defRPr sz="2850" b="1">
                 <a:solidFill>
                   <a:srgbClr val="A31551"/>
@@ -20231,6 +21179,7 @@
               </a:defRPr>
             </a:lvl5pPr>
             <a:lvl6pPr algn="l">
+              <a:buNone/>
               <a:defRPr sz="2850" b="1">
                 <a:solidFill>
                   <a:srgbClr val="A31551"/>
@@ -20241,6 +21190,7 @@
               </a:defRPr>
             </a:lvl6pPr>
             <a:lvl7pPr algn="l">
+              <a:buNone/>
               <a:defRPr sz="2850" b="1">
                 <a:solidFill>
                   <a:srgbClr val="A31551"/>
@@ -20251,6 +21201,7 @@
               </a:defRPr>
             </a:lvl7pPr>
             <a:lvl8pPr algn="l">
+              <a:buNone/>
               <a:defRPr sz="2850" b="1">
                 <a:solidFill>
                   <a:srgbClr val="A31551"/>
@@ -20261,6 +21212,7 @@
               </a:defRPr>
             </a:lvl8pPr>
             <a:lvl9pPr algn="l">
+              <a:buNone/>
               <a:defRPr sz="2850" b="1">
                 <a:solidFill>
                   <a:srgbClr val="A31551"/>
@@ -20273,6 +21225,7 @@
           </a:lstStyle>
           <a:p xmlns:a="http://schemas.openxmlformats.org/drawingml/2006/main">
             <a:pPr algn="l">
+              <a:buNone/>
               <a:defRPr sz="2850" b="1">
                 <a:solidFill>
                   <a:srgbClr val="A31551"/>
@@ -20339,6 +21292,7 @@
               </a:defRPr>
             </a:defPPr>
             <a:lvl1pPr algn="l">
+              <a:buNone/>
               <a:defRPr sz="2325" b="0">
                 <a:solidFill>
                   <a:srgbClr val="2D2630"/>
@@ -20349,6 +21303,7 @@
               </a:defRPr>
             </a:lvl1pPr>
             <a:lvl2pPr algn="l">
+              <a:buNone/>
               <a:defRPr sz="2325" b="0">
                 <a:solidFill>
                   <a:srgbClr val="2D2630"/>
@@ -20359,6 +21314,7 @@
               </a:defRPr>
             </a:lvl2pPr>
             <a:lvl3pPr algn="l">
+              <a:buNone/>
               <a:defRPr sz="2325" b="0">
                 <a:solidFill>
                   <a:srgbClr val="2D2630"/>
@@ -20369,6 +21325,7 @@
               </a:defRPr>
             </a:lvl3pPr>
             <a:lvl4pPr algn="l">
+              <a:buNone/>
               <a:defRPr sz="2325" b="0">
                 <a:solidFill>
                   <a:srgbClr val="2D2630"/>
@@ -20379,6 +21336,7 @@
               </a:defRPr>
             </a:lvl4pPr>
             <a:lvl5pPr algn="l">
+              <a:buNone/>
               <a:defRPr sz="2325" b="0">
                 <a:solidFill>
                   <a:srgbClr val="2D2630"/>
@@ -20389,6 +21347,7 @@
               </a:defRPr>
             </a:lvl5pPr>
             <a:lvl6pPr algn="l">
+              <a:buNone/>
               <a:defRPr sz="2325" b="0">
                 <a:solidFill>
                   <a:srgbClr val="2D2630"/>
@@ -20399,6 +21358,7 @@
               </a:defRPr>
             </a:lvl6pPr>
             <a:lvl7pPr algn="l">
+              <a:buNone/>
               <a:defRPr sz="2325" b="0">
                 <a:solidFill>
                   <a:srgbClr val="2D2630"/>
@@ -20409,6 +21369,7 @@
               </a:defRPr>
             </a:lvl7pPr>
             <a:lvl8pPr algn="l">
+              <a:buNone/>
               <a:defRPr sz="2325" b="0">
                 <a:solidFill>
                   <a:srgbClr val="2D2630"/>
@@ -20419,6 +21380,7 @@
               </a:defRPr>
             </a:lvl8pPr>
             <a:lvl9pPr algn="l">
+              <a:buNone/>
               <a:defRPr sz="2325" b="0">
                 <a:solidFill>
                   <a:srgbClr val="2D2630"/>
@@ -20431,6 +21393,7 @@
           </a:lstStyle>
           <a:p xmlns:a="http://schemas.openxmlformats.org/drawingml/2006/main">
             <a:pPr algn="l">
+              <a:buNone/>
               <a:defRPr sz="2325" b="0">
                 <a:solidFill>
                   <a:srgbClr val="2D2630"/>
